--- a/redes_neurais/slides/cap08_Delta_Bar_Delta_e_EDBD.pptx
+++ b/redes_neurais/slides/cap08_Delta_Bar_Delta_e_EDBD.pptx
@@ -19,9 +19,15 @@
     <p:sldId id="267" r:id="rId13"/>
     <p:sldId id="268" r:id="rId14"/>
     <p:sldId id="269" r:id="rId15"/>
+    <p:sldId id="270" r:id="rId16"/>
+    <p:sldId id="271" r:id="rId17"/>
+    <p:sldId id="272" r:id="rId18"/>
+    <p:sldId id="273" r:id="rId19"/>
+    <p:sldId id="274" r:id="rId20"/>
+    <p:sldId id="275" r:id="rId21"/>
   </p:sldIdLst>
   <p:notesMasterIdLst>
-    <p:notesMasterId r:id="rId16"/>
+    <p:notesMasterId r:id="rId22"/>
   </p:notesMasterIdLst>
   <p:sldSz cx="9144000" cy="5143500"/>
   <p:notesSz cx="5143500" cy="9144000"/>
@@ -603,7 +609,7 @@
           <a:p>
             <a:r>
               <a:rPr lang="en-US" dirty="0"/>
-              <a:t>Sem piso nem teto, pesos podem ficar congelados. Os limites α_max e μ_max do EDBD ajudam.</a:t>
+              <a:t>As constantes e alguns detalhes não são os do artigo de Minai e Williams; o artigo original não foi consultado.</a:t>
             </a:r>
             <a:endParaRPr lang="en-US" dirty="0"/>
           </a:p>
@@ -691,7 +697,7 @@
           <a:p>
             <a:r>
               <a:rPr lang="en-US" dirty="0"/>
-              <a:t>O método adaptativo troca o ajuste de uma taxa por quatro hiperparâmetros.</a:t>
+              <a:t>EDBD 0,0121 e GD+momento 0,0120 chegam ao piso do ruído (0,01125). Não se pode declarar um melhor que o outro.</a:t>
             </a:r>
             <a:endParaRPr lang="en-US" dirty="0"/>
           </a:p>
@@ -779,7 +785,7 @@
           <a:p>
             <a:r>
               <a:rPr lang="en-US" dirty="0"/>
-              <a:t>Conclusões limitadas: um problema, uma arquitetura, lote inteiro.</a:t>
+              <a:t>Sem piso nem teto, pesos podem ficar congelados. Os limites α_max e μ_max do EDBD ajudam.</a:t>
             </a:r>
             <a:endParaRPr lang="en-US" dirty="0"/>
           </a:p>
@@ -867,7 +873,7 @@
           <a:p>
             <a:r>
               <a:rPr lang="en-US" dirty="0"/>
-              <a:t>Resposta: α = 0,1 → 0,15 → 0,12; ḡ = 0,6; 0,87; 0,309.</a:t>
+              <a:t>O método adaptativo troca o ajuste de uma taxa por quatro hiperparâmetros.</a:t>
             </a:r>
             <a:endParaRPr lang="en-US" dirty="0"/>
           </a:p>
@@ -955,7 +961,7 @@
           <a:p>
             <a:r>
               <a:rPr lang="en-US" dirty="0"/>
-              <a:t>Feche o livro com o projeto integrador: comparar todos os treinadores com protocolo honesto.</a:t>
+              <a:t>Conclusões limitadas: um problema, uma arquitetura, lote inteiro.</a:t>
             </a:r>
             <a:endParaRPr lang="en-US" dirty="0"/>
           </a:p>
@@ -979,6 +985,446 @@
             <a:fld id="{F7021451-1387-4CA6-816F-3879F97B5CBC}" type="slidenum">
               <a:rPr lang="en-US"/>
               <a:t>14</a:t>
+            </a:fld>
+            <a:endParaRPr lang="en-US"/>
+          </a:p>
+        </p:txBody>
+      </p:sp>
+    </p:spTree>
+    <p:extLst>
+      <p:ext uri="{BB962C8B-B14F-4D97-AF65-F5344CB8AC3E}">
+        <p14:creationId xmlns:p14="http://schemas.microsoft.com/office/powerpoint/2010/main" val="1024086991"/>
+      </p:ext>
+    </p:extLst>
+  </p:cSld>
+  <p:clrMapOvr>
+    <a:masterClrMapping/>
+  </p:clrMapOvr>
+</p:notes>
+</file>
+
+<file path=ppt/notesSlides/notesSlide15.xml><?xml version="1.0" encoding="utf-8"?>
+<p:notes xmlns:a="http://schemas.openxmlformats.org/drawingml/2006/main" xmlns:r="http://schemas.openxmlformats.org/officeDocument/2006/relationships" xmlns:p="http://schemas.openxmlformats.org/presentationml/2006/main">
+  <p:cSld>
+    <p:spTree>
+      <p:nvGrpSpPr>
+        <p:cNvPr id="1" name=""/>
+        <p:cNvGrpSpPr/>
+        <p:nvPr/>
+      </p:nvGrpSpPr>
+      <p:grpSpPr>
+        <a:xfrm>
+          <a:off x="0" y="0"/>
+          <a:ext cx="0" cy="0"/>
+          <a:chOff x="0" y="0"/>
+          <a:chExt cx="0" cy="0"/>
+        </a:xfrm>
+      </p:grpSpPr>
+      <p:sp>
+        <p:nvSpPr>
+          <p:cNvPr id="2" name="Slide Image Placeholder 1"/>
+          <p:cNvSpPr>
+            <a:spLocks noGrp="1" noRot="1" noChangeAspect="1"/>
+          </p:cNvSpPr>
+          <p:nvPr>
+            <p:ph type="sldImg"/>
+          </p:nvPr>
+        </p:nvSpPr>
+        <p:spPr/>
+      </p:sp>
+      <p:sp>
+        <p:nvSpPr>
+          <p:cNvPr id="3" name="Notes Placeholder 2"/>
+          <p:cNvSpPr>
+            <a:spLocks noGrp="1"/>
+          </p:cNvSpPr>
+          <p:nvPr>
+            <p:ph type="body" idx="1"/>
+          </p:nvPr>
+        </p:nvSpPr>
+        <p:spPr/>
+        <p:txBody>
+          <a:bodyPr/>
+          <a:lstStyle/>
+          <a:p>
+            <a:r>
+              <a:rPr lang="en-US" dirty="0"/>
+              <a:t>Use este mapa para retomar o livro. Os experimentos mostraram empates dentro da variação entre sementes.</a:t>
+            </a:r>
+            <a:endParaRPr lang="en-US" dirty="0"/>
+          </a:p>
+        </p:txBody>
+      </p:sp>
+      <p:sp>
+        <p:nvSpPr>
+          <p:cNvPr id="4" name="Slide Number Placeholder 3"/>
+          <p:cNvSpPr>
+            <a:spLocks noGrp="1"/>
+          </p:cNvSpPr>
+          <p:nvPr>
+            <p:ph type="sldNum" sz="quarter" idx="10"/>
+          </p:nvPr>
+        </p:nvSpPr>
+        <p:spPr/>
+        <p:txBody>
+          <a:bodyPr/>
+          <a:lstStyle/>
+          <a:p>
+            <a:fld id="{F7021451-1387-4CA6-816F-3879F97B5CBC}" type="slidenum">
+              <a:rPr lang="en-US"/>
+              <a:t>15</a:t>
+            </a:fld>
+            <a:endParaRPr lang="en-US"/>
+          </a:p>
+        </p:txBody>
+      </p:sp>
+    </p:spTree>
+    <p:extLst>
+      <p:ext uri="{BB962C8B-B14F-4D97-AF65-F5344CB8AC3E}">
+        <p14:creationId xmlns:p14="http://schemas.microsoft.com/office/powerpoint/2010/main" val="1024086991"/>
+      </p:ext>
+    </p:extLst>
+  </p:cSld>
+  <p:clrMapOvr>
+    <a:masterClrMapping/>
+  </p:clrMapOvr>
+</p:notes>
+</file>
+
+<file path=ppt/notesSlides/notesSlide16.xml><?xml version="1.0" encoding="utf-8"?>
+<p:notes xmlns:a="http://schemas.openxmlformats.org/drawingml/2006/main" xmlns:r="http://schemas.openxmlformats.org/officeDocument/2006/relationships" xmlns:p="http://schemas.openxmlformats.org/presentationml/2006/main">
+  <p:cSld>
+    <p:spTree>
+      <p:nvGrpSpPr>
+        <p:cNvPr id="1" name=""/>
+        <p:cNvGrpSpPr/>
+        <p:nvPr/>
+      </p:nvGrpSpPr>
+      <p:grpSpPr>
+        <a:xfrm>
+          <a:off x="0" y="0"/>
+          <a:ext cx="0" cy="0"/>
+          <a:chOff x="0" y="0"/>
+          <a:chExt cx="0" cy="0"/>
+        </a:xfrm>
+      </p:grpSpPr>
+      <p:sp>
+        <p:nvSpPr>
+          <p:cNvPr id="2" name="Slide Image Placeholder 1"/>
+          <p:cNvSpPr>
+            <a:spLocks noGrp="1" noRot="1" noChangeAspect="1"/>
+          </p:cNvSpPr>
+          <p:nvPr>
+            <p:ph type="sldImg"/>
+          </p:nvPr>
+        </p:nvSpPr>
+        <p:spPr/>
+      </p:sp>
+      <p:sp>
+        <p:nvSpPr>
+          <p:cNvPr id="3" name="Notes Placeholder 2"/>
+          <p:cNvSpPr>
+            <a:spLocks noGrp="1"/>
+          </p:cNvSpPr>
+          <p:nvPr>
+            <p:ph type="body" idx="1"/>
+          </p:nvPr>
+        </p:nvSpPr>
+        <p:spPr/>
+        <p:txBody>
+          <a:bodyPr/>
+          <a:lstStyle/>
+          <a:p>
+            <a:r>
+              <a:rPr lang="en-US" dirty="0"/>
+              <a:t>Resposta: A) Aumenta de κ. Mesmo sinal: aumento aditivo; sinais opostos: redução multiplicativa. Dê um minuto para votação antes de revelar.</a:t>
+            </a:r>
+            <a:endParaRPr lang="en-US" dirty="0"/>
+          </a:p>
+        </p:txBody>
+      </p:sp>
+      <p:sp>
+        <p:nvSpPr>
+          <p:cNvPr id="4" name="Slide Number Placeholder 3"/>
+          <p:cNvSpPr>
+            <a:spLocks noGrp="1"/>
+          </p:cNvSpPr>
+          <p:nvPr>
+            <p:ph type="sldNum" sz="quarter" idx="10"/>
+          </p:nvPr>
+        </p:nvSpPr>
+        <p:spPr/>
+        <p:txBody>
+          <a:bodyPr/>
+          <a:lstStyle/>
+          <a:p>
+            <a:fld id="{F7021451-1387-4CA6-816F-3879F97B5CBC}" type="slidenum">
+              <a:rPr lang="en-US"/>
+              <a:t>16</a:t>
+            </a:fld>
+            <a:endParaRPr lang="en-US"/>
+          </a:p>
+        </p:txBody>
+      </p:sp>
+    </p:spTree>
+    <p:extLst>
+      <p:ext uri="{BB962C8B-B14F-4D97-AF65-F5344CB8AC3E}">
+        <p14:creationId xmlns:p14="http://schemas.microsoft.com/office/powerpoint/2010/main" val="1024086991"/>
+      </p:ext>
+    </p:extLst>
+  </p:cSld>
+  <p:clrMapOvr>
+    <a:masterClrMapping/>
+  </p:clrMapOvr>
+</p:notes>
+</file>
+
+<file path=ppt/notesSlides/notesSlide17.xml><?xml version="1.0" encoding="utf-8"?>
+<p:notes xmlns:a="http://schemas.openxmlformats.org/drawingml/2006/main" xmlns:r="http://schemas.openxmlformats.org/officeDocument/2006/relationships" xmlns:p="http://schemas.openxmlformats.org/presentationml/2006/main">
+  <p:cSld>
+    <p:spTree>
+      <p:nvGrpSpPr>
+        <p:cNvPr id="1" name=""/>
+        <p:cNvGrpSpPr/>
+        <p:nvPr/>
+      </p:nvGrpSpPr>
+      <p:grpSpPr>
+        <a:xfrm>
+          <a:off x="0" y="0"/>
+          <a:ext cx="0" cy="0"/>
+          <a:chOff x="0" y="0"/>
+          <a:chExt cx="0" cy="0"/>
+        </a:xfrm>
+      </p:grpSpPr>
+      <p:sp>
+        <p:nvSpPr>
+          <p:cNvPr id="2" name="Slide Image Placeholder 1"/>
+          <p:cNvSpPr>
+            <a:spLocks noGrp="1" noRot="1" noChangeAspect="1"/>
+          </p:cNvSpPr>
+          <p:nvPr>
+            <p:ph type="sldImg"/>
+          </p:nvPr>
+        </p:nvSpPr>
+        <p:spPr/>
+      </p:sp>
+      <p:sp>
+        <p:nvSpPr>
+          <p:cNvPr id="3" name="Notes Placeholder 2"/>
+          <p:cNvSpPr>
+            <a:spLocks noGrp="1"/>
+          </p:cNvSpPr>
+          <p:nvPr>
+            <p:ph type="body" idx="1"/>
+          </p:nvPr>
+        </p:nvSpPr>
+        <p:spPr/>
+        <p:txBody>
+          <a:bodyPr/>
+          <a:lstStyle/>
+          <a:p>
+            <a:r>
+              <a:rPr lang="en-US" dirty="0"/>
+              <a:t>Resposta: A) Taxa negativa ou explosiva e dependência da escala. O DBD testa o sinal e usa aumento aditivo e redução multiplicativa, mantendo α &gt; 0. Dê um minuto para votação antes de revelar.</a:t>
+            </a:r>
+            <a:endParaRPr lang="en-US" dirty="0"/>
+          </a:p>
+        </p:txBody>
+      </p:sp>
+      <p:sp>
+        <p:nvSpPr>
+          <p:cNvPr id="4" name="Slide Number Placeholder 3"/>
+          <p:cNvSpPr>
+            <a:spLocks noGrp="1"/>
+          </p:cNvSpPr>
+          <p:nvPr>
+            <p:ph type="sldNum" sz="quarter" idx="10"/>
+          </p:nvPr>
+        </p:nvSpPr>
+        <p:spPr/>
+        <p:txBody>
+          <a:bodyPr/>
+          <a:lstStyle/>
+          <a:p>
+            <a:fld id="{F7021451-1387-4CA6-816F-3879F97B5CBC}" type="slidenum">
+              <a:rPr lang="en-US"/>
+              <a:t>17</a:t>
+            </a:fld>
+            <a:endParaRPr lang="en-US"/>
+          </a:p>
+        </p:txBody>
+      </p:sp>
+    </p:spTree>
+    <p:extLst>
+      <p:ext uri="{BB962C8B-B14F-4D97-AF65-F5344CB8AC3E}">
+        <p14:creationId xmlns:p14="http://schemas.microsoft.com/office/powerpoint/2010/main" val="1024086991"/>
+      </p:ext>
+    </p:extLst>
+  </p:cSld>
+  <p:clrMapOvr>
+    <a:masterClrMapping/>
+  </p:clrMapOvr>
+</p:notes>
+</file>
+
+<file path=ppt/notesSlides/notesSlide18.xml><?xml version="1.0" encoding="utf-8"?>
+<p:notes xmlns:a="http://schemas.openxmlformats.org/drawingml/2006/main" xmlns:r="http://schemas.openxmlformats.org/officeDocument/2006/relationships" xmlns:p="http://schemas.openxmlformats.org/presentationml/2006/main">
+  <p:cSld>
+    <p:spTree>
+      <p:nvGrpSpPr>
+        <p:cNvPr id="1" name=""/>
+        <p:cNvGrpSpPr/>
+        <p:nvPr/>
+      </p:nvGrpSpPr>
+      <p:grpSpPr>
+        <a:xfrm>
+          <a:off x="0" y="0"/>
+          <a:ext cx="0" cy="0"/>
+          <a:chOff x="0" y="0"/>
+          <a:chExt cx="0" cy="0"/>
+        </a:xfrm>
+      </p:grpSpPr>
+      <p:sp>
+        <p:nvSpPr>
+          <p:cNvPr id="2" name="Slide Image Placeholder 1"/>
+          <p:cNvSpPr>
+            <a:spLocks noGrp="1" noRot="1" noChangeAspect="1"/>
+          </p:cNvSpPr>
+          <p:nvPr>
+            <p:ph type="sldImg"/>
+          </p:nvPr>
+        </p:nvSpPr>
+        <p:spPr/>
+      </p:sp>
+      <p:sp>
+        <p:nvSpPr>
+          <p:cNvPr id="3" name="Notes Placeholder 2"/>
+          <p:cNvSpPr>
+            <a:spLocks noGrp="1"/>
+          </p:cNvSpPr>
+          <p:nvPr>
+            <p:ph type="body" idx="1"/>
+          </p:nvPr>
+        </p:nvSpPr>
+        <p:spPr/>
+        <p:txBody>
+          <a:bodyPr/>
+          <a:lstStyle/>
+          <a:p>
+            <a:r>
+              <a:rPr lang="en-US" dirty="0"/>
+              <a:t>Resposta: α = 0,1 → 0,15 → 0,12; ḡ = 0,6; 0,87; 0,309.</a:t>
+            </a:r>
+            <a:endParaRPr lang="en-US" dirty="0"/>
+          </a:p>
+        </p:txBody>
+      </p:sp>
+      <p:sp>
+        <p:nvSpPr>
+          <p:cNvPr id="4" name="Slide Number Placeholder 3"/>
+          <p:cNvSpPr>
+            <a:spLocks noGrp="1"/>
+          </p:cNvSpPr>
+          <p:nvPr>
+            <p:ph type="sldNum" sz="quarter" idx="10"/>
+          </p:nvPr>
+        </p:nvSpPr>
+        <p:spPr/>
+        <p:txBody>
+          <a:bodyPr/>
+          <a:lstStyle/>
+          <a:p>
+            <a:fld id="{F7021451-1387-4CA6-816F-3879F97B5CBC}" type="slidenum">
+              <a:rPr lang="en-US"/>
+              <a:t>18</a:t>
+            </a:fld>
+            <a:endParaRPr lang="en-US"/>
+          </a:p>
+        </p:txBody>
+      </p:sp>
+    </p:spTree>
+    <p:extLst>
+      <p:ext uri="{BB962C8B-B14F-4D97-AF65-F5344CB8AC3E}">
+        <p14:creationId xmlns:p14="http://schemas.microsoft.com/office/powerpoint/2010/main" val="1024086991"/>
+      </p:ext>
+    </p:extLst>
+  </p:cSld>
+  <p:clrMapOvr>
+    <a:masterClrMapping/>
+  </p:clrMapOvr>
+</p:notes>
+</file>
+
+<file path=ppt/notesSlides/notesSlide19.xml><?xml version="1.0" encoding="utf-8"?>
+<p:notes xmlns:a="http://schemas.openxmlformats.org/drawingml/2006/main" xmlns:r="http://schemas.openxmlformats.org/officeDocument/2006/relationships" xmlns:p="http://schemas.openxmlformats.org/presentationml/2006/main">
+  <p:cSld>
+    <p:spTree>
+      <p:nvGrpSpPr>
+        <p:cNvPr id="1" name=""/>
+        <p:cNvGrpSpPr/>
+        <p:nvPr/>
+      </p:nvGrpSpPr>
+      <p:grpSpPr>
+        <a:xfrm>
+          <a:off x="0" y="0"/>
+          <a:ext cx="0" cy="0"/>
+          <a:chOff x="0" y="0"/>
+          <a:chExt cx="0" cy="0"/>
+        </a:xfrm>
+      </p:grpSpPr>
+      <p:sp>
+        <p:nvSpPr>
+          <p:cNvPr id="2" name="Slide Image Placeholder 1"/>
+          <p:cNvSpPr>
+            <a:spLocks noGrp="1" noRot="1" noChangeAspect="1"/>
+          </p:cNvSpPr>
+          <p:nvPr>
+            <p:ph type="sldImg"/>
+          </p:nvPr>
+        </p:nvSpPr>
+        <p:spPr/>
+      </p:sp>
+      <p:sp>
+        <p:nvSpPr>
+          <p:cNvPr id="3" name="Notes Placeholder 2"/>
+          <p:cNvSpPr>
+            <a:spLocks noGrp="1"/>
+          </p:cNvSpPr>
+          <p:nvPr>
+            <p:ph type="body" idx="1"/>
+          </p:nvPr>
+        </p:nvSpPr>
+        <p:spPr/>
+        <p:txBody>
+          <a:bodyPr/>
+          <a:lstStyle/>
+          <a:p>
+            <a:r>
+              <a:rPr lang="en-US" dirty="0"/>
+              <a:t>Feche o livro com o projeto integrador: comparar todos os treinadores com protocolo honesto.</a:t>
+            </a:r>
+            <a:endParaRPr lang="en-US" dirty="0"/>
+          </a:p>
+        </p:txBody>
+      </p:sp>
+      <p:sp>
+        <p:nvSpPr>
+          <p:cNvPr id="4" name="Slide Number Placeholder 3"/>
+          <p:cNvSpPr>
+            <a:spLocks noGrp="1"/>
+          </p:cNvSpPr>
+          <p:nvPr>
+            <p:ph type="sldNum" sz="quarter" idx="10"/>
+          </p:nvPr>
+        </p:nvSpPr>
+        <p:spPr/>
+        <p:txBody>
+          <a:bodyPr/>
+          <a:lstStyle/>
+          <a:p>
+            <a:fld id="{F7021451-1387-4CA6-816F-3879F97B5CBC}" type="slidenum">
+              <a:rPr lang="en-US"/>
+              <a:t>19</a:t>
             </a:fld>
             <a:endParaRPr lang="en-US"/>
           </a:p>
@@ -1043,7 +1489,7 @@
           <a:p>
             <a:r>
               <a:rPr lang="en-US" dirty="0"/>
-              <a:t>Analogia: cada roda de um carro com tração própria ajusta seu torque ao terreno.</a:t>
+              <a:t>Apresente o roteiro e o tempo estimado de cada bloco (cerca de 2 minutos por slide).</a:t>
             </a:r>
             <a:endParaRPr lang="en-US" dirty="0"/>
           </a:p>
@@ -1067,6 +1513,94 @@
             <a:fld id="{F7021451-1387-4CA6-816F-3879F97B5CBC}" type="slidenum">
               <a:rPr lang="en-US"/>
               <a:t>2</a:t>
+            </a:fld>
+            <a:endParaRPr lang="en-US"/>
+          </a:p>
+        </p:txBody>
+      </p:sp>
+    </p:spTree>
+    <p:extLst>
+      <p:ext uri="{BB962C8B-B14F-4D97-AF65-F5344CB8AC3E}">
+        <p14:creationId xmlns:p14="http://schemas.microsoft.com/office/powerpoint/2010/main" val="1024086991"/>
+      </p:ext>
+    </p:extLst>
+  </p:cSld>
+  <p:clrMapOvr>
+    <a:masterClrMapping/>
+  </p:clrMapOvr>
+</p:notes>
+</file>
+
+<file path=ppt/notesSlides/notesSlide20.xml><?xml version="1.0" encoding="utf-8"?>
+<p:notes xmlns:a="http://schemas.openxmlformats.org/drawingml/2006/main" xmlns:r="http://schemas.openxmlformats.org/officeDocument/2006/relationships" xmlns:p="http://schemas.openxmlformats.org/presentationml/2006/main">
+  <p:cSld>
+    <p:spTree>
+      <p:nvGrpSpPr>
+        <p:cNvPr id="1" name=""/>
+        <p:cNvGrpSpPr/>
+        <p:nvPr/>
+      </p:nvGrpSpPr>
+      <p:grpSpPr>
+        <a:xfrm>
+          <a:off x="0" y="0"/>
+          <a:ext cx="0" cy="0"/>
+          <a:chOff x="0" y="0"/>
+          <a:chExt cx="0" cy="0"/>
+        </a:xfrm>
+      </p:grpSpPr>
+      <p:sp>
+        <p:nvSpPr>
+          <p:cNvPr id="2" name="Slide Image Placeholder 1"/>
+          <p:cNvSpPr>
+            <a:spLocks noGrp="1" noRot="1" noChangeAspect="1"/>
+          </p:cNvSpPr>
+          <p:nvPr>
+            <p:ph type="sldImg"/>
+          </p:nvPr>
+        </p:nvSpPr>
+        <p:spPr/>
+      </p:sp>
+      <p:sp>
+        <p:nvSpPr>
+          <p:cNvPr id="3" name="Notes Placeholder 2"/>
+          <p:cNvSpPr>
+            <a:spLocks noGrp="1"/>
+          </p:cNvSpPr>
+          <p:nvPr>
+            <p:ph type="body" idx="1"/>
+          </p:nvPr>
+        </p:nvSpPr>
+        <p:spPr/>
+        <p:txBody>
+          <a:bodyPr/>
+          <a:lstStyle/>
+          <a:p>
+            <a:r>
+              <a:rPr lang="en-US" dirty="0"/>
+              <a:t>Feche com a frase e peça que os estudantes a expliquem com as próprias palavras.</a:t>
+            </a:r>
+            <a:endParaRPr lang="en-US" dirty="0"/>
+          </a:p>
+        </p:txBody>
+      </p:sp>
+      <p:sp>
+        <p:nvSpPr>
+          <p:cNvPr id="4" name="Slide Number Placeholder 3"/>
+          <p:cNvSpPr>
+            <a:spLocks noGrp="1"/>
+          </p:cNvSpPr>
+          <p:nvPr>
+            <p:ph type="sldNum" sz="quarter" idx="10"/>
+          </p:nvPr>
+        </p:nvSpPr>
+        <p:spPr/>
+        <p:txBody>
+          <a:bodyPr/>
+          <a:lstStyle/>
+          <a:p>
+            <a:fld id="{F7021451-1387-4CA6-816F-3879F97B5CBC}" type="slidenum">
+              <a:rPr lang="en-US"/>
+              <a:t>20</a:t>
             </a:fld>
             <a:endParaRPr lang="en-US"/>
           </a:p>
@@ -1131,7 +1665,7 @@
           <a:p>
             <a:r>
               <a:rPr lang="en-US" dirty="0"/>
-              <a:t>Verificação numérica do livro: E = ½·4·w², w=1, α=0,1: derivada numérica e analítica coincidem em −9,6.</a:t>
+              <a:t>Analogia: cada roda de um carro com tração própria ajusta seu torque ao terreno.</a:t>
             </a:r>
             <a:endParaRPr lang="en-US" dirty="0"/>
           </a:p>
@@ -1219,7 +1753,7 @@
           <a:p>
             <a:r>
               <a:rPr lang="en-US" dirty="0"/>
-              <a:t>Com γ = 1e-3 converge; com 1e-2 e 1e-1 os valores deixam de ser finitos. A correção depende da escala de E.</a:t>
+              <a:t>Verificação numérica do livro: E = ½·4·w², w=1, α=0,1: derivada numérica e analítica coincidem em −9,6.</a:t>
             </a:r>
             <a:endParaRPr lang="en-US" dirty="0"/>
           </a:p>
@@ -1307,7 +1841,7 @@
           <a:p>
             <a:r>
               <a:rPr lang="en-US" dirty="0"/>
-              <a:t>Subir devagar (aditivo), descer depressa (multiplicativo). Hiperparâmetros: α₀, κ, φ, θ.</a:t>
+              <a:t>Contraste com o gradiente descendente: um único pedal para todas as rodas.</a:t>
             </a:r>
             <a:endParaRPr lang="en-US" dirty="0"/>
           </a:p>
@@ -1395,7 +1929,7 @@
           <a:p>
             <a:r>
               <a:rPr lang="en-US" dirty="0"/>
-              <a:t>Peso 4, semente 5. O teste usa ḡ(t−1): atualizar ḡ antes do teste é um erro comum.</a:t>
+              <a:t>Com γ = 1e-3 converge; com 1e-2 e 1e-1 os valores deixam de ser finitos. A correção depende da escala de E.</a:t>
             </a:r>
             <a:endParaRPr lang="en-US" dirty="0"/>
           </a:p>
@@ -1483,7 +2017,7 @@
           <a:p>
             <a:r>
               <a:rPr lang="en-US" dirty="0"/>
-              <a:t>Com condição 10³: DBD 70 iterações contra 13 809 do GD. Vale para curvaturas alinhadas aos eixos.</a:t>
+              <a:t>Subir devagar (aditivo), descer depressa (multiplicativo). Hiperparâmetros: α₀, κ, φ, θ.</a:t>
             </a:r>
             <a:endParaRPr lang="en-US" dirty="0"/>
           </a:p>
@@ -1571,7 +2105,7 @@
           <a:p>
             <a:r>
               <a:rPr lang="en-US" dirty="0"/>
-              <a:t>As constantes e alguns detalhes não são os do artigo de Minai e Williams; o artigo original não foi consultado.</a:t>
+              <a:t>Peso 4, semente 5. O teste usa ḡ(t−1): atualizar ḡ antes do teste é um erro comum.</a:t>
             </a:r>
             <a:endParaRPr lang="en-US" dirty="0"/>
           </a:p>
@@ -1659,7 +2193,7 @@
           <a:p>
             <a:r>
               <a:rPr lang="en-US" dirty="0"/>
-              <a:t>EDBD 0,0121 e GD+momento 0,0120 chegam ao piso do ruído (0,01125). Não se pode declarar um melhor que o outro.</a:t>
+              <a:t>Com condição 10³: DBD 70 iterações contra 13 809 do GD. Vale para curvaturas alinhadas aos eixos.</a:t>
             </a:r>
             <a:endParaRPr lang="en-US" dirty="0"/>
           </a:p>
@@ -2468,46 +3002,49 @@
                 <a:ea typeface="Calibri" pitchFamily="34" charset="-122"/>
                 <a:cs typeface="Calibri" pitchFamily="34" charset="-120"/>
               </a:rPr>
-              <a:t>Taxas individuais na rede</a:t>
+              <a:t>EDBD (versão didática do livro)</a:t>
             </a:r>
             <a:endParaRPr lang="en-US" sz="2600" dirty="0"/>
           </a:p>
         </p:txBody>
       </p:sp>
-      <p:pic>
-        <p:nvPicPr>
-          <p:cNvPr id="3" name="Image 0" descr="No DBD, a taxa mínima chega a 1e-12 e a máxima, a dezenas.">    </p:cNvPr>
-          <p:cNvPicPr>
-            <a:picLocks noChangeAspect="1"/>
-          </p:cNvPicPr>
-          <p:nvPr/>
-        </p:nvPicPr>
-        <p:blipFill>
-          <a:blip r:embed="rId1"/>
-          <a:stretch>
-            <a:fillRect/>
-          </a:stretch>
-        </p:blipFill>
-        <p:spPr>
-          <a:xfrm>
-            <a:off x="758459" y="1005840"/>
-            <a:ext cx="7627082" cy="3154680"/>
-          </a:xfrm>
-          <a:prstGeom prst="rect">
-            <a:avLst/>
-          </a:prstGeom>
-        </p:spPr>
-      </p:pic>
-      <p:sp>
-        <p:nvSpPr>
-          <p:cNvPr id="4" name="Text 1"/>
+      <p:sp>
+        <p:nvSpPr>
+          <p:cNvPr id="3" name="Shape 1"/>
+          <p:cNvSpPr/>
+          <p:nvPr/>
+        </p:nvSpPr>
+        <p:spPr>
+          <a:xfrm>
+            <a:off x="457200" y="1097280"/>
+            <a:ext cx="8229600" cy="868680"/>
+          </a:xfrm>
+          <a:prstGeom prst="roundRect">
+            <a:avLst>
+              <a:gd name="adj" fmla="val 8421"/>
+            </a:avLst>
+          </a:prstGeom>
+          <a:solidFill>
+            <a:srgbClr val="E0E7FF"/>
+          </a:solidFill>
+          <a:ln w="9525">
+            <a:solidFill>
+              <a:srgbClr val="C7D2FE"/>
+            </a:solidFill>
+            <a:prstDash val="solid"/>
+          </a:ln>
+        </p:spPr>
+      </p:sp>
+      <p:sp>
+        <p:nvSpPr>
+          <p:cNvPr id="4" name="Text 2"/>
           <p:cNvSpPr txBox="1"/>
           <p:nvPr/>
         </p:nvSpPr>
         <p:spPr>
           <a:xfrm>
-            <a:off x="457200" y="4251960"/>
-            <a:ext cx="8229600" cy="457200"/>
+            <a:off x="594360" y="1097280"/>
+            <a:ext cx="2743200" cy="868680"/>
           </a:xfrm>
           <a:prstGeom prst="rect">
             <a:avLst/>
@@ -2516,23 +3053,382 @@
           <a:ln/>
         </p:spPr>
         <p:txBody>
-          <a:bodyPr wrap="square" lIns="0" tIns="0" rIns="0" bIns="0" rtlCol="0" anchor="t">
+          <a:bodyPr wrap="square" lIns="0" tIns="0" rIns="0" bIns="0" rtlCol="0" anchor="ctr">
             <a:normAutofit/>
           </a:bodyPr>
           <a:lstStyle/>
           <a:p>
-            <a:pPr algn="ctr" indent="0" marL="0">
+            <a:pPr indent="0" marL="0">
               <a:buNone/>
             </a:pPr>
             <a:r>
-              <a:rPr lang="en-US" sz="1400" i="1" dirty="0">
-                <a:solidFill>
-                  <a:srgbClr val="4B5563"/>
-                </a:solidFill>
-              </a:rPr>
-              <a:t>No DBD, a taxa mínima chega a 1e-12 e a máxima, a dezenas.</a:t>
+              <a:rPr lang="en-US" sz="1400" b="1" dirty="0">
+                <a:solidFill>
+                  <a:srgbClr val="312E81"/>
+                </a:solidFill>
+              </a:rPr>
+              <a:t>1. Aumento amortecido</a:t>
             </a:r>
             <a:endParaRPr lang="en-US" sz="1400" dirty="0"/>
+          </a:p>
+        </p:txBody>
+      </p:sp>
+      <p:sp>
+        <p:nvSpPr>
+          <p:cNvPr id="5" name="Text 3"/>
+          <p:cNvSpPr txBox="1"/>
+          <p:nvPr/>
+        </p:nvSpPr>
+        <p:spPr>
+          <a:xfrm>
+            <a:off x="3383280" y="1097280"/>
+            <a:ext cx="5212080" cy="868680"/>
+          </a:xfrm>
+          <a:prstGeom prst="rect">
+            <a:avLst/>
+          </a:prstGeom>
+          <a:noFill/>
+          <a:ln/>
+        </p:spPr>
+        <p:txBody>
+          <a:bodyPr wrap="square" lIns="0" tIns="0" rIns="0" bIns="0" rtlCol="0" anchor="ctr">
+            <a:normAutofit/>
+          </a:bodyPr>
+          <a:lstStyle/>
+          <a:p>
+            <a:pPr indent="0" marL="0">
+              <a:buNone/>
+            </a:pPr>
+            <a:r>
+              <a:rPr lang="en-US" sz="1700" dirty="0">
+                <a:solidFill>
+                  <a:srgbClr val="1F2937"/>
+                </a:solidFill>
+                <a:latin typeface="Cambria Math" pitchFamily="34" charset="0"/>
+                <a:ea typeface="Cambria Math" pitchFamily="34" charset="-122"/>
+                <a:cs typeface="Cambria Math" pitchFamily="34" charset="-120"/>
+              </a:rPr>
+              <a:t>α ← min(α + κ_α e^(−γ|ḡ|), α_max)</a:t>
+            </a:r>
+            <a:endParaRPr lang="en-US" sz="1700" dirty="0"/>
+          </a:p>
+        </p:txBody>
+      </p:sp>
+      <p:sp>
+        <p:nvSpPr>
+          <p:cNvPr id="6" name="Shape 4"/>
+          <p:cNvSpPr/>
+          <p:nvPr/>
+        </p:nvSpPr>
+        <p:spPr>
+          <a:xfrm>
+            <a:off x="457200" y="2039112"/>
+            <a:ext cx="8229600" cy="868680"/>
+          </a:xfrm>
+          <a:prstGeom prst="roundRect">
+            <a:avLst>
+              <a:gd name="adj" fmla="val 8421"/>
+            </a:avLst>
+          </a:prstGeom>
+          <a:solidFill>
+            <a:srgbClr val="EEF2FF"/>
+          </a:solidFill>
+          <a:ln w="9525">
+            <a:solidFill>
+              <a:srgbClr val="C7D2FE"/>
+            </a:solidFill>
+            <a:prstDash val="solid"/>
+          </a:ln>
+        </p:spPr>
+      </p:sp>
+      <p:sp>
+        <p:nvSpPr>
+          <p:cNvPr id="7" name="Text 5"/>
+          <p:cNvSpPr txBox="1"/>
+          <p:nvPr/>
+        </p:nvSpPr>
+        <p:spPr>
+          <a:xfrm>
+            <a:off x="594360" y="2039112"/>
+            <a:ext cx="2743200" cy="868680"/>
+          </a:xfrm>
+          <a:prstGeom prst="rect">
+            <a:avLst/>
+          </a:prstGeom>
+          <a:noFill/>
+          <a:ln/>
+        </p:spPr>
+        <p:txBody>
+          <a:bodyPr wrap="square" lIns="0" tIns="0" rIns="0" bIns="0" rtlCol="0" anchor="ctr">
+            <a:normAutofit/>
+          </a:bodyPr>
+          <a:lstStyle/>
+          <a:p>
+            <a:pPr indent="0" marL="0">
+              <a:buNone/>
+            </a:pPr>
+            <a:r>
+              <a:rPr lang="en-US" sz="1400" b="1" dirty="0">
+                <a:solidFill>
+                  <a:srgbClr val="312E81"/>
+                </a:solidFill>
+              </a:rPr>
+              <a:t>2. Redução</a:t>
+            </a:r>
+            <a:endParaRPr lang="en-US" sz="1400" dirty="0"/>
+          </a:p>
+        </p:txBody>
+      </p:sp>
+      <p:sp>
+        <p:nvSpPr>
+          <p:cNvPr id="8" name="Text 6"/>
+          <p:cNvSpPr txBox="1"/>
+          <p:nvPr/>
+        </p:nvSpPr>
+        <p:spPr>
+          <a:xfrm>
+            <a:off x="3383280" y="2039112"/>
+            <a:ext cx="5212080" cy="868680"/>
+          </a:xfrm>
+          <a:prstGeom prst="rect">
+            <a:avLst/>
+          </a:prstGeom>
+          <a:noFill/>
+          <a:ln/>
+        </p:spPr>
+        <p:txBody>
+          <a:bodyPr wrap="square" lIns="0" tIns="0" rIns="0" bIns="0" rtlCol="0" anchor="ctr">
+            <a:normAutofit/>
+          </a:bodyPr>
+          <a:lstStyle/>
+          <a:p>
+            <a:pPr indent="0" marL="0">
+              <a:buNone/>
+            </a:pPr>
+            <a:r>
+              <a:rPr lang="en-US" sz="1700" dirty="0">
+                <a:solidFill>
+                  <a:srgbClr val="1F2937"/>
+                </a:solidFill>
+                <a:latin typeface="Cambria Math" pitchFamily="34" charset="0"/>
+                <a:ea typeface="Cambria Math" pitchFamily="34" charset="-122"/>
+                <a:cs typeface="Cambria Math" pitchFamily="34" charset="-120"/>
+              </a:rPr>
+              <a:t>α ← (1 − φ_α) α</a:t>
+            </a:r>
+            <a:endParaRPr lang="en-US" sz="1700" dirty="0"/>
+          </a:p>
+        </p:txBody>
+      </p:sp>
+      <p:sp>
+        <p:nvSpPr>
+          <p:cNvPr id="9" name="Shape 7"/>
+          <p:cNvSpPr/>
+          <p:nvPr/>
+        </p:nvSpPr>
+        <p:spPr>
+          <a:xfrm>
+            <a:off x="457200" y="2980944"/>
+            <a:ext cx="8229600" cy="868680"/>
+          </a:xfrm>
+          <a:prstGeom prst="roundRect">
+            <a:avLst>
+              <a:gd name="adj" fmla="val 8421"/>
+            </a:avLst>
+          </a:prstGeom>
+          <a:solidFill>
+            <a:srgbClr val="E0E7FF"/>
+          </a:solidFill>
+          <a:ln w="9525">
+            <a:solidFill>
+              <a:srgbClr val="C7D2FE"/>
+            </a:solidFill>
+            <a:prstDash val="solid"/>
+          </a:ln>
+        </p:spPr>
+      </p:sp>
+      <p:sp>
+        <p:nvSpPr>
+          <p:cNvPr id="10" name="Text 8"/>
+          <p:cNvSpPr txBox="1"/>
+          <p:nvPr/>
+        </p:nvSpPr>
+        <p:spPr>
+          <a:xfrm>
+            <a:off x="594360" y="2980944"/>
+            <a:ext cx="2743200" cy="868680"/>
+          </a:xfrm>
+          <a:prstGeom prst="rect">
+            <a:avLst/>
+          </a:prstGeom>
+          <a:noFill/>
+          <a:ln/>
+        </p:spPr>
+        <p:txBody>
+          <a:bodyPr wrap="square" lIns="0" tIns="0" rIns="0" bIns="0" rtlCol="0" anchor="ctr">
+            <a:normAutofit/>
+          </a:bodyPr>
+          <a:lstStyle/>
+          <a:p>
+            <a:pPr indent="0" marL="0">
+              <a:buNone/>
+            </a:pPr>
+            <a:r>
+              <a:rPr lang="en-US" sz="1400" b="1" dirty="0">
+                <a:solidFill>
+                  <a:srgbClr val="312E81"/>
+                </a:solidFill>
+              </a:rPr>
+              <a:t>3. Momento individual</a:t>
+            </a:r>
+            <a:endParaRPr lang="en-US" sz="1400" dirty="0"/>
+          </a:p>
+        </p:txBody>
+      </p:sp>
+      <p:sp>
+        <p:nvSpPr>
+          <p:cNvPr id="11" name="Text 9"/>
+          <p:cNvSpPr txBox="1"/>
+          <p:nvPr/>
+        </p:nvSpPr>
+        <p:spPr>
+          <a:xfrm>
+            <a:off x="3383280" y="2980944"/>
+            <a:ext cx="5212080" cy="868680"/>
+          </a:xfrm>
+          <a:prstGeom prst="rect">
+            <a:avLst/>
+          </a:prstGeom>
+          <a:noFill/>
+          <a:ln/>
+        </p:spPr>
+        <p:txBody>
+          <a:bodyPr wrap="square" lIns="0" tIns="0" rIns="0" bIns="0" rtlCol="0" anchor="ctr">
+            <a:normAutofit/>
+          </a:bodyPr>
+          <a:lstStyle/>
+          <a:p>
+            <a:pPr indent="0" marL="0">
+              <a:buNone/>
+            </a:pPr>
+            <a:r>
+              <a:rPr lang="en-US" sz="1700" dirty="0">
+                <a:solidFill>
+                  <a:srgbClr val="1F2937"/>
+                </a:solidFill>
+                <a:latin typeface="Cambria Math" pitchFamily="34" charset="0"/>
+                <a:ea typeface="Cambria Math" pitchFamily="34" charset="-122"/>
+                <a:cs typeface="Cambria Math" pitchFamily="34" charset="-120"/>
+              </a:rPr>
+              <a:t>μ com regra análoga, μ ≤ μ_max</a:t>
+            </a:r>
+            <a:endParaRPr lang="en-US" sz="1700" dirty="0"/>
+          </a:p>
+        </p:txBody>
+      </p:sp>
+      <p:sp>
+        <p:nvSpPr>
+          <p:cNvPr id="12" name="Shape 10"/>
+          <p:cNvSpPr/>
+          <p:nvPr/>
+        </p:nvSpPr>
+        <p:spPr>
+          <a:xfrm>
+            <a:off x="457200" y="3922776"/>
+            <a:ext cx="8229600" cy="868680"/>
+          </a:xfrm>
+          <a:prstGeom prst="roundRect">
+            <a:avLst>
+              <a:gd name="adj" fmla="val 8421"/>
+            </a:avLst>
+          </a:prstGeom>
+          <a:solidFill>
+            <a:srgbClr val="EEF2FF"/>
+          </a:solidFill>
+          <a:ln w="9525">
+            <a:solidFill>
+              <a:srgbClr val="C7D2FE"/>
+            </a:solidFill>
+            <a:prstDash val="solid"/>
+          </a:ln>
+        </p:spPr>
+      </p:sp>
+      <p:sp>
+        <p:nvSpPr>
+          <p:cNvPr id="13" name="Text 11"/>
+          <p:cNvSpPr txBox="1"/>
+          <p:nvPr/>
+        </p:nvSpPr>
+        <p:spPr>
+          <a:xfrm>
+            <a:off x="594360" y="3922776"/>
+            <a:ext cx="2743200" cy="868680"/>
+          </a:xfrm>
+          <a:prstGeom prst="rect">
+            <a:avLst/>
+          </a:prstGeom>
+          <a:noFill/>
+          <a:ln/>
+        </p:spPr>
+        <p:txBody>
+          <a:bodyPr wrap="square" lIns="0" tIns="0" rIns="0" bIns="0" rtlCol="0" anchor="ctr">
+            <a:normAutofit/>
+          </a:bodyPr>
+          <a:lstStyle/>
+          <a:p>
+            <a:pPr indent="0" marL="0">
+              <a:buNone/>
+            </a:pPr>
+            <a:r>
+              <a:rPr lang="en-US" sz="1400" b="1" dirty="0">
+                <a:solidFill>
+                  <a:srgbClr val="312E81"/>
+                </a:solidFill>
+              </a:rPr>
+              <a:t>4. Passo</a:t>
+            </a:r>
+            <a:endParaRPr lang="en-US" sz="1400" dirty="0"/>
+          </a:p>
+        </p:txBody>
+      </p:sp>
+      <p:sp>
+        <p:nvSpPr>
+          <p:cNvPr id="14" name="Text 12"/>
+          <p:cNvSpPr txBox="1"/>
+          <p:nvPr/>
+        </p:nvSpPr>
+        <p:spPr>
+          <a:xfrm>
+            <a:off x="3383280" y="3922776"/>
+            <a:ext cx="5212080" cy="868680"/>
+          </a:xfrm>
+          <a:prstGeom prst="rect">
+            <a:avLst/>
+          </a:prstGeom>
+          <a:noFill/>
+          <a:ln/>
+        </p:spPr>
+        <p:txBody>
+          <a:bodyPr wrap="square" lIns="0" tIns="0" rIns="0" bIns="0" rtlCol="0" anchor="ctr">
+            <a:normAutofit/>
+          </a:bodyPr>
+          <a:lstStyle/>
+          <a:p>
+            <a:pPr indent="0" marL="0">
+              <a:buNone/>
+            </a:pPr>
+            <a:r>
+              <a:rPr lang="en-US" sz="1700" dirty="0">
+                <a:solidFill>
+                  <a:srgbClr val="1F2937"/>
+                </a:solidFill>
+                <a:latin typeface="Cambria Math" pitchFamily="34" charset="0"/>
+                <a:ea typeface="Cambria Math" pitchFamily="34" charset="-122"/>
+                <a:cs typeface="Cambria Math" pitchFamily="34" charset="-120"/>
+              </a:rPr>
+              <a:t>Δw = −α g + μ Δw(t−1)</a:t>
+            </a:r>
+            <a:endParaRPr lang="en-US" sz="1700" dirty="0"/>
           </a:p>
         </p:txBody>
       </p:sp>
@@ -2641,7 +3537,7 @@
                 <a:ea typeface="Calibri" pitchFamily="34" charset="-122"/>
                 <a:cs typeface="Calibri" pitchFamily="34" charset="-120"/>
               </a:rPr>
-              <a:t>Sensibilidade do DBD</a:t>
+              <a:t>Rede 1–8–1: comparação com protocolo</a:t>
             </a:r>
             <a:endParaRPr lang="en-US" sz="2600" dirty="0"/>
           </a:p>
@@ -2649,7 +3545,7 @@
       </p:sp>
       <p:pic>
         <p:nvPicPr>
-          <p:cNvPr id="3" name="Image 0" descr="Duas ordens de grandeza de variação só com κ e φ.">    </p:cNvPr>
+          <p:cNvPr id="3" name="Image 0" descr="Hiperparâmetros ajustados em 5 sementes; avaliação em 10 outras.">    </p:cNvPr>
           <p:cNvPicPr>
             <a:picLocks noChangeAspect="1"/>
           </p:cNvPicPr>
@@ -2663,8 +3559,8 @@
         </p:blipFill>
         <p:spPr>
           <a:xfrm>
-            <a:off x="846656" y="1005840"/>
-            <a:ext cx="7450687" cy="3154680"/>
+            <a:off x="939400" y="1005840"/>
+            <a:ext cx="7265199" cy="3154680"/>
           </a:xfrm>
           <a:prstGeom prst="rect">
             <a:avLst/>
@@ -2703,7 +3599,7 @@
                   <a:srgbClr val="4B5563"/>
                 </a:solidFill>
               </a:rPr>
-              <a:t>Duas ordens de grandeza de variação só com κ e φ.</a:t>
+              <a:t>Hiperparâmetros ajustados em 5 sementes; avaliação em 10 outras.</a:t>
             </a:r>
             <a:endParaRPr lang="en-US" sz="1400" dirty="0"/>
           </a:p>
@@ -2814,22 +3710,46 @@
                 <a:ea typeface="Calibri" pitchFamily="34" charset="-122"/>
                 <a:cs typeface="Calibri" pitchFamily="34" charset="-120"/>
               </a:rPr>
-              <a:t>Não confunda</a:t>
+              <a:t>Taxas individuais na rede</a:t>
             </a:r>
             <a:endParaRPr lang="en-US" sz="2600" dirty="0"/>
           </a:p>
         </p:txBody>
       </p:sp>
-      <p:sp>
-        <p:nvSpPr>
-          <p:cNvPr id="3" name="Text 1"/>
+      <p:pic>
+        <p:nvPicPr>
+          <p:cNvPr id="3" name="Image 0" descr="No DBD, a taxa mínima chega a 1e-12 e a máxima, a dezenas.">    </p:cNvPr>
+          <p:cNvPicPr>
+            <a:picLocks noChangeAspect="1"/>
+          </p:cNvPicPr>
+          <p:nvPr/>
+        </p:nvPicPr>
+        <p:blipFill>
+          <a:blip r:embed="rId1"/>
+          <a:stretch>
+            <a:fillRect/>
+          </a:stretch>
+        </p:blipFill>
+        <p:spPr>
+          <a:xfrm>
+            <a:off x="758459" y="1005840"/>
+            <a:ext cx="7627082" cy="3154680"/>
+          </a:xfrm>
+          <a:prstGeom prst="rect">
+            <a:avLst/>
+          </a:prstGeom>
+        </p:spPr>
+      </p:pic>
+      <p:sp>
+        <p:nvSpPr>
+          <p:cNvPr id="4" name="Text 1"/>
           <p:cNvSpPr txBox="1"/>
           <p:nvPr/>
         </p:nvSpPr>
         <p:spPr>
           <a:xfrm>
-            <a:off x="548640" y="1188720"/>
-            <a:ext cx="8046720" cy="3383280"/>
+            <a:off x="457200" y="4251960"/>
+            <a:ext cx="8229600" cy="457200"/>
           </a:xfrm>
           <a:prstGeom prst="rect">
             <a:avLst/>
@@ -2843,76 +3763,18 @@
           </a:bodyPr>
           <a:lstStyle/>
           <a:p>
-            <a:pPr marL="342900" indent="-342900">
-              <a:spcAft>
-                <a:spcPts val="1400"/>
-              </a:spcAft>
-              <a:buSzPct val="100000"/>
-              <a:buChar char="•"/>
-            </a:pPr>
-            <a:r>
-              <a:rPr lang="en-US" sz="2400" dirty="0">
-                <a:solidFill>
-                  <a:srgbClr val="1F2937"/>
-                </a:solidFill>
-              </a:rPr>
-              <a:t>Momento: mesmo β para todos, sem teste de sinal</a:t>
-            </a:r>
-            <a:endParaRPr lang="en-US" sz="2400" dirty="0"/>
-          </a:p>
-          <a:p>
-            <a:pPr marL="342900" indent="-342900">
-              <a:spcAft>
-                <a:spcPts val="1400"/>
-              </a:spcAft>
-              <a:buSzPct val="100000"/>
-              <a:buChar char="•"/>
-            </a:pPr>
-            <a:r>
-              <a:rPr lang="en-US" sz="2400" dirty="0">
-                <a:solidFill>
-                  <a:srgbClr val="1F2937"/>
-                </a:solidFill>
-              </a:rPr>
-              <a:t>ḡ serve só ao teste de sinal</a:t>
-            </a:r>
-            <a:endParaRPr lang="en-US" sz="2400" dirty="0"/>
-          </a:p>
-          <a:p>
-            <a:pPr marL="342900" indent="-342900">
-              <a:spcAft>
-                <a:spcPts val="1400"/>
-              </a:spcAft>
-              <a:buSzPct val="100000"/>
-              <a:buChar char="•"/>
-            </a:pPr>
-            <a:r>
-              <a:rPr lang="en-US" sz="2400" dirty="0">
-                <a:solidFill>
-                  <a:srgbClr val="1F2937"/>
-                </a:solidFill>
-              </a:rPr>
-              <a:t>RPROP: só o sinal no passo; DBD mantém a magnitude</a:t>
-            </a:r>
-            <a:endParaRPr lang="en-US" sz="2400" dirty="0"/>
-          </a:p>
-          <a:p>
-            <a:pPr marL="342900" indent="-342900">
-              <a:spcAft>
-                <a:spcPts val="1400"/>
-              </a:spcAft>
-              <a:buSzPct val="100000"/>
-              <a:buChar char="•"/>
-            </a:pPr>
-            <a:r>
-              <a:rPr lang="en-US" sz="2400" dirty="0">
-                <a:solidFill>
-                  <a:srgbClr val="1F2937"/>
-                </a:solidFill>
-              </a:rPr>
-              <a:t>Adam: outro regime; não foi avaliado aqui</a:t>
-            </a:r>
-            <a:endParaRPr lang="en-US" sz="2400" dirty="0"/>
+            <a:pPr algn="ctr" indent="0" marL="0">
+              <a:buNone/>
+            </a:pPr>
+            <a:r>
+              <a:rPr lang="en-US" sz="1400" i="1" dirty="0">
+                <a:solidFill>
+                  <a:srgbClr val="4B5563"/>
+                </a:solidFill>
+              </a:rPr>
+              <a:t>No DBD, a taxa mínima chega a 1e-12 e a máxima, a dezenas.</a:t>
+            </a:r>
+            <a:endParaRPr lang="en-US" sz="1400" dirty="0"/>
           </a:p>
         </p:txBody>
       </p:sp>
@@ -3021,85 +3883,46 @@
                 <a:ea typeface="Calibri" pitchFamily="34" charset="-122"/>
                 <a:cs typeface="Calibri" pitchFamily="34" charset="-120"/>
               </a:rPr>
-              <a:t>Atividade</a:t>
+              <a:t>Sensibilidade do DBD</a:t>
             </a:r>
             <a:endParaRPr lang="en-US" sz="2600" dirty="0"/>
           </a:p>
         </p:txBody>
       </p:sp>
-      <p:sp>
-        <p:nvSpPr>
-          <p:cNvPr id="3" name="Shape 1"/>
-          <p:cNvSpPr/>
-          <p:nvPr/>
-        </p:nvSpPr>
-        <p:spPr>
-          <a:xfrm>
-            <a:off x="548640" y="1188720"/>
-            <a:ext cx="8046720" cy="3108960"/>
-          </a:xfrm>
-          <a:prstGeom prst="roundRect">
-            <a:avLst>
-              <a:gd name="adj" fmla="val 3529"/>
-            </a:avLst>
-          </a:prstGeom>
-          <a:solidFill>
-            <a:srgbClr val="FFFBEB"/>
-          </a:solidFill>
-          <a:ln w="25400">
-            <a:solidFill>
-              <a:srgbClr val="F59E0B"/>
-            </a:solidFill>
-            <a:prstDash val="solid"/>
-          </a:ln>
-        </p:spPr>
-      </p:sp>
-      <p:sp>
-        <p:nvSpPr>
-          <p:cNvPr id="4" name="Text 2"/>
+      <p:pic>
+        <p:nvPicPr>
+          <p:cNvPr id="3" name="Image 0" descr="Duas ordens de grandeza de variação só com κ e φ.">    </p:cNvPr>
+          <p:cNvPicPr>
+            <a:picLocks noChangeAspect="1"/>
+          </p:cNvPicPr>
+          <p:nvPr/>
+        </p:nvPicPr>
+        <p:blipFill>
+          <a:blip r:embed="rId1"/>
+          <a:stretch>
+            <a:fillRect/>
+          </a:stretch>
+        </p:blipFill>
+        <p:spPr>
+          <a:xfrm>
+            <a:off x="846656" y="1005840"/>
+            <a:ext cx="7450687" cy="3154680"/>
+          </a:xfrm>
+          <a:prstGeom prst="rect">
+            <a:avLst/>
+          </a:prstGeom>
+        </p:spPr>
+      </p:pic>
+      <p:sp>
+        <p:nvSpPr>
+          <p:cNvPr id="4" name="Text 1"/>
           <p:cNvSpPr txBox="1"/>
           <p:nvPr/>
         </p:nvSpPr>
         <p:spPr>
           <a:xfrm>
-            <a:off x="822960" y="1325880"/>
-            <a:ext cx="3657600" cy="365760"/>
-          </a:xfrm>
-          <a:prstGeom prst="rect">
-            <a:avLst/>
-          </a:prstGeom>
-          <a:noFill/>
-          <a:ln/>
-        </p:spPr>
-        <p:txBody>
-          <a:bodyPr wrap="square" lIns="0" tIns="0" rIns="0" bIns="0" rtlCol="0" anchor="ctr"/>
-          <a:lstStyle/>
-          <a:p>
-            <a:pPr indent="0" marL="0">
-              <a:buNone/>
-            </a:pPr>
-            <a:r>
-              <a:rPr lang="en-US" sz="1400" b="1" spc="300" kern="0" dirty="0">
-                <a:solidFill>
-                  <a:srgbClr val="B45309"/>
-                </a:solidFill>
-              </a:rPr>
-              <a:t>MÃO NA MASSA</a:t>
-            </a:r>
-            <a:endParaRPr lang="en-US" sz="1400" dirty="0"/>
-          </a:p>
-        </p:txBody>
-      </p:sp>
-      <p:sp>
-        <p:nvSpPr>
-          <p:cNvPr id="5" name="Text 3"/>
-          <p:cNvSpPr txBox="1"/>
-          <p:nvPr/>
-        </p:nvSpPr>
-        <p:spPr>
-          <a:xfrm>
-            <a:off x="822960" y="1783080"/>
-            <a:ext cx="7498080" cy="2377440"/>
+            <a:off x="457200" y="4251960"/>
+            <a:ext cx="8229600" cy="457200"/>
           </a:xfrm>
           <a:prstGeom prst="rect">
             <a:avLst/>
@@ -3113,18 +3936,18 @@
           </a:bodyPr>
           <a:lstStyle/>
           <a:p>
-            <a:pPr indent="0" marL="0">
+            <a:pPr algn="ctr" indent="0" marL="0">
               <a:buNone/>
             </a:pPr>
             <a:r>
-              <a:rPr lang="en-US" sz="2100" dirty="0">
-                <a:solidFill>
-                  <a:srgbClr val="1F2937"/>
-                </a:solidFill>
-              </a:rPr>
-              <a:t>Execute à mão três iterações do teste de sinal do DBD para g = (2; 1,5; −1), α₀ = 0,1, κ = 0,05, φ = 0,2, θ = 0,7.</a:t>
-            </a:r>
-            <a:endParaRPr lang="en-US" sz="2100" dirty="0"/>
+              <a:rPr lang="en-US" sz="1400" i="1" dirty="0">
+                <a:solidFill>
+                  <a:srgbClr val="4B5563"/>
+                </a:solidFill>
+              </a:rPr>
+              <a:t>Duas ordens de grandeza de variação só com κ e φ.</a:t>
+            </a:r>
+            <a:endParaRPr lang="en-US" sz="1400" dirty="0"/>
           </a:p>
         </p:txBody>
       </p:sp>
@@ -3206,6 +4029,1468 @@
         </p:nvSpPr>
         <p:spPr>
           <a:xfrm>
+            <a:off x="365760" y="109728"/>
+            <a:ext cx="8412480" cy="658368"/>
+          </a:xfrm>
+          <a:prstGeom prst="rect">
+            <a:avLst/>
+          </a:prstGeom>
+          <a:noFill/>
+          <a:ln/>
+        </p:spPr>
+        <p:txBody>
+          <a:bodyPr wrap="square" lIns="0" tIns="0" rIns="0" bIns="0" rtlCol="0" anchor="ctr">
+            <a:normAutofit/>
+          </a:bodyPr>
+          <a:lstStyle/>
+          <a:p>
+            <a:pPr indent="0" marL="0">
+              <a:buNone/>
+            </a:pPr>
+            <a:r>
+              <a:rPr lang="en-US" sz="2600" b="1" dirty="0">
+                <a:solidFill>
+                  <a:srgbClr val="FFFFFF"/>
+                </a:solidFill>
+                <a:latin typeface="Calibri" pitchFamily="34" charset="0"/>
+                <a:ea typeface="Calibri" pitchFamily="34" charset="-122"/>
+                <a:cs typeface="Calibri" pitchFamily="34" charset="-120"/>
+              </a:rPr>
+              <a:t>Não confunda</a:t>
+            </a:r>
+            <a:endParaRPr lang="en-US" sz="2600" dirty="0"/>
+          </a:p>
+        </p:txBody>
+      </p:sp>
+      <p:sp>
+        <p:nvSpPr>
+          <p:cNvPr id="3" name="Text 1"/>
+          <p:cNvSpPr txBox="1"/>
+          <p:nvPr/>
+        </p:nvSpPr>
+        <p:spPr>
+          <a:xfrm>
+            <a:off x="548640" y="1188720"/>
+            <a:ext cx="8046720" cy="3383280"/>
+          </a:xfrm>
+          <a:prstGeom prst="rect">
+            <a:avLst/>
+          </a:prstGeom>
+          <a:noFill/>
+          <a:ln/>
+        </p:spPr>
+        <p:txBody>
+          <a:bodyPr wrap="square" lIns="0" tIns="0" rIns="0" bIns="0" rtlCol="0" anchor="t">
+            <a:normAutofit/>
+          </a:bodyPr>
+          <a:lstStyle/>
+          <a:p>
+            <a:pPr marL="342900" indent="-342900">
+              <a:spcAft>
+                <a:spcPts val="1400"/>
+              </a:spcAft>
+              <a:buSzPct val="100000"/>
+              <a:buChar char="•"/>
+            </a:pPr>
+            <a:r>
+              <a:rPr lang="en-US" sz="2400" dirty="0">
+                <a:solidFill>
+                  <a:srgbClr val="1F2937"/>
+                </a:solidFill>
+              </a:rPr>
+              <a:t>Momento: mesmo β para todos, sem teste de sinal</a:t>
+            </a:r>
+            <a:endParaRPr lang="en-US" sz="2400" dirty="0"/>
+          </a:p>
+          <a:p>
+            <a:pPr marL="342900" indent="-342900">
+              <a:spcAft>
+                <a:spcPts val="1400"/>
+              </a:spcAft>
+              <a:buSzPct val="100000"/>
+              <a:buChar char="•"/>
+            </a:pPr>
+            <a:r>
+              <a:rPr lang="en-US" sz="2400" dirty="0">
+                <a:solidFill>
+                  <a:srgbClr val="1F2937"/>
+                </a:solidFill>
+              </a:rPr>
+              <a:t>ḡ serve só ao teste de sinal</a:t>
+            </a:r>
+            <a:endParaRPr lang="en-US" sz="2400" dirty="0"/>
+          </a:p>
+          <a:p>
+            <a:pPr marL="342900" indent="-342900">
+              <a:spcAft>
+                <a:spcPts val="1400"/>
+              </a:spcAft>
+              <a:buSzPct val="100000"/>
+              <a:buChar char="•"/>
+            </a:pPr>
+            <a:r>
+              <a:rPr lang="en-US" sz="2400" dirty="0">
+                <a:solidFill>
+                  <a:srgbClr val="1F2937"/>
+                </a:solidFill>
+              </a:rPr>
+              <a:t>RPROP: só o sinal no passo; DBD mantém a magnitude</a:t>
+            </a:r>
+            <a:endParaRPr lang="en-US" sz="2400" dirty="0"/>
+          </a:p>
+          <a:p>
+            <a:pPr marL="342900" indent="-342900">
+              <a:spcAft>
+                <a:spcPts val="1400"/>
+              </a:spcAft>
+              <a:buSzPct val="100000"/>
+              <a:buChar char="•"/>
+            </a:pPr>
+            <a:r>
+              <a:rPr lang="en-US" sz="2400" dirty="0">
+                <a:solidFill>
+                  <a:srgbClr val="1F2937"/>
+                </a:solidFill>
+              </a:rPr>
+              <a:t>Adam: outro regime; não foi avaliado aqui</a:t>
+            </a:r>
+            <a:endParaRPr lang="en-US" sz="2400" dirty="0"/>
+          </a:p>
+        </p:txBody>
+      </p:sp>
+      <p:sp>
+        <p:nvSpPr>
+          <p:cNvPr id="25" name="Slide Number Placeholder 0"/>
+          <p:cNvSpPr>
+            <a:spLocks noGrp="1"/>
+          </p:cNvSpPr>
+          <p:nvPr>
+            <p:ph type="sldNum" sz="quarter" idx="4294967295"/>
+          </p:nvPr>
+        </p:nvSpPr>
+        <p:spPr>
+          <a:xfrm>
+            <a:off x="8412480" y="4828032"/>
+            <a:ext cx="457200" cy="228600"/>
+          </a:xfrm>
+          <a:prstGeom prst="rect">
+            <a:avLst/>
+          </a:prstGeom>
+          <a:extLst>
+            <a:ext uri="{C572A759-6A51-4108-AA02-DFA0A04FC94B}">
+              <ma14:wrappingTextBoxFlag xmlns:ma14="http://schemas.microsoft.com/office/mac/drawingml/2011/main" val="0"/>
+            </a:ext>
+          </a:extLst>
+        </p:spPr>
+        <p:txBody>
+          <a:bodyPr/>
+          <a:lstStyle>
+            <a:lvl1pPr>
+              <a:defRPr sz="900">
+                <a:solidFill>
+                  <a:srgbClr val="6B7280"/>
+                </a:solidFill>
+              </a:defRPr>
+            </a:lvl1pPr>
+          </a:lstStyle>
+          <a:p>
+            <a:pPr algn="l"/>
+            <a:fld id="{F7021451-1387-4CA6-816F-3879F97B5CBC}" type="slidenum">
+              <a:rPr b="0" lang="en-US"/>
+              <a:t>14</a:t>
+            </a:fld>
+            <a:endParaRPr lang="en-US"/>
+          </a:p>
+        </p:txBody>
+      </p:sp>
+    </p:spTree>
+  </p:cSld>
+  <p:clrMapOvr>
+    <a:masterClrMapping/>
+  </p:clrMapOvr>
+</p:sld>
+</file>
+
+<file path=ppt/slides/slide15.xml><?xml version="1.0" encoding="utf-8"?>
+<p:sld xmlns:a="http://schemas.openxmlformats.org/drawingml/2006/main" xmlns:r="http://schemas.openxmlformats.org/officeDocument/2006/relationships" xmlns:p="http://schemas.openxmlformats.org/presentationml/2006/main">
+  <p:cSld name="Slide 15">
+    <p:spTree>
+      <p:nvGrpSpPr>
+        <p:cNvPr id="1" name=""/>
+        <p:cNvGrpSpPr/>
+        <p:nvPr/>
+      </p:nvGrpSpPr>
+      <p:grpSpPr>
+        <a:xfrm>
+          <a:off x="0" y="0"/>
+          <a:ext cx="0" cy="0"/>
+          <a:chOff x="0" y="0"/>
+          <a:chExt cx="0" cy="0"/>
+        </a:xfrm>
+      </p:grpSpPr>
+      <p:sp>
+        <p:nvSpPr>
+          <p:cNvPr id="2" name="Text 0"/>
+          <p:cNvSpPr txBox="1"/>
+          <p:nvPr/>
+        </p:nvSpPr>
+        <p:spPr>
+          <a:xfrm>
+            <a:off x="365760" y="109728"/>
+            <a:ext cx="8412480" cy="658368"/>
+          </a:xfrm>
+          <a:prstGeom prst="rect">
+            <a:avLst/>
+          </a:prstGeom>
+          <a:noFill/>
+          <a:ln/>
+        </p:spPr>
+        <p:txBody>
+          <a:bodyPr wrap="square" lIns="0" tIns="0" rIns="0" bIns="0" rtlCol="0" anchor="ctr">
+            <a:normAutofit/>
+          </a:bodyPr>
+          <a:lstStyle/>
+          <a:p>
+            <a:pPr indent="0" marL="0">
+              <a:buNone/>
+            </a:pPr>
+            <a:r>
+              <a:rPr lang="en-US" sz="2600" b="1" dirty="0">
+                <a:solidFill>
+                  <a:srgbClr val="FFFFFF"/>
+                </a:solidFill>
+                <a:latin typeface="Calibri" pitchFamily="34" charset="0"/>
+                <a:ea typeface="Calibri" pitchFamily="34" charset="-122"/>
+                <a:cs typeface="Calibri" pitchFamily="34" charset="-120"/>
+              </a:rPr>
+              <a:t>Mapa dos algoritmos do livro</a:t>
+            </a:r>
+            <a:endParaRPr lang="en-US" sz="2600" dirty="0"/>
+          </a:p>
+        </p:txBody>
+      </p:sp>
+      <p:sp>
+        <p:nvSpPr>
+          <p:cNvPr id="3" name="Text 1"/>
+          <p:cNvSpPr txBox="1"/>
+          <p:nvPr/>
+        </p:nvSpPr>
+        <p:spPr>
+          <a:xfrm>
+            <a:off x="548640" y="1188720"/>
+            <a:ext cx="8046720" cy="3383280"/>
+          </a:xfrm>
+          <a:prstGeom prst="rect">
+            <a:avLst/>
+          </a:prstGeom>
+          <a:noFill/>
+          <a:ln/>
+        </p:spPr>
+        <p:txBody>
+          <a:bodyPr wrap="square" lIns="0" tIns="0" rIns="0" bIns="0" rtlCol="0" anchor="t">
+            <a:normAutofit/>
+          </a:bodyPr>
+          <a:lstStyle/>
+          <a:p>
+            <a:pPr marL="342900" indent="-342900">
+              <a:spcAft>
+                <a:spcPts val="1400"/>
+              </a:spcAft>
+              <a:buSzPct val="100000"/>
+              <a:buChar char="•"/>
+            </a:pPr>
+            <a:r>
+              <a:rPr lang="en-US" sz="2400" dirty="0">
+                <a:solidFill>
+                  <a:srgbClr val="1F2937"/>
+                </a:solidFill>
+              </a:rPr>
+              <a:t>Quickprop: parábola por peso (secante)</a:t>
+            </a:r>
+            <a:endParaRPr lang="en-US" sz="2400" dirty="0"/>
+          </a:p>
+          <a:p>
+            <a:pPr marL="342900" indent="-342900">
+              <a:spcAft>
+                <a:spcPts val="1400"/>
+              </a:spcAft>
+              <a:buSzPct val="100000"/>
+              <a:buChar char="•"/>
+            </a:pPr>
+            <a:r>
+              <a:rPr lang="en-US" sz="2400" dirty="0">
+                <a:solidFill>
+                  <a:srgbClr val="1F2937"/>
+                </a:solidFill>
+              </a:rPr>
+              <a:t>RPROP: passo individual guiado pelo sinal</a:t>
+            </a:r>
+            <a:endParaRPr lang="en-US" sz="2400" dirty="0"/>
+          </a:p>
+          <a:p>
+            <a:pPr marL="342900" indent="-342900">
+              <a:spcAft>
+                <a:spcPts val="1400"/>
+              </a:spcAft>
+              <a:buSzPct val="100000"/>
+              <a:buChar char="•"/>
+            </a:pPr>
+            <a:r>
+              <a:rPr lang="en-US" sz="2400" dirty="0">
+                <a:solidFill>
+                  <a:srgbClr val="1F2937"/>
+                </a:solidFill>
+              </a:rPr>
+              <a:t>LM: curvatura aproximada por JᵀJ</a:t>
+            </a:r>
+            <a:endParaRPr lang="en-US" sz="2400" dirty="0"/>
+          </a:p>
+          <a:p>
+            <a:pPr marL="342900" indent="-342900">
+              <a:spcAft>
+                <a:spcPts val="1400"/>
+              </a:spcAft>
+              <a:buSzPct val="100000"/>
+              <a:buChar char="•"/>
+            </a:pPr>
+            <a:r>
+              <a:rPr lang="en-US" sz="2400" dirty="0">
+                <a:solidFill>
+                  <a:srgbClr val="1F2937"/>
+                </a:solidFill>
+              </a:rPr>
+              <a:t>DBD/EDBD: taxa (e momento) individual por peso</a:t>
+            </a:r>
+            <a:endParaRPr lang="en-US" sz="2400" dirty="0"/>
+          </a:p>
+          <a:p>
+            <a:pPr marL="342900" indent="-342900">
+              <a:spcAft>
+                <a:spcPts val="1400"/>
+              </a:spcAft>
+              <a:buSzPct val="100000"/>
+              <a:buChar char="•"/>
+            </a:pPr>
+            <a:r>
+              <a:rPr lang="en-US" sz="2400" dirty="0">
+                <a:solidFill>
+                  <a:srgbClr val="1F2937"/>
+                </a:solidFill>
+              </a:rPr>
+              <a:t>Nenhum vence sempre: depende do problema e do ajuste</a:t>
+            </a:r>
+            <a:endParaRPr lang="en-US" sz="2400" dirty="0"/>
+          </a:p>
+        </p:txBody>
+      </p:sp>
+      <p:sp>
+        <p:nvSpPr>
+          <p:cNvPr id="25" name="Slide Number Placeholder 0"/>
+          <p:cNvSpPr>
+            <a:spLocks noGrp="1"/>
+          </p:cNvSpPr>
+          <p:nvPr>
+            <p:ph type="sldNum" sz="quarter" idx="4294967295"/>
+          </p:nvPr>
+        </p:nvSpPr>
+        <p:spPr>
+          <a:xfrm>
+            <a:off x="8412480" y="4828032"/>
+            <a:ext cx="457200" cy="228600"/>
+          </a:xfrm>
+          <a:prstGeom prst="rect">
+            <a:avLst/>
+          </a:prstGeom>
+          <a:extLst>
+            <a:ext uri="{C572A759-6A51-4108-AA02-DFA0A04FC94B}">
+              <ma14:wrappingTextBoxFlag xmlns:ma14="http://schemas.microsoft.com/office/mac/drawingml/2011/main" val="0"/>
+            </a:ext>
+          </a:extLst>
+        </p:spPr>
+        <p:txBody>
+          <a:bodyPr/>
+          <a:lstStyle>
+            <a:lvl1pPr>
+              <a:defRPr sz="900">
+                <a:solidFill>
+                  <a:srgbClr val="6B7280"/>
+                </a:solidFill>
+              </a:defRPr>
+            </a:lvl1pPr>
+          </a:lstStyle>
+          <a:p>
+            <a:pPr algn="l"/>
+            <a:fld id="{F7021451-1387-4CA6-816F-3879F97B5CBC}" type="slidenum">
+              <a:rPr b="0" lang="en-US"/>
+              <a:t>15</a:t>
+            </a:fld>
+            <a:endParaRPr lang="en-US"/>
+          </a:p>
+        </p:txBody>
+      </p:sp>
+    </p:spTree>
+  </p:cSld>
+  <p:clrMapOvr>
+    <a:masterClrMapping/>
+  </p:clrMapOvr>
+</p:sld>
+</file>
+
+<file path=ppt/slides/slide16.xml><?xml version="1.0" encoding="utf-8"?>
+<p:sld xmlns:a="http://schemas.openxmlformats.org/drawingml/2006/main" xmlns:r="http://schemas.openxmlformats.org/officeDocument/2006/relationships" xmlns:p="http://schemas.openxmlformats.org/presentationml/2006/main">
+  <p:cSld name="Slide 16">
+    <p:spTree>
+      <p:nvGrpSpPr>
+        <p:cNvPr id="1" name=""/>
+        <p:cNvGrpSpPr/>
+        <p:nvPr/>
+      </p:nvGrpSpPr>
+      <p:grpSpPr>
+        <a:xfrm>
+          <a:off x="0" y="0"/>
+          <a:ext cx="0" cy="0"/>
+          <a:chOff x="0" y="0"/>
+          <a:chExt cx="0" cy="0"/>
+        </a:xfrm>
+      </p:grpSpPr>
+      <p:sp>
+        <p:nvSpPr>
+          <p:cNvPr id="2" name="Text 0"/>
+          <p:cNvSpPr txBox="1"/>
+          <p:nvPr/>
+        </p:nvSpPr>
+        <p:spPr>
+          <a:xfrm>
+            <a:off x="365760" y="109728"/>
+            <a:ext cx="8412480" cy="658368"/>
+          </a:xfrm>
+          <a:prstGeom prst="rect">
+            <a:avLst/>
+          </a:prstGeom>
+          <a:noFill/>
+          <a:ln/>
+        </p:spPr>
+        <p:txBody>
+          <a:bodyPr wrap="square" lIns="0" tIns="0" rIns="0" bIns="0" rtlCol="0" anchor="ctr">
+            <a:normAutofit/>
+          </a:bodyPr>
+          <a:lstStyle/>
+          <a:p>
+            <a:pPr indent="0" marL="0">
+              <a:buNone/>
+            </a:pPr>
+            <a:r>
+              <a:rPr lang="en-US" sz="2600" b="1" dirty="0">
+                <a:solidFill>
+                  <a:srgbClr val="FFFFFF"/>
+                </a:solidFill>
+                <a:latin typeface="Calibri" pitchFamily="34" charset="0"/>
+                <a:ea typeface="Calibri" pitchFamily="34" charset="-122"/>
+                <a:cs typeface="Calibri" pitchFamily="34" charset="-120"/>
+              </a:rPr>
+              <a:t>Quiz relâmpago 1</a:t>
+            </a:r>
+            <a:endParaRPr lang="en-US" sz="2600" dirty="0"/>
+          </a:p>
+        </p:txBody>
+      </p:sp>
+      <p:sp>
+        <p:nvSpPr>
+          <p:cNvPr id="3" name="Text 1"/>
+          <p:cNvSpPr txBox="1"/>
+          <p:nvPr/>
+        </p:nvSpPr>
+        <p:spPr>
+          <a:xfrm>
+            <a:off x="548640" y="1051560"/>
+            <a:ext cx="8046720" cy="822960"/>
+          </a:xfrm>
+          <a:prstGeom prst="rect">
+            <a:avLst/>
+          </a:prstGeom>
+          <a:noFill/>
+          <a:ln/>
+        </p:spPr>
+        <p:txBody>
+          <a:bodyPr wrap="square" lIns="0" tIns="0" rIns="0" bIns="0" rtlCol="0" anchor="ctr">
+            <a:normAutofit/>
+          </a:bodyPr>
+          <a:lstStyle/>
+          <a:p>
+            <a:pPr indent="0" marL="0">
+              <a:buNone/>
+            </a:pPr>
+            <a:r>
+              <a:rPr lang="en-US" sz="2200" b="1" dirty="0">
+                <a:solidFill>
+                  <a:srgbClr val="312E81"/>
+                </a:solidFill>
+              </a:rPr>
+              <a:t>No DBD, quando ḡ(t−1)·g(t) &gt; 0, a taxa:</a:t>
+            </a:r>
+            <a:endParaRPr lang="en-US" sz="2200" dirty="0"/>
+          </a:p>
+        </p:txBody>
+      </p:sp>
+      <p:sp>
+        <p:nvSpPr>
+          <p:cNvPr id="4" name="Shape 2"/>
+          <p:cNvSpPr/>
+          <p:nvPr/>
+        </p:nvSpPr>
+        <p:spPr>
+          <a:xfrm>
+            <a:off x="548640" y="1965960"/>
+            <a:ext cx="8046720" cy="548640"/>
+          </a:xfrm>
+          <a:prstGeom prst="roundRect">
+            <a:avLst>
+              <a:gd name="adj" fmla="val 13333"/>
+            </a:avLst>
+          </a:prstGeom>
+          <a:solidFill>
+            <a:srgbClr val="EEF2FF"/>
+          </a:solidFill>
+          <a:ln w="12700">
+            <a:solidFill>
+              <a:srgbClr val="C7D2FE"/>
+            </a:solidFill>
+            <a:prstDash val="solid"/>
+          </a:ln>
+        </p:spPr>
+      </p:sp>
+      <p:sp>
+        <p:nvSpPr>
+          <p:cNvPr id="5" name="Text 3"/>
+          <p:cNvSpPr txBox="1"/>
+          <p:nvPr/>
+        </p:nvSpPr>
+        <p:spPr>
+          <a:xfrm>
+            <a:off x="777240" y="1965960"/>
+            <a:ext cx="7680960" cy="548640"/>
+          </a:xfrm>
+          <a:prstGeom prst="rect">
+            <a:avLst/>
+          </a:prstGeom>
+          <a:noFill/>
+          <a:ln/>
+        </p:spPr>
+        <p:txBody>
+          <a:bodyPr wrap="square" lIns="0" tIns="0" rIns="0" bIns="0" rtlCol="0" anchor="ctr">
+            <a:normAutofit/>
+          </a:bodyPr>
+          <a:lstStyle/>
+          <a:p>
+            <a:pPr indent="0" marL="0">
+              <a:buNone/>
+            </a:pPr>
+            <a:r>
+              <a:rPr lang="en-US" sz="1800" dirty="0">
+                <a:solidFill>
+                  <a:srgbClr val="1F2937"/>
+                </a:solidFill>
+              </a:rPr>
+              <a:t>A)  Aumenta de κ</a:t>
+            </a:r>
+            <a:endParaRPr lang="en-US" sz="1800" dirty="0"/>
+          </a:p>
+        </p:txBody>
+      </p:sp>
+      <p:sp>
+        <p:nvSpPr>
+          <p:cNvPr id="6" name="Shape 4"/>
+          <p:cNvSpPr/>
+          <p:nvPr/>
+        </p:nvSpPr>
+        <p:spPr>
+          <a:xfrm>
+            <a:off x="548640" y="2606040"/>
+            <a:ext cx="8046720" cy="548640"/>
+          </a:xfrm>
+          <a:prstGeom prst="roundRect">
+            <a:avLst>
+              <a:gd name="adj" fmla="val 13333"/>
+            </a:avLst>
+          </a:prstGeom>
+          <a:solidFill>
+            <a:srgbClr val="EEF2FF"/>
+          </a:solidFill>
+          <a:ln w="12700">
+            <a:solidFill>
+              <a:srgbClr val="C7D2FE"/>
+            </a:solidFill>
+            <a:prstDash val="solid"/>
+          </a:ln>
+        </p:spPr>
+      </p:sp>
+      <p:sp>
+        <p:nvSpPr>
+          <p:cNvPr id="7" name="Text 5"/>
+          <p:cNvSpPr txBox="1"/>
+          <p:nvPr/>
+        </p:nvSpPr>
+        <p:spPr>
+          <a:xfrm>
+            <a:off x="777240" y="2606040"/>
+            <a:ext cx="7680960" cy="548640"/>
+          </a:xfrm>
+          <a:prstGeom prst="rect">
+            <a:avLst/>
+          </a:prstGeom>
+          <a:noFill/>
+          <a:ln/>
+        </p:spPr>
+        <p:txBody>
+          <a:bodyPr wrap="square" lIns="0" tIns="0" rIns="0" bIns="0" rtlCol="0" anchor="ctr">
+            <a:normAutofit/>
+          </a:bodyPr>
+          <a:lstStyle/>
+          <a:p>
+            <a:pPr indent="0" marL="0">
+              <a:buNone/>
+            </a:pPr>
+            <a:r>
+              <a:rPr lang="en-US" sz="1800" dirty="0">
+                <a:solidFill>
+                  <a:srgbClr val="1F2937"/>
+                </a:solidFill>
+              </a:rPr>
+              <a:t>B)  É multiplicada por (1 − φ)</a:t>
+            </a:r>
+            <a:endParaRPr lang="en-US" sz="1800" dirty="0"/>
+          </a:p>
+        </p:txBody>
+      </p:sp>
+      <p:sp>
+        <p:nvSpPr>
+          <p:cNvPr id="8" name="Shape 6"/>
+          <p:cNvSpPr/>
+          <p:nvPr/>
+        </p:nvSpPr>
+        <p:spPr>
+          <a:xfrm>
+            <a:off x="548640" y="3246120"/>
+            <a:ext cx="8046720" cy="548640"/>
+          </a:xfrm>
+          <a:prstGeom prst="roundRect">
+            <a:avLst>
+              <a:gd name="adj" fmla="val 13333"/>
+            </a:avLst>
+          </a:prstGeom>
+          <a:solidFill>
+            <a:srgbClr val="EEF2FF"/>
+          </a:solidFill>
+          <a:ln w="12700">
+            <a:solidFill>
+              <a:srgbClr val="C7D2FE"/>
+            </a:solidFill>
+            <a:prstDash val="solid"/>
+          </a:ln>
+        </p:spPr>
+      </p:sp>
+      <p:sp>
+        <p:nvSpPr>
+          <p:cNvPr id="9" name="Text 7"/>
+          <p:cNvSpPr txBox="1"/>
+          <p:nvPr/>
+        </p:nvSpPr>
+        <p:spPr>
+          <a:xfrm>
+            <a:off x="777240" y="3246120"/>
+            <a:ext cx="7680960" cy="548640"/>
+          </a:xfrm>
+          <a:prstGeom prst="rect">
+            <a:avLst/>
+          </a:prstGeom>
+          <a:noFill/>
+          <a:ln/>
+        </p:spPr>
+        <p:txBody>
+          <a:bodyPr wrap="square" lIns="0" tIns="0" rIns="0" bIns="0" rtlCol="0" anchor="ctr">
+            <a:normAutofit/>
+          </a:bodyPr>
+          <a:lstStyle/>
+          <a:p>
+            <a:pPr indent="0" marL="0">
+              <a:buNone/>
+            </a:pPr>
+            <a:r>
+              <a:rPr lang="en-US" sz="1800" dirty="0">
+                <a:solidFill>
+                  <a:srgbClr val="1F2937"/>
+                </a:solidFill>
+              </a:rPr>
+              <a:t>C)  Fica negativa</a:t>
+            </a:r>
+            <a:endParaRPr lang="en-US" sz="1800" dirty="0"/>
+          </a:p>
+        </p:txBody>
+      </p:sp>
+      <p:sp>
+        <p:nvSpPr>
+          <p:cNvPr id="10" name="Shape 8"/>
+          <p:cNvSpPr/>
+          <p:nvPr/>
+        </p:nvSpPr>
+        <p:spPr>
+          <a:xfrm>
+            <a:off x="548640" y="3886200"/>
+            <a:ext cx="8046720" cy="548640"/>
+          </a:xfrm>
+          <a:prstGeom prst="roundRect">
+            <a:avLst>
+              <a:gd name="adj" fmla="val 13333"/>
+            </a:avLst>
+          </a:prstGeom>
+          <a:solidFill>
+            <a:srgbClr val="EEF2FF"/>
+          </a:solidFill>
+          <a:ln w="12700">
+            <a:solidFill>
+              <a:srgbClr val="C7D2FE"/>
+            </a:solidFill>
+            <a:prstDash val="solid"/>
+          </a:ln>
+        </p:spPr>
+      </p:sp>
+      <p:sp>
+        <p:nvSpPr>
+          <p:cNvPr id="11" name="Text 9"/>
+          <p:cNvSpPr txBox="1"/>
+          <p:nvPr/>
+        </p:nvSpPr>
+        <p:spPr>
+          <a:xfrm>
+            <a:off x="777240" y="3886200"/>
+            <a:ext cx="7680960" cy="548640"/>
+          </a:xfrm>
+          <a:prstGeom prst="rect">
+            <a:avLst/>
+          </a:prstGeom>
+          <a:noFill/>
+          <a:ln/>
+        </p:spPr>
+        <p:txBody>
+          <a:bodyPr wrap="square" lIns="0" tIns="0" rIns="0" bIns="0" rtlCol="0" anchor="ctr">
+            <a:normAutofit/>
+          </a:bodyPr>
+          <a:lstStyle/>
+          <a:p>
+            <a:pPr indent="0" marL="0">
+              <a:buNone/>
+            </a:pPr>
+            <a:r>
+              <a:rPr lang="en-US" sz="1800" dirty="0">
+                <a:solidFill>
+                  <a:srgbClr val="1F2937"/>
+                </a:solidFill>
+              </a:rPr>
+              <a:t>D)  É zerada</a:t>
+            </a:r>
+            <a:endParaRPr lang="en-US" sz="1800" dirty="0"/>
+          </a:p>
+        </p:txBody>
+      </p:sp>
+      <p:sp>
+        <p:nvSpPr>
+          <p:cNvPr id="25" name="Slide Number Placeholder 0"/>
+          <p:cNvSpPr>
+            <a:spLocks noGrp="1"/>
+          </p:cNvSpPr>
+          <p:nvPr>
+            <p:ph type="sldNum" sz="quarter" idx="4294967295"/>
+          </p:nvPr>
+        </p:nvSpPr>
+        <p:spPr>
+          <a:xfrm>
+            <a:off x="8412480" y="4828032"/>
+            <a:ext cx="457200" cy="228600"/>
+          </a:xfrm>
+          <a:prstGeom prst="rect">
+            <a:avLst/>
+          </a:prstGeom>
+          <a:extLst>
+            <a:ext uri="{C572A759-6A51-4108-AA02-DFA0A04FC94B}">
+              <ma14:wrappingTextBoxFlag xmlns:ma14="http://schemas.microsoft.com/office/mac/drawingml/2011/main" val="0"/>
+            </a:ext>
+          </a:extLst>
+        </p:spPr>
+        <p:txBody>
+          <a:bodyPr/>
+          <a:lstStyle>
+            <a:lvl1pPr>
+              <a:defRPr sz="900">
+                <a:solidFill>
+                  <a:srgbClr val="6B7280"/>
+                </a:solidFill>
+              </a:defRPr>
+            </a:lvl1pPr>
+          </a:lstStyle>
+          <a:p>
+            <a:pPr algn="l"/>
+            <a:fld id="{F7021451-1387-4CA6-816F-3879F97B5CBC}" type="slidenum">
+              <a:rPr b="0" lang="en-US"/>
+              <a:t>16</a:t>
+            </a:fld>
+            <a:endParaRPr lang="en-US"/>
+          </a:p>
+        </p:txBody>
+      </p:sp>
+    </p:spTree>
+  </p:cSld>
+  <p:clrMapOvr>
+    <a:masterClrMapping/>
+  </p:clrMapOvr>
+</p:sld>
+</file>
+
+<file path=ppt/slides/slide17.xml><?xml version="1.0" encoding="utf-8"?>
+<p:sld xmlns:a="http://schemas.openxmlformats.org/drawingml/2006/main" xmlns:r="http://schemas.openxmlformats.org/officeDocument/2006/relationships" xmlns:p="http://schemas.openxmlformats.org/presentationml/2006/main">
+  <p:cSld name="Slide 17">
+    <p:spTree>
+      <p:nvGrpSpPr>
+        <p:cNvPr id="1" name=""/>
+        <p:cNvGrpSpPr/>
+        <p:nvPr/>
+      </p:nvGrpSpPr>
+      <p:grpSpPr>
+        <a:xfrm>
+          <a:off x="0" y="0"/>
+          <a:ext cx="0" cy="0"/>
+          <a:chOff x="0" y="0"/>
+          <a:chExt cx="0" cy="0"/>
+        </a:xfrm>
+      </p:grpSpPr>
+      <p:sp>
+        <p:nvSpPr>
+          <p:cNvPr id="2" name="Text 0"/>
+          <p:cNvSpPr txBox="1"/>
+          <p:nvPr/>
+        </p:nvSpPr>
+        <p:spPr>
+          <a:xfrm>
+            <a:off x="365760" y="109728"/>
+            <a:ext cx="8412480" cy="658368"/>
+          </a:xfrm>
+          <a:prstGeom prst="rect">
+            <a:avLst/>
+          </a:prstGeom>
+          <a:noFill/>
+          <a:ln/>
+        </p:spPr>
+        <p:txBody>
+          <a:bodyPr wrap="square" lIns="0" tIns="0" rIns="0" bIns="0" rtlCol="0" anchor="ctr">
+            <a:normAutofit/>
+          </a:bodyPr>
+          <a:lstStyle/>
+          <a:p>
+            <a:pPr indent="0" marL="0">
+              <a:buNone/>
+            </a:pPr>
+            <a:r>
+              <a:rPr lang="en-US" sz="2600" b="1" dirty="0">
+                <a:solidFill>
+                  <a:srgbClr val="FFFFFF"/>
+                </a:solidFill>
+                <a:latin typeface="Calibri" pitchFamily="34" charset="0"/>
+                <a:ea typeface="Calibri" pitchFamily="34" charset="-122"/>
+                <a:cs typeface="Calibri" pitchFamily="34" charset="-120"/>
+              </a:rPr>
+              <a:t>Quiz relâmpago 2</a:t>
+            </a:r>
+            <a:endParaRPr lang="en-US" sz="2600" dirty="0"/>
+          </a:p>
+        </p:txBody>
+      </p:sp>
+      <p:sp>
+        <p:nvSpPr>
+          <p:cNvPr id="3" name="Text 1"/>
+          <p:cNvSpPr txBox="1"/>
+          <p:nvPr/>
+        </p:nvSpPr>
+        <p:spPr>
+          <a:xfrm>
+            <a:off x="548640" y="1051560"/>
+            <a:ext cx="8046720" cy="822960"/>
+          </a:xfrm>
+          <a:prstGeom prst="rect">
+            <a:avLst/>
+          </a:prstGeom>
+          <a:noFill/>
+          <a:ln/>
+        </p:spPr>
+        <p:txBody>
+          <a:bodyPr wrap="square" lIns="0" tIns="0" rIns="0" bIns="0" rtlCol="0" anchor="ctr">
+            <a:normAutofit/>
+          </a:bodyPr>
+          <a:lstStyle/>
+          <a:p>
+            <a:pPr indent="0" marL="0">
+              <a:buNone/>
+            </a:pPr>
+            <a:r>
+              <a:rPr lang="en-US" sz="2200" b="1" dirty="0">
+                <a:solidFill>
+                  <a:srgbClr val="312E81"/>
+                </a:solidFill>
+              </a:rPr>
+              <a:t>Qual defeito da delta-delta o DBD corrige?</a:t>
+            </a:r>
+            <a:endParaRPr lang="en-US" sz="2200" dirty="0"/>
+          </a:p>
+        </p:txBody>
+      </p:sp>
+      <p:sp>
+        <p:nvSpPr>
+          <p:cNvPr id="4" name="Shape 2"/>
+          <p:cNvSpPr/>
+          <p:nvPr/>
+        </p:nvSpPr>
+        <p:spPr>
+          <a:xfrm>
+            <a:off x="548640" y="1965960"/>
+            <a:ext cx="8046720" cy="548640"/>
+          </a:xfrm>
+          <a:prstGeom prst="roundRect">
+            <a:avLst>
+              <a:gd name="adj" fmla="val 13333"/>
+            </a:avLst>
+          </a:prstGeom>
+          <a:solidFill>
+            <a:srgbClr val="EEF2FF"/>
+          </a:solidFill>
+          <a:ln w="12700">
+            <a:solidFill>
+              <a:srgbClr val="C7D2FE"/>
+            </a:solidFill>
+            <a:prstDash val="solid"/>
+          </a:ln>
+        </p:spPr>
+      </p:sp>
+      <p:sp>
+        <p:nvSpPr>
+          <p:cNvPr id="5" name="Text 3"/>
+          <p:cNvSpPr txBox="1"/>
+          <p:nvPr/>
+        </p:nvSpPr>
+        <p:spPr>
+          <a:xfrm>
+            <a:off x="777240" y="1965960"/>
+            <a:ext cx="7680960" cy="548640"/>
+          </a:xfrm>
+          <a:prstGeom prst="rect">
+            <a:avLst/>
+          </a:prstGeom>
+          <a:noFill/>
+          <a:ln/>
+        </p:spPr>
+        <p:txBody>
+          <a:bodyPr wrap="square" lIns="0" tIns="0" rIns="0" bIns="0" rtlCol="0" anchor="ctr">
+            <a:normAutofit/>
+          </a:bodyPr>
+          <a:lstStyle/>
+          <a:p>
+            <a:pPr indent="0" marL="0">
+              <a:buNone/>
+            </a:pPr>
+            <a:r>
+              <a:rPr lang="en-US" sz="1800" dirty="0">
+                <a:solidFill>
+                  <a:srgbClr val="1F2937"/>
+                </a:solidFill>
+              </a:rPr>
+              <a:t>A)  Taxa negativa ou explosiva e dependência da escala</a:t>
+            </a:r>
+            <a:endParaRPr lang="en-US" sz="1800" dirty="0"/>
+          </a:p>
+        </p:txBody>
+      </p:sp>
+      <p:sp>
+        <p:nvSpPr>
+          <p:cNvPr id="6" name="Shape 4"/>
+          <p:cNvSpPr/>
+          <p:nvPr/>
+        </p:nvSpPr>
+        <p:spPr>
+          <a:xfrm>
+            <a:off x="548640" y="2606040"/>
+            <a:ext cx="8046720" cy="548640"/>
+          </a:xfrm>
+          <a:prstGeom prst="roundRect">
+            <a:avLst>
+              <a:gd name="adj" fmla="val 13333"/>
+            </a:avLst>
+          </a:prstGeom>
+          <a:solidFill>
+            <a:srgbClr val="EEF2FF"/>
+          </a:solidFill>
+          <a:ln w="12700">
+            <a:solidFill>
+              <a:srgbClr val="C7D2FE"/>
+            </a:solidFill>
+            <a:prstDash val="solid"/>
+          </a:ln>
+        </p:spPr>
+      </p:sp>
+      <p:sp>
+        <p:nvSpPr>
+          <p:cNvPr id="7" name="Text 5"/>
+          <p:cNvSpPr txBox="1"/>
+          <p:nvPr/>
+        </p:nvSpPr>
+        <p:spPr>
+          <a:xfrm>
+            <a:off x="777240" y="2606040"/>
+            <a:ext cx="7680960" cy="548640"/>
+          </a:xfrm>
+          <a:prstGeom prst="rect">
+            <a:avLst/>
+          </a:prstGeom>
+          <a:noFill/>
+          <a:ln/>
+        </p:spPr>
+        <p:txBody>
+          <a:bodyPr wrap="square" lIns="0" tIns="0" rIns="0" bIns="0" rtlCol="0" anchor="ctr">
+            <a:normAutofit/>
+          </a:bodyPr>
+          <a:lstStyle/>
+          <a:p>
+            <a:pPr indent="0" marL="0">
+              <a:buNone/>
+            </a:pPr>
+            <a:r>
+              <a:rPr lang="en-US" sz="1800" dirty="0">
+                <a:solidFill>
+                  <a:srgbClr val="1F2937"/>
+                </a:solidFill>
+              </a:rPr>
+              <a:t>B)  Falta de gradiente</a:t>
+            </a:r>
+            <a:endParaRPr lang="en-US" sz="1800" dirty="0"/>
+          </a:p>
+        </p:txBody>
+      </p:sp>
+      <p:sp>
+        <p:nvSpPr>
+          <p:cNvPr id="8" name="Shape 6"/>
+          <p:cNvSpPr/>
+          <p:nvPr/>
+        </p:nvSpPr>
+        <p:spPr>
+          <a:xfrm>
+            <a:off x="548640" y="3246120"/>
+            <a:ext cx="8046720" cy="548640"/>
+          </a:xfrm>
+          <a:prstGeom prst="roundRect">
+            <a:avLst>
+              <a:gd name="adj" fmla="val 13333"/>
+            </a:avLst>
+          </a:prstGeom>
+          <a:solidFill>
+            <a:srgbClr val="EEF2FF"/>
+          </a:solidFill>
+          <a:ln w="12700">
+            <a:solidFill>
+              <a:srgbClr val="C7D2FE"/>
+            </a:solidFill>
+            <a:prstDash val="solid"/>
+          </a:ln>
+        </p:spPr>
+      </p:sp>
+      <p:sp>
+        <p:nvSpPr>
+          <p:cNvPr id="9" name="Text 7"/>
+          <p:cNvSpPr txBox="1"/>
+          <p:nvPr/>
+        </p:nvSpPr>
+        <p:spPr>
+          <a:xfrm>
+            <a:off x="777240" y="3246120"/>
+            <a:ext cx="7680960" cy="548640"/>
+          </a:xfrm>
+          <a:prstGeom prst="rect">
+            <a:avLst/>
+          </a:prstGeom>
+          <a:noFill/>
+          <a:ln/>
+        </p:spPr>
+        <p:txBody>
+          <a:bodyPr wrap="square" lIns="0" tIns="0" rIns="0" bIns="0" rtlCol="0" anchor="ctr">
+            <a:normAutofit/>
+          </a:bodyPr>
+          <a:lstStyle/>
+          <a:p>
+            <a:pPr indent="0" marL="0">
+              <a:buNone/>
+            </a:pPr>
+            <a:r>
+              <a:rPr lang="en-US" sz="1800" dirty="0">
+                <a:solidFill>
+                  <a:srgbClr val="1F2937"/>
+                </a:solidFill>
+              </a:rPr>
+              <a:t>C)  Excesso de memória</a:t>
+            </a:r>
+            <a:endParaRPr lang="en-US" sz="1800" dirty="0"/>
+          </a:p>
+        </p:txBody>
+      </p:sp>
+      <p:sp>
+        <p:nvSpPr>
+          <p:cNvPr id="10" name="Shape 8"/>
+          <p:cNvSpPr/>
+          <p:nvPr/>
+        </p:nvSpPr>
+        <p:spPr>
+          <a:xfrm>
+            <a:off x="548640" y="3886200"/>
+            <a:ext cx="8046720" cy="548640"/>
+          </a:xfrm>
+          <a:prstGeom prst="roundRect">
+            <a:avLst>
+              <a:gd name="adj" fmla="val 13333"/>
+            </a:avLst>
+          </a:prstGeom>
+          <a:solidFill>
+            <a:srgbClr val="EEF2FF"/>
+          </a:solidFill>
+          <a:ln w="12700">
+            <a:solidFill>
+              <a:srgbClr val="C7D2FE"/>
+            </a:solidFill>
+            <a:prstDash val="solid"/>
+          </a:ln>
+        </p:spPr>
+      </p:sp>
+      <p:sp>
+        <p:nvSpPr>
+          <p:cNvPr id="11" name="Text 9"/>
+          <p:cNvSpPr txBox="1"/>
+          <p:nvPr/>
+        </p:nvSpPr>
+        <p:spPr>
+          <a:xfrm>
+            <a:off x="777240" y="3886200"/>
+            <a:ext cx="7680960" cy="548640"/>
+          </a:xfrm>
+          <a:prstGeom prst="rect">
+            <a:avLst/>
+          </a:prstGeom>
+          <a:noFill/>
+          <a:ln/>
+        </p:spPr>
+        <p:txBody>
+          <a:bodyPr wrap="square" lIns="0" tIns="0" rIns="0" bIns="0" rtlCol="0" anchor="ctr">
+            <a:normAutofit/>
+          </a:bodyPr>
+          <a:lstStyle/>
+          <a:p>
+            <a:pPr indent="0" marL="0">
+              <a:buNone/>
+            </a:pPr>
+            <a:r>
+              <a:rPr lang="en-US" sz="1800" dirty="0">
+                <a:solidFill>
+                  <a:srgbClr val="1F2937"/>
+                </a:solidFill>
+              </a:rPr>
+              <a:t>D)  Uso da Hessiana</a:t>
+            </a:r>
+            <a:endParaRPr lang="en-US" sz="1800" dirty="0"/>
+          </a:p>
+        </p:txBody>
+      </p:sp>
+      <p:sp>
+        <p:nvSpPr>
+          <p:cNvPr id="25" name="Slide Number Placeholder 0"/>
+          <p:cNvSpPr>
+            <a:spLocks noGrp="1"/>
+          </p:cNvSpPr>
+          <p:nvPr>
+            <p:ph type="sldNum" sz="quarter" idx="4294967295"/>
+          </p:nvPr>
+        </p:nvSpPr>
+        <p:spPr>
+          <a:xfrm>
+            <a:off x="8412480" y="4828032"/>
+            <a:ext cx="457200" cy="228600"/>
+          </a:xfrm>
+          <a:prstGeom prst="rect">
+            <a:avLst/>
+          </a:prstGeom>
+          <a:extLst>
+            <a:ext uri="{C572A759-6A51-4108-AA02-DFA0A04FC94B}">
+              <ma14:wrappingTextBoxFlag xmlns:ma14="http://schemas.microsoft.com/office/mac/drawingml/2011/main" val="0"/>
+            </a:ext>
+          </a:extLst>
+        </p:spPr>
+        <p:txBody>
+          <a:bodyPr/>
+          <a:lstStyle>
+            <a:lvl1pPr>
+              <a:defRPr sz="900">
+                <a:solidFill>
+                  <a:srgbClr val="6B7280"/>
+                </a:solidFill>
+              </a:defRPr>
+            </a:lvl1pPr>
+          </a:lstStyle>
+          <a:p>
+            <a:pPr algn="l"/>
+            <a:fld id="{F7021451-1387-4CA6-816F-3879F97B5CBC}" type="slidenum">
+              <a:rPr b="0" lang="en-US"/>
+              <a:t>17</a:t>
+            </a:fld>
+            <a:endParaRPr lang="en-US"/>
+          </a:p>
+        </p:txBody>
+      </p:sp>
+    </p:spTree>
+  </p:cSld>
+  <p:clrMapOvr>
+    <a:masterClrMapping/>
+  </p:clrMapOvr>
+</p:sld>
+</file>
+
+<file path=ppt/slides/slide18.xml><?xml version="1.0" encoding="utf-8"?>
+<p:sld xmlns:a="http://schemas.openxmlformats.org/drawingml/2006/main" xmlns:r="http://schemas.openxmlformats.org/officeDocument/2006/relationships" xmlns:p="http://schemas.openxmlformats.org/presentationml/2006/main">
+  <p:cSld name="Slide 18">
+    <p:spTree>
+      <p:nvGrpSpPr>
+        <p:cNvPr id="1" name=""/>
+        <p:cNvGrpSpPr/>
+        <p:nvPr/>
+      </p:nvGrpSpPr>
+      <p:grpSpPr>
+        <a:xfrm>
+          <a:off x="0" y="0"/>
+          <a:ext cx="0" cy="0"/>
+          <a:chOff x="0" y="0"/>
+          <a:chExt cx="0" cy="0"/>
+        </a:xfrm>
+      </p:grpSpPr>
+      <p:sp>
+        <p:nvSpPr>
+          <p:cNvPr id="2" name="Text 0"/>
+          <p:cNvSpPr txBox="1"/>
+          <p:nvPr/>
+        </p:nvSpPr>
+        <p:spPr>
+          <a:xfrm>
+            <a:off x="365760" y="109728"/>
+            <a:ext cx="8412480" cy="658368"/>
+          </a:xfrm>
+          <a:prstGeom prst="rect">
+            <a:avLst/>
+          </a:prstGeom>
+          <a:noFill/>
+          <a:ln/>
+        </p:spPr>
+        <p:txBody>
+          <a:bodyPr wrap="square" lIns="0" tIns="0" rIns="0" bIns="0" rtlCol="0" anchor="ctr">
+            <a:normAutofit/>
+          </a:bodyPr>
+          <a:lstStyle/>
+          <a:p>
+            <a:pPr indent="0" marL="0">
+              <a:buNone/>
+            </a:pPr>
+            <a:r>
+              <a:rPr lang="en-US" sz="2600" b="1" dirty="0">
+                <a:solidFill>
+                  <a:srgbClr val="FFFFFF"/>
+                </a:solidFill>
+                <a:latin typeface="Calibri" pitchFamily="34" charset="0"/>
+                <a:ea typeface="Calibri" pitchFamily="34" charset="-122"/>
+                <a:cs typeface="Calibri" pitchFamily="34" charset="-120"/>
+              </a:rPr>
+              <a:t>Atividade</a:t>
+            </a:r>
+            <a:endParaRPr lang="en-US" sz="2600" dirty="0"/>
+          </a:p>
+        </p:txBody>
+      </p:sp>
+      <p:sp>
+        <p:nvSpPr>
+          <p:cNvPr id="3" name="Shape 1"/>
+          <p:cNvSpPr/>
+          <p:nvPr/>
+        </p:nvSpPr>
+        <p:spPr>
+          <a:xfrm>
+            <a:off x="548640" y="1188720"/>
+            <a:ext cx="8046720" cy="3108960"/>
+          </a:xfrm>
+          <a:prstGeom prst="roundRect">
+            <a:avLst>
+              <a:gd name="adj" fmla="val 3529"/>
+            </a:avLst>
+          </a:prstGeom>
+          <a:solidFill>
+            <a:srgbClr val="FFFBEB"/>
+          </a:solidFill>
+          <a:ln w="25400">
+            <a:solidFill>
+              <a:srgbClr val="F59E0B"/>
+            </a:solidFill>
+            <a:prstDash val="solid"/>
+          </a:ln>
+        </p:spPr>
+      </p:sp>
+      <p:sp>
+        <p:nvSpPr>
+          <p:cNvPr id="4" name="Text 2"/>
+          <p:cNvSpPr txBox="1"/>
+          <p:nvPr/>
+        </p:nvSpPr>
+        <p:spPr>
+          <a:xfrm>
+            <a:off x="822960" y="1325880"/>
+            <a:ext cx="3657600" cy="365760"/>
+          </a:xfrm>
+          <a:prstGeom prst="rect">
+            <a:avLst/>
+          </a:prstGeom>
+          <a:noFill/>
+          <a:ln/>
+        </p:spPr>
+        <p:txBody>
+          <a:bodyPr wrap="square" lIns="0" tIns="0" rIns="0" bIns="0" rtlCol="0" anchor="ctr"/>
+          <a:lstStyle/>
+          <a:p>
+            <a:pPr indent="0" marL="0">
+              <a:buNone/>
+            </a:pPr>
+            <a:r>
+              <a:rPr lang="en-US" sz="1400" b="1" spc="300" kern="0" dirty="0">
+                <a:solidFill>
+                  <a:srgbClr val="B45309"/>
+                </a:solidFill>
+              </a:rPr>
+              <a:t>MÃO NA MASSA</a:t>
+            </a:r>
+            <a:endParaRPr lang="en-US" sz="1400" dirty="0"/>
+          </a:p>
+        </p:txBody>
+      </p:sp>
+      <p:sp>
+        <p:nvSpPr>
+          <p:cNvPr id="5" name="Text 3"/>
+          <p:cNvSpPr txBox="1"/>
+          <p:nvPr/>
+        </p:nvSpPr>
+        <p:spPr>
+          <a:xfrm>
+            <a:off x="822960" y="1783080"/>
+            <a:ext cx="7498080" cy="2377440"/>
+          </a:xfrm>
+          <a:prstGeom prst="rect">
+            <a:avLst/>
+          </a:prstGeom>
+          <a:noFill/>
+          <a:ln/>
+        </p:spPr>
+        <p:txBody>
+          <a:bodyPr wrap="square" lIns="0" tIns="0" rIns="0" bIns="0" rtlCol="0" anchor="t">
+            <a:normAutofit/>
+          </a:bodyPr>
+          <a:lstStyle/>
+          <a:p>
+            <a:pPr indent="0" marL="0">
+              <a:buNone/>
+            </a:pPr>
+            <a:r>
+              <a:rPr lang="en-US" sz="2100" dirty="0">
+                <a:solidFill>
+                  <a:srgbClr val="1F2937"/>
+                </a:solidFill>
+              </a:rPr>
+              <a:t>Execute à mão três iterações do teste de sinal do DBD para g = (2; 1,5; −1), α₀ = 0,1, κ = 0,05, φ = 0,2, θ = 0,7.</a:t>
+            </a:r>
+            <a:endParaRPr lang="en-US" sz="2100" dirty="0"/>
+          </a:p>
+        </p:txBody>
+      </p:sp>
+      <p:sp>
+        <p:nvSpPr>
+          <p:cNvPr id="25" name="Slide Number Placeholder 0"/>
+          <p:cNvSpPr>
+            <a:spLocks noGrp="1"/>
+          </p:cNvSpPr>
+          <p:nvPr>
+            <p:ph type="sldNum" sz="quarter" idx="4294967295"/>
+          </p:nvPr>
+        </p:nvSpPr>
+        <p:spPr>
+          <a:xfrm>
+            <a:off x="8412480" y="4828032"/>
+            <a:ext cx="457200" cy="228600"/>
+          </a:xfrm>
+          <a:prstGeom prst="rect">
+            <a:avLst/>
+          </a:prstGeom>
+          <a:extLst>
+            <a:ext uri="{C572A759-6A51-4108-AA02-DFA0A04FC94B}">
+              <ma14:wrappingTextBoxFlag xmlns:ma14="http://schemas.microsoft.com/office/mac/drawingml/2011/main" val="0"/>
+            </a:ext>
+          </a:extLst>
+        </p:spPr>
+        <p:txBody>
+          <a:bodyPr/>
+          <a:lstStyle>
+            <a:lvl1pPr>
+              <a:defRPr sz="900">
+                <a:solidFill>
+                  <a:srgbClr val="6B7280"/>
+                </a:solidFill>
+              </a:defRPr>
+            </a:lvl1pPr>
+          </a:lstStyle>
+          <a:p>
+            <a:pPr algn="l"/>
+            <a:fld id="{F7021451-1387-4CA6-816F-3879F97B5CBC}" type="slidenum">
+              <a:rPr b="0" lang="en-US"/>
+              <a:t>18</a:t>
+            </a:fld>
+            <a:endParaRPr lang="en-US"/>
+          </a:p>
+        </p:txBody>
+      </p:sp>
+    </p:spTree>
+  </p:cSld>
+  <p:clrMapOvr>
+    <a:masterClrMapping/>
+  </p:clrMapOvr>
+</p:sld>
+</file>
+
+<file path=ppt/slides/slide19.xml><?xml version="1.0" encoding="utf-8"?>
+<p:sld xmlns:a="http://schemas.openxmlformats.org/drawingml/2006/main" xmlns:r="http://schemas.openxmlformats.org/officeDocument/2006/relationships" xmlns:p="http://schemas.openxmlformats.org/presentationml/2006/main">
+  <p:cSld name="Slide 19">
+    <p:spTree>
+      <p:nvGrpSpPr>
+        <p:cNvPr id="1" name=""/>
+        <p:cNvGrpSpPr/>
+        <p:nvPr/>
+      </p:nvGrpSpPr>
+      <p:grpSpPr>
+        <a:xfrm>
+          <a:off x="0" y="0"/>
+          <a:ext cx="0" cy="0"/>
+          <a:chOff x="0" y="0"/>
+          <a:chExt cx="0" cy="0"/>
+        </a:xfrm>
+      </p:grpSpPr>
+      <p:sp>
+        <p:nvSpPr>
+          <p:cNvPr id="2" name="Text 0"/>
+          <p:cNvSpPr txBox="1"/>
+          <p:nvPr/>
+        </p:nvSpPr>
+        <p:spPr>
+          <a:xfrm>
             <a:off x="640080" y="457200"/>
             <a:ext cx="7863840" cy="731520"/>
           </a:xfrm>
@@ -3388,7 +5673,7 @@
                 <a:ea typeface="Calibri" pitchFamily="34" charset="-122"/>
                 <a:cs typeface="Calibri" pitchFamily="34" charset="-120"/>
               </a:rPr>
-              <a:t>Situação inicial: por que a mesma taxa para todos?</a:t>
+              <a:t>Roteiro da aula</a:t>
             </a:r>
             <a:endParaRPr lang="en-US" sz="2600" dirty="0"/>
           </a:p>
@@ -3402,8 +5687,8 @@
         </p:nvSpPr>
         <p:spPr>
           <a:xfrm>
-            <a:off x="548640" y="1188720"/>
-            <a:ext cx="8046720" cy="3383280"/>
+            <a:off x="731520" y="1188720"/>
+            <a:ext cx="7680960" cy="3291840"/>
           </a:xfrm>
           <a:prstGeom prst="rect">
             <a:avLst/>
@@ -3412,63 +5697,121 @@
           <a:ln/>
         </p:spPr>
         <p:txBody>
-          <a:bodyPr wrap="square" lIns="0" tIns="0" rIns="0" bIns="0" rtlCol="0" anchor="t">
-            <a:normAutofit/>
-          </a:bodyPr>
+          <a:bodyPr wrap="square" lIns="0" tIns="0" rIns="0" bIns="0" rtlCol="0" anchor="t"/>
           <a:lstStyle/>
           <a:p>
             <a:pPr marL="342900" indent="-342900">
               <a:spcAft>
-                <a:spcPts val="1400"/>
+                <a:spcPts val="1200"/>
               </a:spcAft>
               <a:buSzPct val="100000"/>
-              <a:buChar char="•"/>
-            </a:pPr>
-            <a:r>
-              <a:rPr lang="en-US" sz="2400" dirty="0">
+              <a:buFont typeface="+mj-lt"/>
+              <a:buAutoNum type="arabicPeriod" startAt="1"/>
+            </a:pPr>
+            <a:r>
+              <a:rPr lang="en-US" sz="2200" dirty="0">
                 <a:solidFill>
                   <a:srgbClr val="1F2937"/>
                 </a:solidFill>
               </a:rPr>
-              <a:t>Calha estreita: cada direção pede um passo diferente</a:t>
-            </a:r>
-            <a:endParaRPr lang="en-US" sz="2400" dirty="0"/>
+              <a:t>Situação inicial e objetivos</a:t>
+            </a:r>
+            <a:endParaRPr lang="en-US" sz="2200" dirty="0"/>
           </a:p>
           <a:p>
             <a:pPr marL="342900" indent="-342900">
               <a:spcAft>
-                <a:spcPts val="1400"/>
+                <a:spcPts val="1200"/>
               </a:spcAft>
               <a:buSzPct val="100000"/>
-              <a:buChar char="•"/>
-            </a:pPr>
-            <a:r>
-              <a:rPr lang="en-US" sz="2400" dirty="0">
+              <a:buFont typeface="+mj-lt"/>
+              <a:buAutoNum type="arabicPeriod" startAt="1"/>
+            </a:pPr>
+            <a:r>
+              <a:rPr lang="en-US" sz="2200" dirty="0">
                 <a:solidFill>
                   <a:srgbClr val="1F2937"/>
                 </a:solidFill>
               </a:rPr>
-              <a:t>Cada peso observa o sinal do seu gradiente</a:t>
-            </a:r>
-            <a:endParaRPr lang="en-US" sz="2400" dirty="0"/>
+              <a:t>Analogia do dia a dia</a:t>
+            </a:r>
+            <a:endParaRPr lang="en-US" sz="2200" dirty="0"/>
           </a:p>
           <a:p>
             <a:pPr marL="342900" indent="-342900">
               <a:spcAft>
-                <a:spcPts val="1400"/>
+                <a:spcPts val="1200"/>
               </a:spcAft>
               <a:buSzPct val="100000"/>
-              <a:buChar char="•"/>
-            </a:pPr>
-            <a:r>
-              <a:rPr lang="en-US" sz="2400" dirty="0">
+              <a:buFont typeface="+mj-lt"/>
+              <a:buAutoNum type="arabicPeriod" startAt="1"/>
+            </a:pPr>
+            <a:r>
+              <a:rPr lang="en-US" sz="2200" dirty="0">
                 <a:solidFill>
                   <a:srgbClr val="1F2937"/>
                 </a:solidFill>
               </a:rPr>
-              <a:t>Mesmo sinal: acelera. Sinal alternado: freia</a:t>
-            </a:r>
-            <a:endParaRPr lang="en-US" sz="2400" dirty="0"/>
+              <a:t>Conceitos, demonstrações e figuras</a:t>
+            </a:r>
+            <a:endParaRPr lang="en-US" sz="2200" dirty="0"/>
+          </a:p>
+          <a:p>
+            <a:pPr marL="342900" indent="-342900">
+              <a:spcAft>
+                <a:spcPts val="1200"/>
+              </a:spcAft>
+              <a:buSzPct val="100000"/>
+              <a:buFont typeface="+mj-lt"/>
+              <a:buAutoNum type="arabicPeriod" startAt="1"/>
+            </a:pPr>
+            <a:r>
+              <a:rPr lang="en-US" sz="2200" dirty="0">
+                <a:solidFill>
+                  <a:srgbClr val="1F2937"/>
+                </a:solidFill>
+              </a:rPr>
+              <a:t>Exemplos e resultados do livro</a:t>
+            </a:r>
+            <a:endParaRPr lang="en-US" sz="2200" dirty="0"/>
+          </a:p>
+          <a:p>
+            <a:pPr marL="342900" indent="-342900">
+              <a:spcAft>
+                <a:spcPts val="1200"/>
+              </a:spcAft>
+              <a:buSzPct val="100000"/>
+              <a:buFont typeface="+mj-lt"/>
+              <a:buAutoNum type="arabicPeriod" startAt="1"/>
+            </a:pPr>
+            <a:r>
+              <a:rPr lang="en-US" sz="2200" dirty="0">
+                <a:solidFill>
+                  <a:srgbClr val="1F2937"/>
+                </a:solidFill>
+              </a:rPr>
+              <a:t>Quiz relâmpago</a:t>
+            </a:r>
+            <a:endParaRPr lang="en-US" sz="2200" dirty="0"/>
+          </a:p>
+          <a:p>
+            <a:pPr marL="342900" indent="-342900">
+              <a:spcAft>
+                <a:spcPts val="1200"/>
+              </a:spcAft>
+              <a:buSzPct val="100000"/>
+              <a:buFont typeface="+mj-lt"/>
+              <a:buAutoNum type="arabicPeriod" startAt="1"/>
+            </a:pPr>
+            <a:r>
+              <a:rPr lang="en-US" sz="2200" dirty="0">
+                <a:solidFill>
+                  <a:srgbClr val="1F2937"/>
+                </a:solidFill>
+              </a:rPr>
+              <a:t>Atividade mão na massa e síntese</a:t>
+            </a:r>
+            <a:endParaRPr lang="en-US" sz="2200" dirty="0"/>
           </a:p>
         </p:txBody>
       </p:sp>
@@ -3514,6 +5857,130 @@
               <a:t>2</a:t>
             </a:fld>
             <a:endParaRPr lang="en-US"/>
+          </a:p>
+        </p:txBody>
+      </p:sp>
+    </p:spTree>
+  </p:cSld>
+  <p:clrMapOvr>
+    <a:masterClrMapping/>
+  </p:clrMapOvr>
+</p:sld>
+</file>
+
+<file path=ppt/slides/slide20.xml><?xml version="1.0" encoding="utf-8"?>
+<p:sld xmlns:a="http://schemas.openxmlformats.org/drawingml/2006/main" xmlns:r="http://schemas.openxmlformats.org/officeDocument/2006/relationships" xmlns:p="http://schemas.openxmlformats.org/presentationml/2006/main">
+  <p:cSld name="Slide 20">
+    <p:spTree>
+      <p:nvGrpSpPr>
+        <p:cNvPr id="1" name=""/>
+        <p:cNvGrpSpPr/>
+        <p:nvPr/>
+      </p:nvGrpSpPr>
+      <p:grpSpPr>
+        <a:xfrm>
+          <a:off x="0" y="0"/>
+          <a:ext cx="0" cy="0"/>
+          <a:chOff x="0" y="0"/>
+          <a:chExt cx="0" cy="0"/>
+        </a:xfrm>
+      </p:grpSpPr>
+      <p:sp>
+        <p:nvSpPr>
+          <p:cNvPr id="2" name="Shape 0"/>
+          <p:cNvSpPr/>
+          <p:nvPr/>
+        </p:nvSpPr>
+        <p:spPr>
+          <a:xfrm>
+            <a:off x="640080" y="1188720"/>
+            <a:ext cx="109728" cy="2194560"/>
+          </a:xfrm>
+          <a:prstGeom prst="rect">
+            <a:avLst/>
+          </a:prstGeom>
+          <a:solidFill>
+            <a:srgbClr val="F59E0B"/>
+          </a:solidFill>
+          <a:ln w="12700">
+            <a:solidFill>
+              <a:srgbClr val="F59E0B"/>
+            </a:solidFill>
+            <a:prstDash val="solid"/>
+          </a:ln>
+        </p:spPr>
+      </p:sp>
+      <p:sp>
+        <p:nvSpPr>
+          <p:cNvPr id="3" name="Text 1"/>
+          <p:cNvSpPr txBox="1"/>
+          <p:nvPr/>
+        </p:nvSpPr>
+        <p:spPr>
+          <a:xfrm>
+            <a:off x="1005840" y="1097280"/>
+            <a:ext cx="7498080" cy="2377440"/>
+          </a:xfrm>
+          <a:prstGeom prst="rect">
+            <a:avLst/>
+          </a:prstGeom>
+          <a:noFill/>
+          <a:ln/>
+        </p:spPr>
+        <p:txBody>
+          <a:bodyPr wrap="square" lIns="0" tIns="0" rIns="0" bIns="0" rtlCol="0" anchor="ctr">
+            <a:normAutofit/>
+          </a:bodyPr>
+          <a:lstStyle/>
+          <a:p>
+            <a:pPr indent="0" marL="0">
+              <a:buNone/>
+            </a:pPr>
+            <a:r>
+              <a:rPr lang="en-US" sz="3400" b="1" dirty="0">
+                <a:solidFill>
+                  <a:srgbClr val="FFFFFF"/>
+                </a:solidFill>
+              </a:rPr>
+              <a:t>“Cada peso, o seu passo.”</a:t>
+            </a:r>
+            <a:endParaRPr lang="en-US" sz="3400" dirty="0"/>
+          </a:p>
+        </p:txBody>
+      </p:sp>
+      <p:sp>
+        <p:nvSpPr>
+          <p:cNvPr id="4" name="Text 2"/>
+          <p:cNvSpPr txBox="1"/>
+          <p:nvPr/>
+        </p:nvSpPr>
+        <p:spPr>
+          <a:xfrm>
+            <a:off x="1005840" y="3931920"/>
+            <a:ext cx="7315200" cy="365760"/>
+          </a:xfrm>
+          <a:prstGeom prst="rect">
+            <a:avLst/>
+          </a:prstGeom>
+          <a:noFill/>
+          <a:ln/>
+        </p:spPr>
+        <p:txBody>
+          <a:bodyPr wrap="square" lIns="0" tIns="0" rIns="0" bIns="0" rtlCol="0" anchor="ctr"/>
+          <a:lstStyle/>
+          <a:p>
+            <a:pPr indent="0" marL="0">
+              <a:buNone/>
+            </a:pPr>
+            <a:r>
+              <a:rPr lang="en-US" sz="1400" dirty="0">
+                <a:solidFill>
+                  <a:srgbClr val="A5B4FC"/>
+                </a:solidFill>
+              </a:rPr>
+              <a:t>Backpropagation e Redes Neurais · Capítulo 8</a:t>
+            </a:r>
+            <a:endParaRPr lang="en-US" sz="1400" dirty="0"/>
           </a:p>
         </p:txBody>
       </p:sp>
@@ -3577,7 +6044,7 @@
                 <a:ea typeface="Calibri" pitchFamily="34" charset="-122"/>
                 <a:cs typeface="Calibri" pitchFamily="34" charset="-120"/>
               </a:rPr>
-              <a:t>Delta-delta: dedução em etapas</a:t>
+              <a:t>Situação inicial: por que a mesma taxa para todos?</a:t>
             </a:r>
             <a:endParaRPr lang="en-US" sz="2600" dirty="0"/>
           </a:p>
@@ -3585,41 +6052,14 @@
       </p:sp>
       <p:sp>
         <p:nvSpPr>
-          <p:cNvPr id="3" name="Shape 1"/>
-          <p:cNvSpPr/>
-          <p:nvPr/>
-        </p:nvSpPr>
-        <p:spPr>
-          <a:xfrm>
-            <a:off x="457200" y="1097280"/>
-            <a:ext cx="8229600" cy="868680"/>
-          </a:xfrm>
-          <a:prstGeom prst="roundRect">
-            <a:avLst>
-              <a:gd name="adj" fmla="val 8421"/>
-            </a:avLst>
-          </a:prstGeom>
-          <a:solidFill>
-            <a:srgbClr val="E0E7FF"/>
-          </a:solidFill>
-          <a:ln w="9525">
-            <a:solidFill>
-              <a:srgbClr val="C7D2FE"/>
-            </a:solidFill>
-            <a:prstDash val="solid"/>
-          </a:ln>
-        </p:spPr>
-      </p:sp>
-      <p:sp>
-        <p:nvSpPr>
-          <p:cNvPr id="4" name="Text 2"/>
+          <p:cNvPr id="3" name="Text 1"/>
           <p:cNvSpPr txBox="1"/>
           <p:nvPr/>
         </p:nvSpPr>
         <p:spPr>
           <a:xfrm>
-            <a:off x="594360" y="1097280"/>
-            <a:ext cx="2743200" cy="868680"/>
+            <a:off x="548640" y="1188720"/>
+            <a:ext cx="8046720" cy="3383280"/>
           </a:xfrm>
           <a:prstGeom prst="rect">
             <a:avLst/>
@@ -3628,382 +6068,63 @@
           <a:ln/>
         </p:spPr>
         <p:txBody>
-          <a:bodyPr wrap="square" lIns="0" tIns="0" rIns="0" bIns="0" rtlCol="0" anchor="ctr">
+          <a:bodyPr wrap="square" lIns="0" tIns="0" rIns="0" bIns="0" rtlCol="0" anchor="t">
             <a:normAutofit/>
           </a:bodyPr>
           <a:lstStyle/>
           <a:p>
-            <a:pPr indent="0" marL="0">
-              <a:buNone/>
-            </a:pPr>
-            <a:r>
-              <a:rPr lang="en-US" sz="1400" b="1" dirty="0">
-                <a:solidFill>
-                  <a:srgbClr val="312E81"/>
-                </a:solidFill>
-              </a:rPr>
-              <a:t>1. Peso</a:t>
-            </a:r>
-            <a:endParaRPr lang="en-US" sz="1400" dirty="0"/>
-          </a:p>
-        </p:txBody>
-      </p:sp>
-      <p:sp>
-        <p:nvSpPr>
-          <p:cNvPr id="5" name="Text 3"/>
-          <p:cNvSpPr txBox="1"/>
-          <p:nvPr/>
-        </p:nvSpPr>
-        <p:spPr>
-          <a:xfrm>
-            <a:off x="3383280" y="1097280"/>
-            <a:ext cx="5212080" cy="868680"/>
-          </a:xfrm>
-          <a:prstGeom prst="rect">
-            <a:avLst/>
-          </a:prstGeom>
-          <a:noFill/>
-          <a:ln/>
-        </p:spPr>
-        <p:txBody>
-          <a:bodyPr wrap="square" lIns="0" tIns="0" rIns="0" bIns="0" rtlCol="0" anchor="ctr">
-            <a:normAutofit/>
-          </a:bodyPr>
-          <a:lstStyle/>
-          <a:p>
-            <a:pPr indent="0" marL="0">
-              <a:buNone/>
-            </a:pPr>
-            <a:r>
-              <a:rPr lang="en-US" sz="1700" dirty="0">
+            <a:pPr marL="342900" indent="-342900">
+              <a:spcAft>
+                <a:spcPts val="1400"/>
+              </a:spcAft>
+              <a:buSzPct val="100000"/>
+              <a:buChar char="•"/>
+            </a:pPr>
+            <a:r>
+              <a:rPr lang="en-US" sz="2400" dirty="0">
                 <a:solidFill>
                   <a:srgbClr val="1F2937"/>
                 </a:solidFill>
-                <a:latin typeface="Cambria Math" pitchFamily="34" charset="0"/>
-                <a:ea typeface="Cambria Math" pitchFamily="34" charset="-122"/>
-                <a:cs typeface="Cambria Math" pitchFamily="34" charset="-120"/>
-              </a:rPr>
-              <a:t>wᵢ(t+1) = wᵢ(t) − αᵢ(t) gᵢ(t)</a:t>
-            </a:r>
-            <a:endParaRPr lang="en-US" sz="1700" dirty="0"/>
-          </a:p>
-        </p:txBody>
-      </p:sp>
-      <p:sp>
-        <p:nvSpPr>
-          <p:cNvPr id="6" name="Shape 4"/>
-          <p:cNvSpPr/>
-          <p:nvPr/>
-        </p:nvSpPr>
-        <p:spPr>
-          <a:xfrm>
-            <a:off x="457200" y="2039112"/>
-            <a:ext cx="8229600" cy="868680"/>
-          </a:xfrm>
-          <a:prstGeom prst="roundRect">
-            <a:avLst>
-              <a:gd name="adj" fmla="val 8421"/>
-            </a:avLst>
-          </a:prstGeom>
-          <a:solidFill>
-            <a:srgbClr val="EEF2FF"/>
-          </a:solidFill>
-          <a:ln w="9525">
-            <a:solidFill>
-              <a:srgbClr val="C7D2FE"/>
-            </a:solidFill>
-            <a:prstDash val="solid"/>
-          </a:ln>
-        </p:spPr>
-      </p:sp>
-      <p:sp>
-        <p:nvSpPr>
-          <p:cNvPr id="7" name="Text 5"/>
-          <p:cNvSpPr txBox="1"/>
-          <p:nvPr/>
-        </p:nvSpPr>
-        <p:spPr>
-          <a:xfrm>
-            <a:off x="594360" y="2039112"/>
-            <a:ext cx="2743200" cy="868680"/>
-          </a:xfrm>
-          <a:prstGeom prst="rect">
-            <a:avLst/>
-          </a:prstGeom>
-          <a:noFill/>
-          <a:ln/>
-        </p:spPr>
-        <p:txBody>
-          <a:bodyPr wrap="square" lIns="0" tIns="0" rIns="0" bIns="0" rtlCol="0" anchor="ctr">
-            <a:normAutofit/>
-          </a:bodyPr>
-          <a:lstStyle/>
-          <a:p>
-            <a:pPr indent="0" marL="0">
-              <a:buNone/>
-            </a:pPr>
-            <a:r>
-              <a:rPr lang="en-US" sz="1400" b="1" dirty="0">
-                <a:solidFill>
-                  <a:srgbClr val="312E81"/>
-                </a:solidFill>
-              </a:rPr>
-              <a:t>2. Cadeia</a:t>
-            </a:r>
-            <a:endParaRPr lang="en-US" sz="1400" dirty="0"/>
-          </a:p>
-        </p:txBody>
-      </p:sp>
-      <p:sp>
-        <p:nvSpPr>
-          <p:cNvPr id="8" name="Text 6"/>
-          <p:cNvSpPr txBox="1"/>
-          <p:nvPr/>
-        </p:nvSpPr>
-        <p:spPr>
-          <a:xfrm>
-            <a:off x="3383280" y="2039112"/>
-            <a:ext cx="5212080" cy="868680"/>
-          </a:xfrm>
-          <a:prstGeom prst="rect">
-            <a:avLst/>
-          </a:prstGeom>
-          <a:noFill/>
-          <a:ln/>
-        </p:spPr>
-        <p:txBody>
-          <a:bodyPr wrap="square" lIns="0" tIns="0" rIns="0" bIns="0" rtlCol="0" anchor="ctr">
-            <a:normAutofit/>
-          </a:bodyPr>
-          <a:lstStyle/>
-          <a:p>
-            <a:pPr indent="0" marL="0">
-              <a:buNone/>
-            </a:pPr>
-            <a:r>
-              <a:rPr lang="en-US" sz="1700" dirty="0">
+              </a:rPr>
+              <a:t>Calha estreita: cada direção pede um passo diferente</a:t>
+            </a:r>
+            <a:endParaRPr lang="en-US" sz="2400" dirty="0"/>
+          </a:p>
+          <a:p>
+            <a:pPr marL="342900" indent="-342900">
+              <a:spcAft>
+                <a:spcPts val="1400"/>
+              </a:spcAft>
+              <a:buSzPct val="100000"/>
+              <a:buChar char="•"/>
+            </a:pPr>
+            <a:r>
+              <a:rPr lang="en-US" sz="2400" dirty="0">
                 <a:solidFill>
                   <a:srgbClr val="1F2937"/>
                 </a:solidFill>
-                <a:latin typeface="Cambria Math" pitchFamily="34" charset="0"/>
-                <a:ea typeface="Cambria Math" pitchFamily="34" charset="-122"/>
-                <a:cs typeface="Cambria Math" pitchFamily="34" charset="-120"/>
-              </a:rPr>
-              <a:t>∂E(t+1)/∂αᵢ(t) = gᵢ(t+1) · (−gᵢ(t))</a:t>
-            </a:r>
-            <a:endParaRPr lang="en-US" sz="1700" dirty="0"/>
-          </a:p>
-        </p:txBody>
-      </p:sp>
-      <p:sp>
-        <p:nvSpPr>
-          <p:cNvPr id="9" name="Shape 7"/>
-          <p:cNvSpPr/>
-          <p:nvPr/>
-        </p:nvSpPr>
-        <p:spPr>
-          <a:xfrm>
-            <a:off x="457200" y="2980944"/>
-            <a:ext cx="8229600" cy="868680"/>
-          </a:xfrm>
-          <a:prstGeom prst="roundRect">
-            <a:avLst>
-              <a:gd name="adj" fmla="val 8421"/>
-            </a:avLst>
-          </a:prstGeom>
-          <a:solidFill>
-            <a:srgbClr val="E0E7FF"/>
-          </a:solidFill>
-          <a:ln w="9525">
-            <a:solidFill>
-              <a:srgbClr val="C7D2FE"/>
-            </a:solidFill>
-            <a:prstDash val="solid"/>
-          </a:ln>
-        </p:spPr>
-      </p:sp>
-      <p:sp>
-        <p:nvSpPr>
-          <p:cNvPr id="10" name="Text 8"/>
-          <p:cNvSpPr txBox="1"/>
-          <p:nvPr/>
-        </p:nvSpPr>
-        <p:spPr>
-          <a:xfrm>
-            <a:off x="594360" y="2980944"/>
-            <a:ext cx="2743200" cy="868680"/>
-          </a:xfrm>
-          <a:prstGeom prst="rect">
-            <a:avLst/>
-          </a:prstGeom>
-          <a:noFill/>
-          <a:ln/>
-        </p:spPr>
-        <p:txBody>
-          <a:bodyPr wrap="square" lIns="0" tIns="0" rIns="0" bIns="0" rtlCol="0" anchor="ctr">
-            <a:normAutofit/>
-          </a:bodyPr>
-          <a:lstStyle/>
-          <a:p>
-            <a:pPr indent="0" marL="0">
-              <a:buNone/>
-            </a:pPr>
-            <a:r>
-              <a:rPr lang="en-US" sz="1400" b="1" dirty="0">
-                <a:solidFill>
-                  <a:srgbClr val="312E81"/>
-                </a:solidFill>
-              </a:rPr>
-              <a:t>3. Descida em α</a:t>
-            </a:r>
-            <a:endParaRPr lang="en-US" sz="1400" dirty="0"/>
-          </a:p>
-        </p:txBody>
-      </p:sp>
-      <p:sp>
-        <p:nvSpPr>
-          <p:cNvPr id="11" name="Text 9"/>
-          <p:cNvSpPr txBox="1"/>
-          <p:nvPr/>
-        </p:nvSpPr>
-        <p:spPr>
-          <a:xfrm>
-            <a:off x="3383280" y="2980944"/>
-            <a:ext cx="5212080" cy="868680"/>
-          </a:xfrm>
-          <a:prstGeom prst="rect">
-            <a:avLst/>
-          </a:prstGeom>
-          <a:noFill/>
-          <a:ln/>
-        </p:spPr>
-        <p:txBody>
-          <a:bodyPr wrap="square" lIns="0" tIns="0" rIns="0" bIns="0" rtlCol="0" anchor="ctr">
-            <a:normAutofit/>
-          </a:bodyPr>
-          <a:lstStyle/>
-          <a:p>
-            <a:pPr indent="0" marL="0">
-              <a:buNone/>
-            </a:pPr>
-            <a:r>
-              <a:rPr lang="en-US" sz="1700" dirty="0">
+              </a:rPr>
+              <a:t>Cada peso observa o sinal do seu gradiente</a:t>
+            </a:r>
+            <a:endParaRPr lang="en-US" sz="2400" dirty="0"/>
+          </a:p>
+          <a:p>
+            <a:pPr marL="342900" indent="-342900">
+              <a:spcAft>
+                <a:spcPts val="1400"/>
+              </a:spcAft>
+              <a:buSzPct val="100000"/>
+              <a:buChar char="•"/>
+            </a:pPr>
+            <a:r>
+              <a:rPr lang="en-US" sz="2400" dirty="0">
                 <a:solidFill>
                   <a:srgbClr val="1F2937"/>
                 </a:solidFill>
-                <a:latin typeface="Cambria Math" pitchFamily="34" charset="0"/>
-                <a:ea typeface="Cambria Math" pitchFamily="34" charset="-122"/>
-                <a:cs typeface="Cambria Math" pitchFamily="34" charset="-120"/>
-              </a:rPr>
-              <a:t>Δαᵢ = −γ ∂E/∂αᵢ</a:t>
-            </a:r>
-            <a:endParaRPr lang="en-US" sz="1700" dirty="0"/>
-          </a:p>
-        </p:txBody>
-      </p:sp>
-      <p:sp>
-        <p:nvSpPr>
-          <p:cNvPr id="12" name="Shape 10"/>
-          <p:cNvSpPr/>
-          <p:nvPr/>
-        </p:nvSpPr>
-        <p:spPr>
-          <a:xfrm>
-            <a:off x="457200" y="3922776"/>
-            <a:ext cx="8229600" cy="868680"/>
-          </a:xfrm>
-          <a:prstGeom prst="roundRect">
-            <a:avLst>
-              <a:gd name="adj" fmla="val 8421"/>
-            </a:avLst>
-          </a:prstGeom>
-          <a:solidFill>
-            <a:srgbClr val="EEF2FF"/>
-          </a:solidFill>
-          <a:ln w="9525">
-            <a:solidFill>
-              <a:srgbClr val="C7D2FE"/>
-            </a:solidFill>
-            <a:prstDash val="solid"/>
-          </a:ln>
-        </p:spPr>
-      </p:sp>
-      <p:sp>
-        <p:nvSpPr>
-          <p:cNvPr id="13" name="Text 11"/>
-          <p:cNvSpPr txBox="1"/>
-          <p:nvPr/>
-        </p:nvSpPr>
-        <p:spPr>
-          <a:xfrm>
-            <a:off x="594360" y="3922776"/>
-            <a:ext cx="2743200" cy="868680"/>
-          </a:xfrm>
-          <a:prstGeom prst="rect">
-            <a:avLst/>
-          </a:prstGeom>
-          <a:noFill/>
-          <a:ln/>
-        </p:spPr>
-        <p:txBody>
-          <a:bodyPr wrap="square" lIns="0" tIns="0" rIns="0" bIns="0" rtlCol="0" anchor="ctr">
-            <a:normAutofit/>
-          </a:bodyPr>
-          <a:lstStyle/>
-          <a:p>
-            <a:pPr indent="0" marL="0">
-              <a:buNone/>
-            </a:pPr>
-            <a:r>
-              <a:rPr lang="en-US" sz="1400" b="1" dirty="0">
-                <a:solidFill>
-                  <a:srgbClr val="312E81"/>
-                </a:solidFill>
-              </a:rPr>
-              <a:t>4. Regra (índice deslocado)</a:t>
-            </a:r>
-            <a:endParaRPr lang="en-US" sz="1400" dirty="0"/>
-          </a:p>
-        </p:txBody>
-      </p:sp>
-      <p:sp>
-        <p:nvSpPr>
-          <p:cNvPr id="14" name="Text 12"/>
-          <p:cNvSpPr txBox="1"/>
-          <p:nvPr/>
-        </p:nvSpPr>
-        <p:spPr>
-          <a:xfrm>
-            <a:off x="3383280" y="3922776"/>
-            <a:ext cx="5212080" cy="868680"/>
-          </a:xfrm>
-          <a:prstGeom prst="rect">
-            <a:avLst/>
-          </a:prstGeom>
-          <a:noFill/>
-          <a:ln/>
-        </p:spPr>
-        <p:txBody>
-          <a:bodyPr wrap="square" lIns="0" tIns="0" rIns="0" bIns="0" rtlCol="0" anchor="ctr">
-            <a:normAutofit/>
-          </a:bodyPr>
-          <a:lstStyle/>
-          <a:p>
-            <a:pPr indent="0" marL="0">
-              <a:buNone/>
-            </a:pPr>
-            <a:r>
-              <a:rPr lang="en-US" sz="1700" dirty="0">
-                <a:solidFill>
-                  <a:srgbClr val="1F2937"/>
-                </a:solidFill>
-                <a:latin typeface="Cambria Math" pitchFamily="34" charset="0"/>
-                <a:ea typeface="Cambria Math" pitchFamily="34" charset="-122"/>
-                <a:cs typeface="Cambria Math" pitchFamily="34" charset="-120"/>
-              </a:rPr>
-              <a:t>αᵢ(t+1) = αᵢ(t) + γ gᵢ(t) gᵢ(t−1)</a:t>
-            </a:r>
-            <a:endParaRPr lang="en-US" sz="1700" dirty="0"/>
+              </a:rPr>
+              <a:t>Mesmo sinal: acelera. Sinal alternado: freia</a:t>
+            </a:r>
+            <a:endParaRPr lang="en-US" sz="2400" dirty="0"/>
           </a:p>
         </p:txBody>
       </p:sp>
@@ -4112,46 +6233,49 @@
                 <a:ea typeface="Calibri" pitchFamily="34" charset="-122"/>
                 <a:cs typeface="Calibri" pitchFamily="34" charset="-120"/>
               </a:rPr>
-              <a:t>Delta-delta é frágil</a:t>
+              <a:t>Delta-delta: dedução em etapas</a:t>
             </a:r>
             <a:endParaRPr lang="en-US" sz="2600" dirty="0"/>
           </a:p>
         </p:txBody>
       </p:sp>
-      <p:pic>
-        <p:nvPicPr>
-          <p:cNvPr id="3" name="Image 0" descr="Com γ grande, a taxa fica negativa ou explode.">    </p:cNvPr>
-          <p:cNvPicPr>
-            <a:picLocks noChangeAspect="1"/>
-          </p:cNvPicPr>
-          <p:nvPr/>
-        </p:nvPicPr>
-        <p:blipFill>
-          <a:blip r:embed="rId1"/>
-          <a:stretch>
-            <a:fillRect/>
-          </a:stretch>
-        </p:blipFill>
-        <p:spPr>
-          <a:xfrm>
-            <a:off x="838107" y="1005840"/>
-            <a:ext cx="7467786" cy="3154680"/>
-          </a:xfrm>
-          <a:prstGeom prst="rect">
-            <a:avLst/>
-          </a:prstGeom>
-        </p:spPr>
-      </p:pic>
-      <p:sp>
-        <p:nvSpPr>
-          <p:cNvPr id="4" name="Text 1"/>
+      <p:sp>
+        <p:nvSpPr>
+          <p:cNvPr id="3" name="Shape 1"/>
+          <p:cNvSpPr/>
+          <p:nvPr/>
+        </p:nvSpPr>
+        <p:spPr>
+          <a:xfrm>
+            <a:off x="457200" y="1097280"/>
+            <a:ext cx="8229600" cy="868680"/>
+          </a:xfrm>
+          <a:prstGeom prst="roundRect">
+            <a:avLst>
+              <a:gd name="adj" fmla="val 8421"/>
+            </a:avLst>
+          </a:prstGeom>
+          <a:solidFill>
+            <a:srgbClr val="E0E7FF"/>
+          </a:solidFill>
+          <a:ln w="9525">
+            <a:solidFill>
+              <a:srgbClr val="C7D2FE"/>
+            </a:solidFill>
+            <a:prstDash val="solid"/>
+          </a:ln>
+        </p:spPr>
+      </p:sp>
+      <p:sp>
+        <p:nvSpPr>
+          <p:cNvPr id="4" name="Text 2"/>
           <p:cNvSpPr txBox="1"/>
           <p:nvPr/>
         </p:nvSpPr>
         <p:spPr>
           <a:xfrm>
-            <a:off x="457200" y="4251960"/>
-            <a:ext cx="8229600" cy="457200"/>
+            <a:off x="594360" y="1097280"/>
+            <a:ext cx="2743200" cy="868680"/>
           </a:xfrm>
           <a:prstGeom prst="rect">
             <a:avLst/>
@@ -4160,23 +6284,382 @@
           <a:ln/>
         </p:spPr>
         <p:txBody>
-          <a:bodyPr wrap="square" lIns="0" tIns="0" rIns="0" bIns="0" rtlCol="0" anchor="t">
+          <a:bodyPr wrap="square" lIns="0" tIns="0" rIns="0" bIns="0" rtlCol="0" anchor="ctr">
             <a:normAutofit/>
           </a:bodyPr>
           <a:lstStyle/>
           <a:p>
-            <a:pPr algn="ctr" indent="0" marL="0">
+            <a:pPr indent="0" marL="0">
               <a:buNone/>
             </a:pPr>
             <a:r>
-              <a:rPr lang="en-US" sz="1400" i="1" dirty="0">
-                <a:solidFill>
-                  <a:srgbClr val="4B5563"/>
-                </a:solidFill>
-              </a:rPr>
-              <a:t>Com γ grande, a taxa fica negativa ou explode.</a:t>
+              <a:rPr lang="en-US" sz="1400" b="1" dirty="0">
+                <a:solidFill>
+                  <a:srgbClr val="312E81"/>
+                </a:solidFill>
+              </a:rPr>
+              <a:t>1. Peso</a:t>
             </a:r>
             <a:endParaRPr lang="en-US" sz="1400" dirty="0"/>
+          </a:p>
+        </p:txBody>
+      </p:sp>
+      <p:sp>
+        <p:nvSpPr>
+          <p:cNvPr id="5" name="Text 3"/>
+          <p:cNvSpPr txBox="1"/>
+          <p:nvPr/>
+        </p:nvSpPr>
+        <p:spPr>
+          <a:xfrm>
+            <a:off x="3383280" y="1097280"/>
+            <a:ext cx="5212080" cy="868680"/>
+          </a:xfrm>
+          <a:prstGeom prst="rect">
+            <a:avLst/>
+          </a:prstGeom>
+          <a:noFill/>
+          <a:ln/>
+        </p:spPr>
+        <p:txBody>
+          <a:bodyPr wrap="square" lIns="0" tIns="0" rIns="0" bIns="0" rtlCol="0" anchor="ctr">
+            <a:normAutofit/>
+          </a:bodyPr>
+          <a:lstStyle/>
+          <a:p>
+            <a:pPr indent="0" marL="0">
+              <a:buNone/>
+            </a:pPr>
+            <a:r>
+              <a:rPr lang="en-US" sz="1700" dirty="0">
+                <a:solidFill>
+                  <a:srgbClr val="1F2937"/>
+                </a:solidFill>
+                <a:latin typeface="Cambria Math" pitchFamily="34" charset="0"/>
+                <a:ea typeface="Cambria Math" pitchFamily="34" charset="-122"/>
+                <a:cs typeface="Cambria Math" pitchFamily="34" charset="-120"/>
+              </a:rPr>
+              <a:t>wᵢ(t+1) = wᵢ(t) − αᵢ(t) gᵢ(t)</a:t>
+            </a:r>
+            <a:endParaRPr lang="en-US" sz="1700" dirty="0"/>
+          </a:p>
+        </p:txBody>
+      </p:sp>
+      <p:sp>
+        <p:nvSpPr>
+          <p:cNvPr id="6" name="Shape 4"/>
+          <p:cNvSpPr/>
+          <p:nvPr/>
+        </p:nvSpPr>
+        <p:spPr>
+          <a:xfrm>
+            <a:off x="457200" y="2039112"/>
+            <a:ext cx="8229600" cy="868680"/>
+          </a:xfrm>
+          <a:prstGeom prst="roundRect">
+            <a:avLst>
+              <a:gd name="adj" fmla="val 8421"/>
+            </a:avLst>
+          </a:prstGeom>
+          <a:solidFill>
+            <a:srgbClr val="EEF2FF"/>
+          </a:solidFill>
+          <a:ln w="9525">
+            <a:solidFill>
+              <a:srgbClr val="C7D2FE"/>
+            </a:solidFill>
+            <a:prstDash val="solid"/>
+          </a:ln>
+        </p:spPr>
+      </p:sp>
+      <p:sp>
+        <p:nvSpPr>
+          <p:cNvPr id="7" name="Text 5"/>
+          <p:cNvSpPr txBox="1"/>
+          <p:nvPr/>
+        </p:nvSpPr>
+        <p:spPr>
+          <a:xfrm>
+            <a:off x="594360" y="2039112"/>
+            <a:ext cx="2743200" cy="868680"/>
+          </a:xfrm>
+          <a:prstGeom prst="rect">
+            <a:avLst/>
+          </a:prstGeom>
+          <a:noFill/>
+          <a:ln/>
+        </p:spPr>
+        <p:txBody>
+          <a:bodyPr wrap="square" lIns="0" tIns="0" rIns="0" bIns="0" rtlCol="0" anchor="ctr">
+            <a:normAutofit/>
+          </a:bodyPr>
+          <a:lstStyle/>
+          <a:p>
+            <a:pPr indent="0" marL="0">
+              <a:buNone/>
+            </a:pPr>
+            <a:r>
+              <a:rPr lang="en-US" sz="1400" b="1" dirty="0">
+                <a:solidFill>
+                  <a:srgbClr val="312E81"/>
+                </a:solidFill>
+              </a:rPr>
+              <a:t>2. Cadeia</a:t>
+            </a:r>
+            <a:endParaRPr lang="en-US" sz="1400" dirty="0"/>
+          </a:p>
+        </p:txBody>
+      </p:sp>
+      <p:sp>
+        <p:nvSpPr>
+          <p:cNvPr id="8" name="Text 6"/>
+          <p:cNvSpPr txBox="1"/>
+          <p:nvPr/>
+        </p:nvSpPr>
+        <p:spPr>
+          <a:xfrm>
+            <a:off x="3383280" y="2039112"/>
+            <a:ext cx="5212080" cy="868680"/>
+          </a:xfrm>
+          <a:prstGeom prst="rect">
+            <a:avLst/>
+          </a:prstGeom>
+          <a:noFill/>
+          <a:ln/>
+        </p:spPr>
+        <p:txBody>
+          <a:bodyPr wrap="square" lIns="0" tIns="0" rIns="0" bIns="0" rtlCol="0" anchor="ctr">
+            <a:normAutofit/>
+          </a:bodyPr>
+          <a:lstStyle/>
+          <a:p>
+            <a:pPr indent="0" marL="0">
+              <a:buNone/>
+            </a:pPr>
+            <a:r>
+              <a:rPr lang="en-US" sz="1700" dirty="0">
+                <a:solidFill>
+                  <a:srgbClr val="1F2937"/>
+                </a:solidFill>
+                <a:latin typeface="Cambria Math" pitchFamily="34" charset="0"/>
+                <a:ea typeface="Cambria Math" pitchFamily="34" charset="-122"/>
+                <a:cs typeface="Cambria Math" pitchFamily="34" charset="-120"/>
+              </a:rPr>
+              <a:t>∂E(t+1)/∂αᵢ(t) = gᵢ(t+1) · (−gᵢ(t))</a:t>
+            </a:r>
+            <a:endParaRPr lang="en-US" sz="1700" dirty="0"/>
+          </a:p>
+        </p:txBody>
+      </p:sp>
+      <p:sp>
+        <p:nvSpPr>
+          <p:cNvPr id="9" name="Shape 7"/>
+          <p:cNvSpPr/>
+          <p:nvPr/>
+        </p:nvSpPr>
+        <p:spPr>
+          <a:xfrm>
+            <a:off x="457200" y="2980944"/>
+            <a:ext cx="8229600" cy="868680"/>
+          </a:xfrm>
+          <a:prstGeom prst="roundRect">
+            <a:avLst>
+              <a:gd name="adj" fmla="val 8421"/>
+            </a:avLst>
+          </a:prstGeom>
+          <a:solidFill>
+            <a:srgbClr val="E0E7FF"/>
+          </a:solidFill>
+          <a:ln w="9525">
+            <a:solidFill>
+              <a:srgbClr val="C7D2FE"/>
+            </a:solidFill>
+            <a:prstDash val="solid"/>
+          </a:ln>
+        </p:spPr>
+      </p:sp>
+      <p:sp>
+        <p:nvSpPr>
+          <p:cNvPr id="10" name="Text 8"/>
+          <p:cNvSpPr txBox="1"/>
+          <p:nvPr/>
+        </p:nvSpPr>
+        <p:spPr>
+          <a:xfrm>
+            <a:off x="594360" y="2980944"/>
+            <a:ext cx="2743200" cy="868680"/>
+          </a:xfrm>
+          <a:prstGeom prst="rect">
+            <a:avLst/>
+          </a:prstGeom>
+          <a:noFill/>
+          <a:ln/>
+        </p:spPr>
+        <p:txBody>
+          <a:bodyPr wrap="square" lIns="0" tIns="0" rIns="0" bIns="0" rtlCol="0" anchor="ctr">
+            <a:normAutofit/>
+          </a:bodyPr>
+          <a:lstStyle/>
+          <a:p>
+            <a:pPr indent="0" marL="0">
+              <a:buNone/>
+            </a:pPr>
+            <a:r>
+              <a:rPr lang="en-US" sz="1400" b="1" dirty="0">
+                <a:solidFill>
+                  <a:srgbClr val="312E81"/>
+                </a:solidFill>
+              </a:rPr>
+              <a:t>3. Descida em α</a:t>
+            </a:r>
+            <a:endParaRPr lang="en-US" sz="1400" dirty="0"/>
+          </a:p>
+        </p:txBody>
+      </p:sp>
+      <p:sp>
+        <p:nvSpPr>
+          <p:cNvPr id="11" name="Text 9"/>
+          <p:cNvSpPr txBox="1"/>
+          <p:nvPr/>
+        </p:nvSpPr>
+        <p:spPr>
+          <a:xfrm>
+            <a:off x="3383280" y="2980944"/>
+            <a:ext cx="5212080" cy="868680"/>
+          </a:xfrm>
+          <a:prstGeom prst="rect">
+            <a:avLst/>
+          </a:prstGeom>
+          <a:noFill/>
+          <a:ln/>
+        </p:spPr>
+        <p:txBody>
+          <a:bodyPr wrap="square" lIns="0" tIns="0" rIns="0" bIns="0" rtlCol="0" anchor="ctr">
+            <a:normAutofit/>
+          </a:bodyPr>
+          <a:lstStyle/>
+          <a:p>
+            <a:pPr indent="0" marL="0">
+              <a:buNone/>
+            </a:pPr>
+            <a:r>
+              <a:rPr lang="en-US" sz="1700" dirty="0">
+                <a:solidFill>
+                  <a:srgbClr val="1F2937"/>
+                </a:solidFill>
+                <a:latin typeface="Cambria Math" pitchFamily="34" charset="0"/>
+                <a:ea typeface="Cambria Math" pitchFamily="34" charset="-122"/>
+                <a:cs typeface="Cambria Math" pitchFamily="34" charset="-120"/>
+              </a:rPr>
+              <a:t>Δαᵢ = −γ ∂E/∂αᵢ</a:t>
+            </a:r>
+            <a:endParaRPr lang="en-US" sz="1700" dirty="0"/>
+          </a:p>
+        </p:txBody>
+      </p:sp>
+      <p:sp>
+        <p:nvSpPr>
+          <p:cNvPr id="12" name="Shape 10"/>
+          <p:cNvSpPr/>
+          <p:nvPr/>
+        </p:nvSpPr>
+        <p:spPr>
+          <a:xfrm>
+            <a:off x="457200" y="3922776"/>
+            <a:ext cx="8229600" cy="868680"/>
+          </a:xfrm>
+          <a:prstGeom prst="roundRect">
+            <a:avLst>
+              <a:gd name="adj" fmla="val 8421"/>
+            </a:avLst>
+          </a:prstGeom>
+          <a:solidFill>
+            <a:srgbClr val="EEF2FF"/>
+          </a:solidFill>
+          <a:ln w="9525">
+            <a:solidFill>
+              <a:srgbClr val="C7D2FE"/>
+            </a:solidFill>
+            <a:prstDash val="solid"/>
+          </a:ln>
+        </p:spPr>
+      </p:sp>
+      <p:sp>
+        <p:nvSpPr>
+          <p:cNvPr id="13" name="Text 11"/>
+          <p:cNvSpPr txBox="1"/>
+          <p:nvPr/>
+        </p:nvSpPr>
+        <p:spPr>
+          <a:xfrm>
+            <a:off x="594360" y="3922776"/>
+            <a:ext cx="2743200" cy="868680"/>
+          </a:xfrm>
+          <a:prstGeom prst="rect">
+            <a:avLst/>
+          </a:prstGeom>
+          <a:noFill/>
+          <a:ln/>
+        </p:spPr>
+        <p:txBody>
+          <a:bodyPr wrap="square" lIns="0" tIns="0" rIns="0" bIns="0" rtlCol="0" anchor="ctr">
+            <a:normAutofit/>
+          </a:bodyPr>
+          <a:lstStyle/>
+          <a:p>
+            <a:pPr indent="0" marL="0">
+              <a:buNone/>
+            </a:pPr>
+            <a:r>
+              <a:rPr lang="en-US" sz="1400" b="1" dirty="0">
+                <a:solidFill>
+                  <a:srgbClr val="312E81"/>
+                </a:solidFill>
+              </a:rPr>
+              <a:t>4. Regra (índice deslocado)</a:t>
+            </a:r>
+            <a:endParaRPr lang="en-US" sz="1400" dirty="0"/>
+          </a:p>
+        </p:txBody>
+      </p:sp>
+      <p:sp>
+        <p:nvSpPr>
+          <p:cNvPr id="14" name="Text 12"/>
+          <p:cNvSpPr txBox="1"/>
+          <p:nvPr/>
+        </p:nvSpPr>
+        <p:spPr>
+          <a:xfrm>
+            <a:off x="3383280" y="3922776"/>
+            <a:ext cx="5212080" cy="868680"/>
+          </a:xfrm>
+          <a:prstGeom prst="rect">
+            <a:avLst/>
+          </a:prstGeom>
+          <a:noFill/>
+          <a:ln/>
+        </p:spPr>
+        <p:txBody>
+          <a:bodyPr wrap="square" lIns="0" tIns="0" rIns="0" bIns="0" rtlCol="0" anchor="ctr">
+            <a:normAutofit/>
+          </a:bodyPr>
+          <a:lstStyle/>
+          <a:p>
+            <a:pPr indent="0" marL="0">
+              <a:buNone/>
+            </a:pPr>
+            <a:r>
+              <a:rPr lang="en-US" sz="1700" dirty="0">
+                <a:solidFill>
+                  <a:srgbClr val="1F2937"/>
+                </a:solidFill>
+                <a:latin typeface="Cambria Math" pitchFamily="34" charset="0"/>
+                <a:ea typeface="Cambria Math" pitchFamily="34" charset="-122"/>
+                <a:cs typeface="Cambria Math" pitchFamily="34" charset="-120"/>
+              </a:rPr>
+              <a:t>αᵢ(t+1) = αᵢ(t) + γ gᵢ(t) gᵢ(t−1)</a:t>
+            </a:r>
+            <a:endParaRPr lang="en-US" sz="1700" dirty="0"/>
           </a:p>
         </p:txBody>
       </p:sp>
@@ -4285,7 +6768,7 @@
                 <a:ea typeface="Calibri" pitchFamily="34" charset="-122"/>
                 <a:cs typeface="Calibri" pitchFamily="34" charset="-120"/>
               </a:rPr>
-              <a:t>Delta-Bar-Delta</a:t>
+              <a:t>Analogia: tração em cada roda</a:t>
             </a:r>
             <a:endParaRPr lang="en-US" sz="2600" dirty="0"/>
           </a:p>
@@ -4299,20 +6782,20 @@
         </p:nvSpPr>
         <p:spPr>
           <a:xfrm>
-            <a:off x="457200" y="1097280"/>
-            <a:ext cx="8229600" cy="868680"/>
+            <a:off x="548640" y="1188720"/>
+            <a:ext cx="8046720" cy="3108960"/>
           </a:xfrm>
           <a:prstGeom prst="roundRect">
             <a:avLst>
-              <a:gd name="adj" fmla="val 8421"/>
+              <a:gd name="adj" fmla="val 3529"/>
             </a:avLst>
           </a:prstGeom>
           <a:solidFill>
-            <a:srgbClr val="E0E7FF"/>
+            <a:srgbClr val="ECFEFF"/>
           </a:solidFill>
-          <a:ln w="9525">
+          <a:ln w="25400">
             <a:solidFill>
-              <a:srgbClr val="C7D2FE"/>
+              <a:srgbClr val="06B6D4"/>
             </a:solidFill>
             <a:prstDash val="solid"/>
           </a:ln>
@@ -4326,8 +6809,8 @@
         </p:nvSpPr>
         <p:spPr>
           <a:xfrm>
-            <a:off x="594360" y="1097280"/>
-            <a:ext cx="2743200" cy="868680"/>
+            <a:off x="822960" y="1325880"/>
+            <a:ext cx="3657600" cy="365760"/>
           </a:xfrm>
           <a:prstGeom prst="rect">
             <a:avLst/>
@@ -4336,7 +6819,43 @@
           <a:ln/>
         </p:spPr>
         <p:txBody>
-          <a:bodyPr wrap="square" lIns="0" tIns="0" rIns="0" bIns="0" rtlCol="0" anchor="ctr">
+          <a:bodyPr wrap="square" lIns="0" tIns="0" rIns="0" bIns="0" rtlCol="0" anchor="ctr"/>
+          <a:lstStyle/>
+          <a:p>
+            <a:pPr indent="0" marL="0">
+              <a:buNone/>
+            </a:pPr>
+            <a:r>
+              <a:rPr lang="en-US" sz="1400" b="1" spc="300" kern="0" dirty="0">
+                <a:solidFill>
+                  <a:srgbClr val="0E7490"/>
+                </a:solidFill>
+              </a:rPr>
+              <a:t>NO SEU DIA A DIA</a:t>
+            </a:r>
+            <a:endParaRPr lang="en-US" sz="1400" dirty="0"/>
+          </a:p>
+        </p:txBody>
+      </p:sp>
+      <p:sp>
+        <p:nvSpPr>
+          <p:cNvPr id="5" name="Text 3"/>
+          <p:cNvSpPr txBox="1"/>
+          <p:nvPr/>
+        </p:nvSpPr>
+        <p:spPr>
+          <a:xfrm>
+            <a:off x="822960" y="1783080"/>
+            <a:ext cx="7498080" cy="2377440"/>
+          </a:xfrm>
+          <a:prstGeom prst="rect">
+            <a:avLst/>
+          </a:prstGeom>
+          <a:noFill/>
+          <a:ln/>
+        </p:spPr>
+        <p:txBody>
+          <a:bodyPr wrap="square" lIns="0" tIns="0" rIns="0" bIns="0" rtlCol="0" anchor="t">
             <a:normAutofit/>
           </a:bodyPr>
           <a:lstStyle/>
@@ -4345,373 +6864,14 @@
               <a:buNone/>
             </a:pPr>
             <a:r>
-              <a:rPr lang="en-US" sz="1400" b="1" dirty="0">
-                <a:solidFill>
-                  <a:srgbClr val="312E81"/>
-                </a:solidFill>
-              </a:rPr>
-              <a:t>1. Média do gradiente</a:t>
-            </a:r>
-            <a:endParaRPr lang="en-US" sz="1400" dirty="0"/>
-          </a:p>
-        </p:txBody>
-      </p:sp>
-      <p:sp>
-        <p:nvSpPr>
-          <p:cNvPr id="5" name="Text 3"/>
-          <p:cNvSpPr txBox="1"/>
-          <p:nvPr/>
-        </p:nvSpPr>
-        <p:spPr>
-          <a:xfrm>
-            <a:off x="3383280" y="1097280"/>
-            <a:ext cx="5212080" cy="868680"/>
-          </a:xfrm>
-          <a:prstGeom prst="rect">
-            <a:avLst/>
-          </a:prstGeom>
-          <a:noFill/>
-          <a:ln/>
-        </p:spPr>
-        <p:txBody>
-          <a:bodyPr wrap="square" lIns="0" tIns="0" rIns="0" bIns="0" rtlCol="0" anchor="ctr">
-            <a:normAutofit/>
-          </a:bodyPr>
-          <a:lstStyle/>
-          <a:p>
-            <a:pPr indent="0" marL="0">
-              <a:buNone/>
-            </a:pPr>
-            <a:r>
-              <a:rPr lang="en-US" sz="1700" dirty="0">
+              <a:rPr lang="en-US" sz="2100" dirty="0">
                 <a:solidFill>
                   <a:srgbClr val="1F2937"/>
                 </a:solidFill>
-                <a:latin typeface="Cambria Math" pitchFamily="34" charset="0"/>
-                <a:ea typeface="Cambria Math" pitchFamily="34" charset="-122"/>
-                <a:cs typeface="Cambria Math" pitchFamily="34" charset="-120"/>
-              </a:rPr>
-              <a:t>ḡ(t) = (1−θ) g(t) + θ ḡ(t−1)</a:t>
-            </a:r>
-            <a:endParaRPr lang="en-US" sz="1700" dirty="0"/>
-          </a:p>
-        </p:txBody>
-      </p:sp>
-      <p:sp>
-        <p:nvSpPr>
-          <p:cNvPr id="6" name="Shape 4"/>
-          <p:cNvSpPr/>
-          <p:nvPr/>
-        </p:nvSpPr>
-        <p:spPr>
-          <a:xfrm>
-            <a:off x="457200" y="2039112"/>
-            <a:ext cx="8229600" cy="868680"/>
-          </a:xfrm>
-          <a:prstGeom prst="roundRect">
-            <a:avLst>
-              <a:gd name="adj" fmla="val 8421"/>
-            </a:avLst>
-          </a:prstGeom>
-          <a:solidFill>
-            <a:srgbClr val="EEF2FF"/>
-          </a:solidFill>
-          <a:ln w="9525">
-            <a:solidFill>
-              <a:srgbClr val="C7D2FE"/>
-            </a:solidFill>
-            <a:prstDash val="solid"/>
-          </a:ln>
-        </p:spPr>
-      </p:sp>
-      <p:sp>
-        <p:nvSpPr>
-          <p:cNvPr id="7" name="Text 5"/>
-          <p:cNvSpPr txBox="1"/>
-          <p:nvPr/>
-        </p:nvSpPr>
-        <p:spPr>
-          <a:xfrm>
-            <a:off x="594360" y="2039112"/>
-            <a:ext cx="2743200" cy="868680"/>
-          </a:xfrm>
-          <a:prstGeom prst="rect">
-            <a:avLst/>
-          </a:prstGeom>
-          <a:noFill/>
-          <a:ln/>
-        </p:spPr>
-        <p:txBody>
-          <a:bodyPr wrap="square" lIns="0" tIns="0" rIns="0" bIns="0" rtlCol="0" anchor="ctr">
-            <a:normAutofit/>
-          </a:bodyPr>
-          <a:lstStyle/>
-          <a:p>
-            <a:pPr indent="0" marL="0">
-              <a:buNone/>
-            </a:pPr>
-            <a:r>
-              <a:rPr lang="en-US" sz="1400" b="1" dirty="0">
-                <a:solidFill>
-                  <a:srgbClr val="312E81"/>
-                </a:solidFill>
-              </a:rPr>
-              <a:t>2. Mesmo sinal (ḡ(t−1)·g(t) &gt; 0)</a:t>
-            </a:r>
-            <a:endParaRPr lang="en-US" sz="1400" dirty="0"/>
-          </a:p>
-        </p:txBody>
-      </p:sp>
-      <p:sp>
-        <p:nvSpPr>
-          <p:cNvPr id="8" name="Text 6"/>
-          <p:cNvSpPr txBox="1"/>
-          <p:nvPr/>
-        </p:nvSpPr>
-        <p:spPr>
-          <a:xfrm>
-            <a:off x="3383280" y="2039112"/>
-            <a:ext cx="5212080" cy="868680"/>
-          </a:xfrm>
-          <a:prstGeom prst="rect">
-            <a:avLst/>
-          </a:prstGeom>
-          <a:noFill/>
-          <a:ln/>
-        </p:spPr>
-        <p:txBody>
-          <a:bodyPr wrap="square" lIns="0" tIns="0" rIns="0" bIns="0" rtlCol="0" anchor="ctr">
-            <a:normAutofit/>
-          </a:bodyPr>
-          <a:lstStyle/>
-          <a:p>
-            <a:pPr indent="0" marL="0">
-              <a:buNone/>
-            </a:pPr>
-            <a:r>
-              <a:rPr lang="en-US" sz="1700" dirty="0">
-                <a:solidFill>
-                  <a:srgbClr val="1F2937"/>
-                </a:solidFill>
-                <a:latin typeface="Cambria Math" pitchFamily="34" charset="0"/>
-                <a:ea typeface="Cambria Math" pitchFamily="34" charset="-122"/>
-                <a:cs typeface="Cambria Math" pitchFamily="34" charset="-120"/>
-              </a:rPr>
-              <a:t>α ← α + κ</a:t>
-            </a:r>
-            <a:endParaRPr lang="en-US" sz="1700" dirty="0"/>
-          </a:p>
-        </p:txBody>
-      </p:sp>
-      <p:sp>
-        <p:nvSpPr>
-          <p:cNvPr id="9" name="Shape 7"/>
-          <p:cNvSpPr/>
-          <p:nvPr/>
-        </p:nvSpPr>
-        <p:spPr>
-          <a:xfrm>
-            <a:off x="457200" y="2980944"/>
-            <a:ext cx="8229600" cy="868680"/>
-          </a:xfrm>
-          <a:prstGeom prst="roundRect">
-            <a:avLst>
-              <a:gd name="adj" fmla="val 8421"/>
-            </a:avLst>
-          </a:prstGeom>
-          <a:solidFill>
-            <a:srgbClr val="E0E7FF"/>
-          </a:solidFill>
-          <a:ln w="9525">
-            <a:solidFill>
-              <a:srgbClr val="C7D2FE"/>
-            </a:solidFill>
-            <a:prstDash val="solid"/>
-          </a:ln>
-        </p:spPr>
-      </p:sp>
-      <p:sp>
-        <p:nvSpPr>
-          <p:cNvPr id="10" name="Text 8"/>
-          <p:cNvSpPr txBox="1"/>
-          <p:nvPr/>
-        </p:nvSpPr>
-        <p:spPr>
-          <a:xfrm>
-            <a:off x="594360" y="2980944"/>
-            <a:ext cx="2743200" cy="868680"/>
-          </a:xfrm>
-          <a:prstGeom prst="rect">
-            <a:avLst/>
-          </a:prstGeom>
-          <a:noFill/>
-          <a:ln/>
-        </p:spPr>
-        <p:txBody>
-          <a:bodyPr wrap="square" lIns="0" tIns="0" rIns="0" bIns="0" rtlCol="0" anchor="ctr">
-            <a:normAutofit/>
-          </a:bodyPr>
-          <a:lstStyle/>
-          <a:p>
-            <a:pPr indent="0" marL="0">
-              <a:buNone/>
-            </a:pPr>
-            <a:r>
-              <a:rPr lang="en-US" sz="1400" b="1" dirty="0">
-                <a:solidFill>
-                  <a:srgbClr val="312E81"/>
-                </a:solidFill>
-              </a:rPr>
-              <a:t>3. Sinais opostos (&lt; 0)</a:t>
-            </a:r>
-            <a:endParaRPr lang="en-US" sz="1400" dirty="0"/>
-          </a:p>
-        </p:txBody>
-      </p:sp>
-      <p:sp>
-        <p:nvSpPr>
-          <p:cNvPr id="11" name="Text 9"/>
-          <p:cNvSpPr txBox="1"/>
-          <p:nvPr/>
-        </p:nvSpPr>
-        <p:spPr>
-          <a:xfrm>
-            <a:off x="3383280" y="2980944"/>
-            <a:ext cx="5212080" cy="868680"/>
-          </a:xfrm>
-          <a:prstGeom prst="rect">
-            <a:avLst/>
-          </a:prstGeom>
-          <a:noFill/>
-          <a:ln/>
-        </p:spPr>
-        <p:txBody>
-          <a:bodyPr wrap="square" lIns="0" tIns="0" rIns="0" bIns="0" rtlCol="0" anchor="ctr">
-            <a:normAutofit/>
-          </a:bodyPr>
-          <a:lstStyle/>
-          <a:p>
-            <a:pPr indent="0" marL="0">
-              <a:buNone/>
-            </a:pPr>
-            <a:r>
-              <a:rPr lang="en-US" sz="1700" dirty="0">
-                <a:solidFill>
-                  <a:srgbClr val="1F2937"/>
-                </a:solidFill>
-                <a:latin typeface="Cambria Math" pitchFamily="34" charset="0"/>
-                <a:ea typeface="Cambria Math" pitchFamily="34" charset="-122"/>
-                <a:cs typeface="Cambria Math" pitchFamily="34" charset="-120"/>
-              </a:rPr>
-              <a:t>α ← (1 − φ) α</a:t>
-            </a:r>
-            <a:endParaRPr lang="en-US" sz="1700" dirty="0"/>
-          </a:p>
-        </p:txBody>
-      </p:sp>
-      <p:sp>
-        <p:nvSpPr>
-          <p:cNvPr id="12" name="Shape 10"/>
-          <p:cNvSpPr/>
-          <p:nvPr/>
-        </p:nvSpPr>
-        <p:spPr>
-          <a:xfrm>
-            <a:off x="457200" y="3922776"/>
-            <a:ext cx="8229600" cy="868680"/>
-          </a:xfrm>
-          <a:prstGeom prst="roundRect">
-            <a:avLst>
-              <a:gd name="adj" fmla="val 8421"/>
-            </a:avLst>
-          </a:prstGeom>
-          <a:solidFill>
-            <a:srgbClr val="EEF2FF"/>
-          </a:solidFill>
-          <a:ln w="9525">
-            <a:solidFill>
-              <a:srgbClr val="C7D2FE"/>
-            </a:solidFill>
-            <a:prstDash val="solid"/>
-          </a:ln>
-        </p:spPr>
-      </p:sp>
-      <p:sp>
-        <p:nvSpPr>
-          <p:cNvPr id="13" name="Text 11"/>
-          <p:cNvSpPr txBox="1"/>
-          <p:nvPr/>
-        </p:nvSpPr>
-        <p:spPr>
-          <a:xfrm>
-            <a:off x="594360" y="3922776"/>
-            <a:ext cx="2743200" cy="868680"/>
-          </a:xfrm>
-          <a:prstGeom prst="rect">
-            <a:avLst/>
-          </a:prstGeom>
-          <a:noFill/>
-          <a:ln/>
-        </p:spPr>
-        <p:txBody>
-          <a:bodyPr wrap="square" lIns="0" tIns="0" rIns="0" bIns="0" rtlCol="0" anchor="ctr">
-            <a:normAutofit/>
-          </a:bodyPr>
-          <a:lstStyle/>
-          <a:p>
-            <a:pPr indent="0" marL="0">
-              <a:buNone/>
-            </a:pPr>
-            <a:r>
-              <a:rPr lang="en-US" sz="1400" b="1" dirty="0">
-                <a:solidFill>
-                  <a:srgbClr val="312E81"/>
-                </a:solidFill>
-              </a:rPr>
-              <a:t>4. Passo</a:t>
-            </a:r>
-            <a:endParaRPr lang="en-US" sz="1400" dirty="0"/>
-          </a:p>
-        </p:txBody>
-      </p:sp>
-      <p:sp>
-        <p:nvSpPr>
-          <p:cNvPr id="14" name="Text 12"/>
-          <p:cNvSpPr txBox="1"/>
-          <p:nvPr/>
-        </p:nvSpPr>
-        <p:spPr>
-          <a:xfrm>
-            <a:off x="3383280" y="3922776"/>
-            <a:ext cx="5212080" cy="868680"/>
-          </a:xfrm>
-          <a:prstGeom prst="rect">
-            <a:avLst/>
-          </a:prstGeom>
-          <a:noFill/>
-          <a:ln/>
-        </p:spPr>
-        <p:txBody>
-          <a:bodyPr wrap="square" lIns="0" tIns="0" rIns="0" bIns="0" rtlCol="0" anchor="ctr">
-            <a:normAutofit/>
-          </a:bodyPr>
-          <a:lstStyle/>
-          <a:p>
-            <a:pPr indent="0" marL="0">
-              <a:buNone/>
-            </a:pPr>
-            <a:r>
-              <a:rPr lang="en-US" sz="1700" dirty="0">
-                <a:solidFill>
-                  <a:srgbClr val="1F2937"/>
-                </a:solidFill>
-                <a:latin typeface="Cambria Math" pitchFamily="34" charset="0"/>
-                <a:ea typeface="Cambria Math" pitchFamily="34" charset="-122"/>
-                <a:cs typeface="Cambria Math" pitchFamily="34" charset="-120"/>
-              </a:rPr>
-              <a:t>w ← w − α g</a:t>
-            </a:r>
-            <a:endParaRPr lang="en-US" sz="1700" dirty="0"/>
+              </a:rPr>
+              <a:t>Num carro com tração individual, cada roda ajusta o torque ao terreno que pisa: asfalto, lama ou gelo. No Delta-Bar-Delta, cada peso tem a sua taxa: se o gradiente mantém o sinal, acelera; se alterna, freia.</a:t>
+            </a:r>
+            <a:endParaRPr lang="en-US" sz="2100" dirty="0"/>
           </a:p>
         </p:txBody>
       </p:sp>
@@ -4820,7 +6980,7 @@
                 <a:ea typeface="Calibri" pitchFamily="34" charset="-122"/>
                 <a:cs typeface="Calibri" pitchFamily="34" charset="-120"/>
               </a:rPr>
-              <a:t>O mecanismo em um peso</a:t>
+              <a:t>Delta-delta é frágil</a:t>
             </a:r>
             <a:endParaRPr lang="en-US" sz="2600" dirty="0"/>
           </a:p>
@@ -4828,7 +6988,7 @@
       </p:sp>
       <p:pic>
         <p:nvPicPr>
-          <p:cNvPr id="3" name="Image 0" descr="Rampa ao subir; degraus ao descer.">    </p:cNvPr>
+          <p:cNvPr id="3" name="Image 0" descr="Com γ grande, a taxa fica negativa ou explode.">    </p:cNvPr>
           <p:cNvPicPr>
             <a:picLocks noChangeAspect="1"/>
           </p:cNvPicPr>
@@ -4842,8 +7002,8 @@
         </p:blipFill>
         <p:spPr>
           <a:xfrm>
-            <a:off x="2069884" y="1005840"/>
-            <a:ext cx="5004232" cy="3154680"/>
+            <a:off x="838107" y="1005840"/>
+            <a:ext cx="7467786" cy="3154680"/>
           </a:xfrm>
           <a:prstGeom prst="rect">
             <a:avLst/>
@@ -4882,7 +7042,7 @@
                   <a:srgbClr val="4B5563"/>
                 </a:solidFill>
               </a:rPr>
-              <a:t>Rampa ao subir; degraus ao descer.</a:t>
+              <a:t>Com γ grande, a taxa fica negativa ou explode.</a:t>
             </a:r>
             <a:endParaRPr lang="en-US" sz="1400" dirty="0"/>
           </a:p>
@@ -4993,46 +7153,49 @@
                 <a:ea typeface="Calibri" pitchFamily="34" charset="-122"/>
                 <a:cs typeface="Calibri" pitchFamily="34" charset="-120"/>
               </a:rPr>
-              <a:t>Cada coordenada acha sua taxa</a:t>
+              <a:t>Delta-Bar-Delta</a:t>
             </a:r>
             <a:endParaRPr lang="en-US" sz="2600" dirty="0"/>
           </a:p>
         </p:txBody>
       </p:sp>
-      <p:pic>
-        <p:nvPicPr>
-          <p:cNvPr id="3" name="Image 0" descr="Calha ½(x²+10y²): DBD em 69 iterações contra 132 do GD.">    </p:cNvPr>
-          <p:cNvPicPr>
-            <a:picLocks noChangeAspect="1"/>
-          </p:cNvPicPr>
-          <p:nvPr/>
-        </p:nvPicPr>
-        <p:blipFill>
-          <a:blip r:embed="rId1"/>
-          <a:stretch>
-            <a:fillRect/>
-          </a:stretch>
-        </p:blipFill>
-        <p:spPr>
-          <a:xfrm>
-            <a:off x="968663" y="1005840"/>
-            <a:ext cx="7206673" cy="3154680"/>
-          </a:xfrm>
-          <a:prstGeom prst="rect">
-            <a:avLst/>
-          </a:prstGeom>
-        </p:spPr>
-      </p:pic>
-      <p:sp>
-        <p:nvSpPr>
-          <p:cNvPr id="4" name="Text 1"/>
+      <p:sp>
+        <p:nvSpPr>
+          <p:cNvPr id="3" name="Shape 1"/>
+          <p:cNvSpPr/>
+          <p:nvPr/>
+        </p:nvSpPr>
+        <p:spPr>
+          <a:xfrm>
+            <a:off x="457200" y="1097280"/>
+            <a:ext cx="8229600" cy="868680"/>
+          </a:xfrm>
+          <a:prstGeom prst="roundRect">
+            <a:avLst>
+              <a:gd name="adj" fmla="val 8421"/>
+            </a:avLst>
+          </a:prstGeom>
+          <a:solidFill>
+            <a:srgbClr val="E0E7FF"/>
+          </a:solidFill>
+          <a:ln w="9525">
+            <a:solidFill>
+              <a:srgbClr val="C7D2FE"/>
+            </a:solidFill>
+            <a:prstDash val="solid"/>
+          </a:ln>
+        </p:spPr>
+      </p:sp>
+      <p:sp>
+        <p:nvSpPr>
+          <p:cNvPr id="4" name="Text 2"/>
           <p:cNvSpPr txBox="1"/>
           <p:nvPr/>
         </p:nvSpPr>
         <p:spPr>
           <a:xfrm>
-            <a:off x="457200" y="4251960"/>
-            <a:ext cx="8229600" cy="457200"/>
+            <a:off x="594360" y="1097280"/>
+            <a:ext cx="2743200" cy="868680"/>
           </a:xfrm>
           <a:prstGeom prst="rect">
             <a:avLst/>
@@ -5041,23 +7204,382 @@
           <a:ln/>
         </p:spPr>
         <p:txBody>
-          <a:bodyPr wrap="square" lIns="0" tIns="0" rIns="0" bIns="0" rtlCol="0" anchor="t">
+          <a:bodyPr wrap="square" lIns="0" tIns="0" rIns="0" bIns="0" rtlCol="0" anchor="ctr">
             <a:normAutofit/>
           </a:bodyPr>
           <a:lstStyle/>
           <a:p>
-            <a:pPr algn="ctr" indent="0" marL="0">
+            <a:pPr indent="0" marL="0">
               <a:buNone/>
             </a:pPr>
             <a:r>
-              <a:rPr lang="en-US" sz="1400" i="1" dirty="0">
-                <a:solidFill>
-                  <a:srgbClr val="4B5563"/>
-                </a:solidFill>
-              </a:rPr>
-              <a:t>Calha ½(x²+10y²): DBD em 69 iterações contra 132 do GD.</a:t>
+              <a:rPr lang="en-US" sz="1400" b="1" dirty="0">
+                <a:solidFill>
+                  <a:srgbClr val="312E81"/>
+                </a:solidFill>
+              </a:rPr>
+              <a:t>1. Média do gradiente</a:t>
             </a:r>
             <a:endParaRPr lang="en-US" sz="1400" dirty="0"/>
+          </a:p>
+        </p:txBody>
+      </p:sp>
+      <p:sp>
+        <p:nvSpPr>
+          <p:cNvPr id="5" name="Text 3"/>
+          <p:cNvSpPr txBox="1"/>
+          <p:nvPr/>
+        </p:nvSpPr>
+        <p:spPr>
+          <a:xfrm>
+            <a:off x="3383280" y="1097280"/>
+            <a:ext cx="5212080" cy="868680"/>
+          </a:xfrm>
+          <a:prstGeom prst="rect">
+            <a:avLst/>
+          </a:prstGeom>
+          <a:noFill/>
+          <a:ln/>
+        </p:spPr>
+        <p:txBody>
+          <a:bodyPr wrap="square" lIns="0" tIns="0" rIns="0" bIns="0" rtlCol="0" anchor="ctr">
+            <a:normAutofit/>
+          </a:bodyPr>
+          <a:lstStyle/>
+          <a:p>
+            <a:pPr indent="0" marL="0">
+              <a:buNone/>
+            </a:pPr>
+            <a:r>
+              <a:rPr lang="en-US" sz="1700" dirty="0">
+                <a:solidFill>
+                  <a:srgbClr val="1F2937"/>
+                </a:solidFill>
+                <a:latin typeface="Cambria Math" pitchFamily="34" charset="0"/>
+                <a:ea typeface="Cambria Math" pitchFamily="34" charset="-122"/>
+                <a:cs typeface="Cambria Math" pitchFamily="34" charset="-120"/>
+              </a:rPr>
+              <a:t>ḡ(t) = (1−θ) g(t) + θ ḡ(t−1)</a:t>
+            </a:r>
+            <a:endParaRPr lang="en-US" sz="1700" dirty="0"/>
+          </a:p>
+        </p:txBody>
+      </p:sp>
+      <p:sp>
+        <p:nvSpPr>
+          <p:cNvPr id="6" name="Shape 4"/>
+          <p:cNvSpPr/>
+          <p:nvPr/>
+        </p:nvSpPr>
+        <p:spPr>
+          <a:xfrm>
+            <a:off x="457200" y="2039112"/>
+            <a:ext cx="8229600" cy="868680"/>
+          </a:xfrm>
+          <a:prstGeom prst="roundRect">
+            <a:avLst>
+              <a:gd name="adj" fmla="val 8421"/>
+            </a:avLst>
+          </a:prstGeom>
+          <a:solidFill>
+            <a:srgbClr val="EEF2FF"/>
+          </a:solidFill>
+          <a:ln w="9525">
+            <a:solidFill>
+              <a:srgbClr val="C7D2FE"/>
+            </a:solidFill>
+            <a:prstDash val="solid"/>
+          </a:ln>
+        </p:spPr>
+      </p:sp>
+      <p:sp>
+        <p:nvSpPr>
+          <p:cNvPr id="7" name="Text 5"/>
+          <p:cNvSpPr txBox="1"/>
+          <p:nvPr/>
+        </p:nvSpPr>
+        <p:spPr>
+          <a:xfrm>
+            <a:off x="594360" y="2039112"/>
+            <a:ext cx="2743200" cy="868680"/>
+          </a:xfrm>
+          <a:prstGeom prst="rect">
+            <a:avLst/>
+          </a:prstGeom>
+          <a:noFill/>
+          <a:ln/>
+        </p:spPr>
+        <p:txBody>
+          <a:bodyPr wrap="square" lIns="0" tIns="0" rIns="0" bIns="0" rtlCol="0" anchor="ctr">
+            <a:normAutofit/>
+          </a:bodyPr>
+          <a:lstStyle/>
+          <a:p>
+            <a:pPr indent="0" marL="0">
+              <a:buNone/>
+            </a:pPr>
+            <a:r>
+              <a:rPr lang="en-US" sz="1400" b="1" dirty="0">
+                <a:solidFill>
+                  <a:srgbClr val="312E81"/>
+                </a:solidFill>
+              </a:rPr>
+              <a:t>2. Mesmo sinal (ḡ(t−1)·g(t) &gt; 0)</a:t>
+            </a:r>
+            <a:endParaRPr lang="en-US" sz="1400" dirty="0"/>
+          </a:p>
+        </p:txBody>
+      </p:sp>
+      <p:sp>
+        <p:nvSpPr>
+          <p:cNvPr id="8" name="Text 6"/>
+          <p:cNvSpPr txBox="1"/>
+          <p:nvPr/>
+        </p:nvSpPr>
+        <p:spPr>
+          <a:xfrm>
+            <a:off x="3383280" y="2039112"/>
+            <a:ext cx="5212080" cy="868680"/>
+          </a:xfrm>
+          <a:prstGeom prst="rect">
+            <a:avLst/>
+          </a:prstGeom>
+          <a:noFill/>
+          <a:ln/>
+        </p:spPr>
+        <p:txBody>
+          <a:bodyPr wrap="square" lIns="0" tIns="0" rIns="0" bIns="0" rtlCol="0" anchor="ctr">
+            <a:normAutofit/>
+          </a:bodyPr>
+          <a:lstStyle/>
+          <a:p>
+            <a:pPr indent="0" marL="0">
+              <a:buNone/>
+            </a:pPr>
+            <a:r>
+              <a:rPr lang="en-US" sz="1700" dirty="0">
+                <a:solidFill>
+                  <a:srgbClr val="1F2937"/>
+                </a:solidFill>
+                <a:latin typeface="Cambria Math" pitchFamily="34" charset="0"/>
+                <a:ea typeface="Cambria Math" pitchFamily="34" charset="-122"/>
+                <a:cs typeface="Cambria Math" pitchFamily="34" charset="-120"/>
+              </a:rPr>
+              <a:t>α ← α + κ</a:t>
+            </a:r>
+            <a:endParaRPr lang="en-US" sz="1700" dirty="0"/>
+          </a:p>
+        </p:txBody>
+      </p:sp>
+      <p:sp>
+        <p:nvSpPr>
+          <p:cNvPr id="9" name="Shape 7"/>
+          <p:cNvSpPr/>
+          <p:nvPr/>
+        </p:nvSpPr>
+        <p:spPr>
+          <a:xfrm>
+            <a:off x="457200" y="2980944"/>
+            <a:ext cx="8229600" cy="868680"/>
+          </a:xfrm>
+          <a:prstGeom prst="roundRect">
+            <a:avLst>
+              <a:gd name="adj" fmla="val 8421"/>
+            </a:avLst>
+          </a:prstGeom>
+          <a:solidFill>
+            <a:srgbClr val="E0E7FF"/>
+          </a:solidFill>
+          <a:ln w="9525">
+            <a:solidFill>
+              <a:srgbClr val="C7D2FE"/>
+            </a:solidFill>
+            <a:prstDash val="solid"/>
+          </a:ln>
+        </p:spPr>
+      </p:sp>
+      <p:sp>
+        <p:nvSpPr>
+          <p:cNvPr id="10" name="Text 8"/>
+          <p:cNvSpPr txBox="1"/>
+          <p:nvPr/>
+        </p:nvSpPr>
+        <p:spPr>
+          <a:xfrm>
+            <a:off x="594360" y="2980944"/>
+            <a:ext cx="2743200" cy="868680"/>
+          </a:xfrm>
+          <a:prstGeom prst="rect">
+            <a:avLst/>
+          </a:prstGeom>
+          <a:noFill/>
+          <a:ln/>
+        </p:spPr>
+        <p:txBody>
+          <a:bodyPr wrap="square" lIns="0" tIns="0" rIns="0" bIns="0" rtlCol="0" anchor="ctr">
+            <a:normAutofit/>
+          </a:bodyPr>
+          <a:lstStyle/>
+          <a:p>
+            <a:pPr indent="0" marL="0">
+              <a:buNone/>
+            </a:pPr>
+            <a:r>
+              <a:rPr lang="en-US" sz="1400" b="1" dirty="0">
+                <a:solidFill>
+                  <a:srgbClr val="312E81"/>
+                </a:solidFill>
+              </a:rPr>
+              <a:t>3. Sinais opostos (&lt; 0)</a:t>
+            </a:r>
+            <a:endParaRPr lang="en-US" sz="1400" dirty="0"/>
+          </a:p>
+        </p:txBody>
+      </p:sp>
+      <p:sp>
+        <p:nvSpPr>
+          <p:cNvPr id="11" name="Text 9"/>
+          <p:cNvSpPr txBox="1"/>
+          <p:nvPr/>
+        </p:nvSpPr>
+        <p:spPr>
+          <a:xfrm>
+            <a:off x="3383280" y="2980944"/>
+            <a:ext cx="5212080" cy="868680"/>
+          </a:xfrm>
+          <a:prstGeom prst="rect">
+            <a:avLst/>
+          </a:prstGeom>
+          <a:noFill/>
+          <a:ln/>
+        </p:spPr>
+        <p:txBody>
+          <a:bodyPr wrap="square" lIns="0" tIns="0" rIns="0" bIns="0" rtlCol="0" anchor="ctr">
+            <a:normAutofit/>
+          </a:bodyPr>
+          <a:lstStyle/>
+          <a:p>
+            <a:pPr indent="0" marL="0">
+              <a:buNone/>
+            </a:pPr>
+            <a:r>
+              <a:rPr lang="en-US" sz="1700" dirty="0">
+                <a:solidFill>
+                  <a:srgbClr val="1F2937"/>
+                </a:solidFill>
+                <a:latin typeface="Cambria Math" pitchFamily="34" charset="0"/>
+                <a:ea typeface="Cambria Math" pitchFamily="34" charset="-122"/>
+                <a:cs typeface="Cambria Math" pitchFamily="34" charset="-120"/>
+              </a:rPr>
+              <a:t>α ← (1 − φ) α</a:t>
+            </a:r>
+            <a:endParaRPr lang="en-US" sz="1700" dirty="0"/>
+          </a:p>
+        </p:txBody>
+      </p:sp>
+      <p:sp>
+        <p:nvSpPr>
+          <p:cNvPr id="12" name="Shape 10"/>
+          <p:cNvSpPr/>
+          <p:nvPr/>
+        </p:nvSpPr>
+        <p:spPr>
+          <a:xfrm>
+            <a:off x="457200" y="3922776"/>
+            <a:ext cx="8229600" cy="868680"/>
+          </a:xfrm>
+          <a:prstGeom prst="roundRect">
+            <a:avLst>
+              <a:gd name="adj" fmla="val 8421"/>
+            </a:avLst>
+          </a:prstGeom>
+          <a:solidFill>
+            <a:srgbClr val="EEF2FF"/>
+          </a:solidFill>
+          <a:ln w="9525">
+            <a:solidFill>
+              <a:srgbClr val="C7D2FE"/>
+            </a:solidFill>
+            <a:prstDash val="solid"/>
+          </a:ln>
+        </p:spPr>
+      </p:sp>
+      <p:sp>
+        <p:nvSpPr>
+          <p:cNvPr id="13" name="Text 11"/>
+          <p:cNvSpPr txBox="1"/>
+          <p:nvPr/>
+        </p:nvSpPr>
+        <p:spPr>
+          <a:xfrm>
+            <a:off x="594360" y="3922776"/>
+            <a:ext cx="2743200" cy="868680"/>
+          </a:xfrm>
+          <a:prstGeom prst="rect">
+            <a:avLst/>
+          </a:prstGeom>
+          <a:noFill/>
+          <a:ln/>
+        </p:spPr>
+        <p:txBody>
+          <a:bodyPr wrap="square" lIns="0" tIns="0" rIns="0" bIns="0" rtlCol="0" anchor="ctr">
+            <a:normAutofit/>
+          </a:bodyPr>
+          <a:lstStyle/>
+          <a:p>
+            <a:pPr indent="0" marL="0">
+              <a:buNone/>
+            </a:pPr>
+            <a:r>
+              <a:rPr lang="en-US" sz="1400" b="1" dirty="0">
+                <a:solidFill>
+                  <a:srgbClr val="312E81"/>
+                </a:solidFill>
+              </a:rPr>
+              <a:t>4. Passo</a:t>
+            </a:r>
+            <a:endParaRPr lang="en-US" sz="1400" dirty="0"/>
+          </a:p>
+        </p:txBody>
+      </p:sp>
+      <p:sp>
+        <p:nvSpPr>
+          <p:cNvPr id="14" name="Text 12"/>
+          <p:cNvSpPr txBox="1"/>
+          <p:nvPr/>
+        </p:nvSpPr>
+        <p:spPr>
+          <a:xfrm>
+            <a:off x="3383280" y="3922776"/>
+            <a:ext cx="5212080" cy="868680"/>
+          </a:xfrm>
+          <a:prstGeom prst="rect">
+            <a:avLst/>
+          </a:prstGeom>
+          <a:noFill/>
+          <a:ln/>
+        </p:spPr>
+        <p:txBody>
+          <a:bodyPr wrap="square" lIns="0" tIns="0" rIns="0" bIns="0" rtlCol="0" anchor="ctr">
+            <a:normAutofit/>
+          </a:bodyPr>
+          <a:lstStyle/>
+          <a:p>
+            <a:pPr indent="0" marL="0">
+              <a:buNone/>
+            </a:pPr>
+            <a:r>
+              <a:rPr lang="en-US" sz="1700" dirty="0">
+                <a:solidFill>
+                  <a:srgbClr val="1F2937"/>
+                </a:solidFill>
+                <a:latin typeface="Cambria Math" pitchFamily="34" charset="0"/>
+                <a:ea typeface="Cambria Math" pitchFamily="34" charset="-122"/>
+                <a:cs typeface="Cambria Math" pitchFamily="34" charset="-120"/>
+              </a:rPr>
+              <a:t>w ← w − α g</a:t>
+            </a:r>
+            <a:endParaRPr lang="en-US" sz="1700" dirty="0"/>
           </a:p>
         </p:txBody>
       </p:sp>
@@ -5166,49 +7688,46 @@
                 <a:ea typeface="Calibri" pitchFamily="34" charset="-122"/>
                 <a:cs typeface="Calibri" pitchFamily="34" charset="-120"/>
               </a:rPr>
-              <a:t>EDBD (versão didática do livro)</a:t>
+              <a:t>O mecanismo em um peso</a:t>
             </a:r>
             <a:endParaRPr lang="en-US" sz="2600" dirty="0"/>
           </a:p>
         </p:txBody>
       </p:sp>
-      <p:sp>
-        <p:nvSpPr>
-          <p:cNvPr id="3" name="Shape 1"/>
-          <p:cNvSpPr/>
-          <p:nvPr/>
-        </p:nvSpPr>
-        <p:spPr>
-          <a:xfrm>
-            <a:off x="457200" y="1097280"/>
-            <a:ext cx="8229600" cy="868680"/>
-          </a:xfrm>
-          <a:prstGeom prst="roundRect">
-            <a:avLst>
-              <a:gd name="adj" fmla="val 8421"/>
-            </a:avLst>
-          </a:prstGeom>
-          <a:solidFill>
-            <a:srgbClr val="E0E7FF"/>
-          </a:solidFill>
-          <a:ln w="9525">
-            <a:solidFill>
-              <a:srgbClr val="C7D2FE"/>
-            </a:solidFill>
-            <a:prstDash val="solid"/>
-          </a:ln>
-        </p:spPr>
-      </p:sp>
-      <p:sp>
-        <p:nvSpPr>
-          <p:cNvPr id="4" name="Text 2"/>
+      <p:pic>
+        <p:nvPicPr>
+          <p:cNvPr id="3" name="Image 0" descr="Rampa ao subir; degraus ao descer.">    </p:cNvPr>
+          <p:cNvPicPr>
+            <a:picLocks noChangeAspect="1"/>
+          </p:cNvPicPr>
+          <p:nvPr/>
+        </p:nvPicPr>
+        <p:blipFill>
+          <a:blip r:embed="rId1"/>
+          <a:stretch>
+            <a:fillRect/>
+          </a:stretch>
+        </p:blipFill>
+        <p:spPr>
+          <a:xfrm>
+            <a:off x="2069884" y="1005840"/>
+            <a:ext cx="5004232" cy="3154680"/>
+          </a:xfrm>
+          <a:prstGeom prst="rect">
+            <a:avLst/>
+          </a:prstGeom>
+        </p:spPr>
+      </p:pic>
+      <p:sp>
+        <p:nvSpPr>
+          <p:cNvPr id="4" name="Text 1"/>
           <p:cNvSpPr txBox="1"/>
           <p:nvPr/>
         </p:nvSpPr>
         <p:spPr>
           <a:xfrm>
-            <a:off x="594360" y="1097280"/>
-            <a:ext cx="2743200" cy="868680"/>
+            <a:off x="457200" y="4251960"/>
+            <a:ext cx="8229600" cy="457200"/>
           </a:xfrm>
           <a:prstGeom prst="rect">
             <a:avLst/>
@@ -5217,382 +7736,23 @@
           <a:ln/>
         </p:spPr>
         <p:txBody>
-          <a:bodyPr wrap="square" lIns="0" tIns="0" rIns="0" bIns="0" rtlCol="0" anchor="ctr">
+          <a:bodyPr wrap="square" lIns="0" tIns="0" rIns="0" bIns="0" rtlCol="0" anchor="t">
             <a:normAutofit/>
           </a:bodyPr>
           <a:lstStyle/>
           <a:p>
-            <a:pPr indent="0" marL="0">
+            <a:pPr algn="ctr" indent="0" marL="0">
               <a:buNone/>
             </a:pPr>
             <a:r>
-              <a:rPr lang="en-US" sz="1400" b="1" dirty="0">
-                <a:solidFill>
-                  <a:srgbClr val="312E81"/>
-                </a:solidFill>
-              </a:rPr>
-              <a:t>1. Aumento amortecido</a:t>
+              <a:rPr lang="en-US" sz="1400" i="1" dirty="0">
+                <a:solidFill>
+                  <a:srgbClr val="4B5563"/>
+                </a:solidFill>
+              </a:rPr>
+              <a:t>Rampa ao subir; degraus ao descer.</a:t>
             </a:r>
             <a:endParaRPr lang="en-US" sz="1400" dirty="0"/>
-          </a:p>
-        </p:txBody>
-      </p:sp>
-      <p:sp>
-        <p:nvSpPr>
-          <p:cNvPr id="5" name="Text 3"/>
-          <p:cNvSpPr txBox="1"/>
-          <p:nvPr/>
-        </p:nvSpPr>
-        <p:spPr>
-          <a:xfrm>
-            <a:off x="3383280" y="1097280"/>
-            <a:ext cx="5212080" cy="868680"/>
-          </a:xfrm>
-          <a:prstGeom prst="rect">
-            <a:avLst/>
-          </a:prstGeom>
-          <a:noFill/>
-          <a:ln/>
-        </p:spPr>
-        <p:txBody>
-          <a:bodyPr wrap="square" lIns="0" tIns="0" rIns="0" bIns="0" rtlCol="0" anchor="ctr">
-            <a:normAutofit/>
-          </a:bodyPr>
-          <a:lstStyle/>
-          <a:p>
-            <a:pPr indent="0" marL="0">
-              <a:buNone/>
-            </a:pPr>
-            <a:r>
-              <a:rPr lang="en-US" sz="1700" dirty="0">
-                <a:solidFill>
-                  <a:srgbClr val="1F2937"/>
-                </a:solidFill>
-                <a:latin typeface="Cambria Math" pitchFamily="34" charset="0"/>
-                <a:ea typeface="Cambria Math" pitchFamily="34" charset="-122"/>
-                <a:cs typeface="Cambria Math" pitchFamily="34" charset="-120"/>
-              </a:rPr>
-              <a:t>α ← min(α + κ_α e^(−γ|ḡ|), α_max)</a:t>
-            </a:r>
-            <a:endParaRPr lang="en-US" sz="1700" dirty="0"/>
-          </a:p>
-        </p:txBody>
-      </p:sp>
-      <p:sp>
-        <p:nvSpPr>
-          <p:cNvPr id="6" name="Shape 4"/>
-          <p:cNvSpPr/>
-          <p:nvPr/>
-        </p:nvSpPr>
-        <p:spPr>
-          <a:xfrm>
-            <a:off x="457200" y="2039112"/>
-            <a:ext cx="8229600" cy="868680"/>
-          </a:xfrm>
-          <a:prstGeom prst="roundRect">
-            <a:avLst>
-              <a:gd name="adj" fmla="val 8421"/>
-            </a:avLst>
-          </a:prstGeom>
-          <a:solidFill>
-            <a:srgbClr val="EEF2FF"/>
-          </a:solidFill>
-          <a:ln w="9525">
-            <a:solidFill>
-              <a:srgbClr val="C7D2FE"/>
-            </a:solidFill>
-            <a:prstDash val="solid"/>
-          </a:ln>
-        </p:spPr>
-      </p:sp>
-      <p:sp>
-        <p:nvSpPr>
-          <p:cNvPr id="7" name="Text 5"/>
-          <p:cNvSpPr txBox="1"/>
-          <p:nvPr/>
-        </p:nvSpPr>
-        <p:spPr>
-          <a:xfrm>
-            <a:off x="594360" y="2039112"/>
-            <a:ext cx="2743200" cy="868680"/>
-          </a:xfrm>
-          <a:prstGeom prst="rect">
-            <a:avLst/>
-          </a:prstGeom>
-          <a:noFill/>
-          <a:ln/>
-        </p:spPr>
-        <p:txBody>
-          <a:bodyPr wrap="square" lIns="0" tIns="0" rIns="0" bIns="0" rtlCol="0" anchor="ctr">
-            <a:normAutofit/>
-          </a:bodyPr>
-          <a:lstStyle/>
-          <a:p>
-            <a:pPr indent="0" marL="0">
-              <a:buNone/>
-            </a:pPr>
-            <a:r>
-              <a:rPr lang="en-US" sz="1400" b="1" dirty="0">
-                <a:solidFill>
-                  <a:srgbClr val="312E81"/>
-                </a:solidFill>
-              </a:rPr>
-              <a:t>2. Redução</a:t>
-            </a:r>
-            <a:endParaRPr lang="en-US" sz="1400" dirty="0"/>
-          </a:p>
-        </p:txBody>
-      </p:sp>
-      <p:sp>
-        <p:nvSpPr>
-          <p:cNvPr id="8" name="Text 6"/>
-          <p:cNvSpPr txBox="1"/>
-          <p:nvPr/>
-        </p:nvSpPr>
-        <p:spPr>
-          <a:xfrm>
-            <a:off x="3383280" y="2039112"/>
-            <a:ext cx="5212080" cy="868680"/>
-          </a:xfrm>
-          <a:prstGeom prst="rect">
-            <a:avLst/>
-          </a:prstGeom>
-          <a:noFill/>
-          <a:ln/>
-        </p:spPr>
-        <p:txBody>
-          <a:bodyPr wrap="square" lIns="0" tIns="0" rIns="0" bIns="0" rtlCol="0" anchor="ctr">
-            <a:normAutofit/>
-          </a:bodyPr>
-          <a:lstStyle/>
-          <a:p>
-            <a:pPr indent="0" marL="0">
-              <a:buNone/>
-            </a:pPr>
-            <a:r>
-              <a:rPr lang="en-US" sz="1700" dirty="0">
-                <a:solidFill>
-                  <a:srgbClr val="1F2937"/>
-                </a:solidFill>
-                <a:latin typeface="Cambria Math" pitchFamily="34" charset="0"/>
-                <a:ea typeface="Cambria Math" pitchFamily="34" charset="-122"/>
-                <a:cs typeface="Cambria Math" pitchFamily="34" charset="-120"/>
-              </a:rPr>
-              <a:t>α ← (1 − φ_α) α</a:t>
-            </a:r>
-            <a:endParaRPr lang="en-US" sz="1700" dirty="0"/>
-          </a:p>
-        </p:txBody>
-      </p:sp>
-      <p:sp>
-        <p:nvSpPr>
-          <p:cNvPr id="9" name="Shape 7"/>
-          <p:cNvSpPr/>
-          <p:nvPr/>
-        </p:nvSpPr>
-        <p:spPr>
-          <a:xfrm>
-            <a:off x="457200" y="2980944"/>
-            <a:ext cx="8229600" cy="868680"/>
-          </a:xfrm>
-          <a:prstGeom prst="roundRect">
-            <a:avLst>
-              <a:gd name="adj" fmla="val 8421"/>
-            </a:avLst>
-          </a:prstGeom>
-          <a:solidFill>
-            <a:srgbClr val="E0E7FF"/>
-          </a:solidFill>
-          <a:ln w="9525">
-            <a:solidFill>
-              <a:srgbClr val="C7D2FE"/>
-            </a:solidFill>
-            <a:prstDash val="solid"/>
-          </a:ln>
-        </p:spPr>
-      </p:sp>
-      <p:sp>
-        <p:nvSpPr>
-          <p:cNvPr id="10" name="Text 8"/>
-          <p:cNvSpPr txBox="1"/>
-          <p:nvPr/>
-        </p:nvSpPr>
-        <p:spPr>
-          <a:xfrm>
-            <a:off x="594360" y="2980944"/>
-            <a:ext cx="2743200" cy="868680"/>
-          </a:xfrm>
-          <a:prstGeom prst="rect">
-            <a:avLst/>
-          </a:prstGeom>
-          <a:noFill/>
-          <a:ln/>
-        </p:spPr>
-        <p:txBody>
-          <a:bodyPr wrap="square" lIns="0" tIns="0" rIns="0" bIns="0" rtlCol="0" anchor="ctr">
-            <a:normAutofit/>
-          </a:bodyPr>
-          <a:lstStyle/>
-          <a:p>
-            <a:pPr indent="0" marL="0">
-              <a:buNone/>
-            </a:pPr>
-            <a:r>
-              <a:rPr lang="en-US" sz="1400" b="1" dirty="0">
-                <a:solidFill>
-                  <a:srgbClr val="312E81"/>
-                </a:solidFill>
-              </a:rPr>
-              <a:t>3. Momento individual</a:t>
-            </a:r>
-            <a:endParaRPr lang="en-US" sz="1400" dirty="0"/>
-          </a:p>
-        </p:txBody>
-      </p:sp>
-      <p:sp>
-        <p:nvSpPr>
-          <p:cNvPr id="11" name="Text 9"/>
-          <p:cNvSpPr txBox="1"/>
-          <p:nvPr/>
-        </p:nvSpPr>
-        <p:spPr>
-          <a:xfrm>
-            <a:off x="3383280" y="2980944"/>
-            <a:ext cx="5212080" cy="868680"/>
-          </a:xfrm>
-          <a:prstGeom prst="rect">
-            <a:avLst/>
-          </a:prstGeom>
-          <a:noFill/>
-          <a:ln/>
-        </p:spPr>
-        <p:txBody>
-          <a:bodyPr wrap="square" lIns="0" tIns="0" rIns="0" bIns="0" rtlCol="0" anchor="ctr">
-            <a:normAutofit/>
-          </a:bodyPr>
-          <a:lstStyle/>
-          <a:p>
-            <a:pPr indent="0" marL="0">
-              <a:buNone/>
-            </a:pPr>
-            <a:r>
-              <a:rPr lang="en-US" sz="1700" dirty="0">
-                <a:solidFill>
-                  <a:srgbClr val="1F2937"/>
-                </a:solidFill>
-                <a:latin typeface="Cambria Math" pitchFamily="34" charset="0"/>
-                <a:ea typeface="Cambria Math" pitchFamily="34" charset="-122"/>
-                <a:cs typeface="Cambria Math" pitchFamily="34" charset="-120"/>
-              </a:rPr>
-              <a:t>μ com regra análoga, μ ≤ μ_max</a:t>
-            </a:r>
-            <a:endParaRPr lang="en-US" sz="1700" dirty="0"/>
-          </a:p>
-        </p:txBody>
-      </p:sp>
-      <p:sp>
-        <p:nvSpPr>
-          <p:cNvPr id="12" name="Shape 10"/>
-          <p:cNvSpPr/>
-          <p:nvPr/>
-        </p:nvSpPr>
-        <p:spPr>
-          <a:xfrm>
-            <a:off x="457200" y="3922776"/>
-            <a:ext cx="8229600" cy="868680"/>
-          </a:xfrm>
-          <a:prstGeom prst="roundRect">
-            <a:avLst>
-              <a:gd name="adj" fmla="val 8421"/>
-            </a:avLst>
-          </a:prstGeom>
-          <a:solidFill>
-            <a:srgbClr val="EEF2FF"/>
-          </a:solidFill>
-          <a:ln w="9525">
-            <a:solidFill>
-              <a:srgbClr val="C7D2FE"/>
-            </a:solidFill>
-            <a:prstDash val="solid"/>
-          </a:ln>
-        </p:spPr>
-      </p:sp>
-      <p:sp>
-        <p:nvSpPr>
-          <p:cNvPr id="13" name="Text 11"/>
-          <p:cNvSpPr txBox="1"/>
-          <p:nvPr/>
-        </p:nvSpPr>
-        <p:spPr>
-          <a:xfrm>
-            <a:off x="594360" y="3922776"/>
-            <a:ext cx="2743200" cy="868680"/>
-          </a:xfrm>
-          <a:prstGeom prst="rect">
-            <a:avLst/>
-          </a:prstGeom>
-          <a:noFill/>
-          <a:ln/>
-        </p:spPr>
-        <p:txBody>
-          <a:bodyPr wrap="square" lIns="0" tIns="0" rIns="0" bIns="0" rtlCol="0" anchor="ctr">
-            <a:normAutofit/>
-          </a:bodyPr>
-          <a:lstStyle/>
-          <a:p>
-            <a:pPr indent="0" marL="0">
-              <a:buNone/>
-            </a:pPr>
-            <a:r>
-              <a:rPr lang="en-US" sz="1400" b="1" dirty="0">
-                <a:solidFill>
-                  <a:srgbClr val="312E81"/>
-                </a:solidFill>
-              </a:rPr>
-              <a:t>4. Passo</a:t>
-            </a:r>
-            <a:endParaRPr lang="en-US" sz="1400" dirty="0"/>
-          </a:p>
-        </p:txBody>
-      </p:sp>
-      <p:sp>
-        <p:nvSpPr>
-          <p:cNvPr id="14" name="Text 12"/>
-          <p:cNvSpPr txBox="1"/>
-          <p:nvPr/>
-        </p:nvSpPr>
-        <p:spPr>
-          <a:xfrm>
-            <a:off x="3383280" y="3922776"/>
-            <a:ext cx="5212080" cy="868680"/>
-          </a:xfrm>
-          <a:prstGeom prst="rect">
-            <a:avLst/>
-          </a:prstGeom>
-          <a:noFill/>
-          <a:ln/>
-        </p:spPr>
-        <p:txBody>
-          <a:bodyPr wrap="square" lIns="0" tIns="0" rIns="0" bIns="0" rtlCol="0" anchor="ctr">
-            <a:normAutofit/>
-          </a:bodyPr>
-          <a:lstStyle/>
-          <a:p>
-            <a:pPr indent="0" marL="0">
-              <a:buNone/>
-            </a:pPr>
-            <a:r>
-              <a:rPr lang="en-US" sz="1700" dirty="0">
-                <a:solidFill>
-                  <a:srgbClr val="1F2937"/>
-                </a:solidFill>
-                <a:latin typeface="Cambria Math" pitchFamily="34" charset="0"/>
-                <a:ea typeface="Cambria Math" pitchFamily="34" charset="-122"/>
-                <a:cs typeface="Cambria Math" pitchFamily="34" charset="-120"/>
-              </a:rPr>
-              <a:t>Δw = −α g + μ Δw(t−1)</a:t>
-            </a:r>
-            <a:endParaRPr lang="en-US" sz="1700" dirty="0"/>
           </a:p>
         </p:txBody>
       </p:sp>
@@ -5701,7 +7861,7 @@
                 <a:ea typeface="Calibri" pitchFamily="34" charset="-122"/>
                 <a:cs typeface="Calibri" pitchFamily="34" charset="-120"/>
               </a:rPr>
-              <a:t>Rede 1–8–1: comparação com protocolo</a:t>
+              <a:t>Cada coordenada acha sua taxa</a:t>
             </a:r>
             <a:endParaRPr lang="en-US" sz="2600" dirty="0"/>
           </a:p>
@@ -5709,7 +7869,7 @@
       </p:sp>
       <p:pic>
         <p:nvPicPr>
-          <p:cNvPr id="3" name="Image 0" descr="Hiperparâmetros ajustados em 5 sementes; avaliação em 10 outras.">    </p:cNvPr>
+          <p:cNvPr id="3" name="Image 0" descr="Calha ½(x²+10y²): DBD em 69 iterações contra 132 do GD.">    </p:cNvPr>
           <p:cNvPicPr>
             <a:picLocks noChangeAspect="1"/>
           </p:cNvPicPr>
@@ -5723,8 +7883,8 @@
         </p:blipFill>
         <p:spPr>
           <a:xfrm>
-            <a:off x="939400" y="1005840"/>
-            <a:ext cx="7265199" cy="3154680"/>
+            <a:off x="968663" y="1005840"/>
+            <a:ext cx="7206673" cy="3154680"/>
           </a:xfrm>
           <a:prstGeom prst="rect">
             <a:avLst/>
@@ -5763,7 +7923,7 @@
                   <a:srgbClr val="4B5563"/>
                 </a:solidFill>
               </a:rPr>
-              <a:t>Hiperparâmetros ajustados em 5 sementes; avaliação em 10 outras.</a:t>
+              <a:t>Calha ½(x²+10y²): DBD em 69 iterações contra 132 do GD.</a:t>
             </a:r>
             <a:endParaRPr lang="en-US" sz="1400" dirty="0"/>
           </a:p>
